--- a/Mikrocontroller_GFS.pptx
+++ b/Mikrocontroller_GFS.pptx
@@ -29,6 +29,11 @@
     <p:sldId id="274" r:id="rId22"/>
     <p:sldId id="275" r:id="rId23"/>
     <p:sldId id="276" r:id="rId24"/>
+    <p:sldId id="277" r:id="rId25"/>
+    <p:sldId id="278" r:id="rId26"/>
+    <p:sldId id="279" r:id="rId27"/>
+    <p:sldId id="280" r:id="rId28"/>
+    <p:sldId id="281" r:id="rId29"/>
   </p:sldIdLst>
   <p:sldSz cx="10077450" cy="5668963"/>
   <p:notesSz cx="7772400" cy="10058400"/>
@@ -385,7 +390,7 @@
             <a:pPr indent="0" algn="r">
               <a:buNone/>
             </a:pPr>
-            <a:fld id="{A4820C58-440A-49F5-BA60-624AA449B03B}" type="slidenum">
+            <a:fld id="{1D49403E-CE31-4276-99C1-A0B279DF37F1}" type="slidenum">
               <a:rPr lang="en-US" sz="1400" b="0" u="none" strike="noStrike">
                 <a:solidFill>
                   <a:srgbClr val="000000"/>
@@ -432,7 +437,7 @@
       </p:grpSpPr>
       <p:sp>
         <p:nvSpPr>
-          <p:cNvPr id="96" name="PlaceHolder 1"/>
+          <p:cNvPr id="109" name="PlaceHolder 1"/>
           <p:cNvSpPr>
             <a:spLocks noGrp="1"/>
           </p:cNvSpPr>
@@ -455,7 +460,7 @@
       </p:sp>
       <p:sp>
         <p:nvSpPr>
-          <p:cNvPr id="97" name="PlaceHolder 2"/>
+          <p:cNvPr id="110" name="PlaceHolder 2"/>
           <p:cNvSpPr>
             <a:spLocks noGrp="1"/>
           </p:cNvSpPr>
@@ -493,7 +498,7 @@
                 <a:uFillTx/>
                 <a:latin typeface="Arial"/>
               </a:rPr>
-              <a:t>4-Bit CPU</a:t>
+              <a:t>490€</a:t>
             </a:r>
             <a:endParaRPr lang="en-US" sz="2000" b="0" u="none" strike="noStrike">
               <a:solidFill>
@@ -517,7 +522,7 @@
                 <a:uFillTx/>
                 <a:latin typeface="Arial"/>
               </a:rPr>
-              <a:t>60$ heute ca. 490$</a:t>
+              <a:t>8 Kerne</a:t>
             </a:r>
             <a:endParaRPr lang="en-US" sz="2000" b="0" u="none" strike="noStrike">
               <a:solidFill>
@@ -541,7 +546,7 @@
                 <a:uFillTx/>
                 <a:latin typeface="Arial"/>
               </a:rPr>
-              <a:t>Man benötigte noch andere Chips wie Speicher und I/O Systeme wodurch ein System 1970 mehrere hundert Dollar kostete was heute mehreren tausend Dollar entsprechen würde</a:t>
+              <a:t>4,7 – 5,6 GHz Taktgeschwindigkeit</a:t>
             </a:r>
             <a:endParaRPr lang="en-US" sz="2000" b="0" u="none" strike="noStrike">
               <a:solidFill>
@@ -578,7 +583,7 @@
       </p:grpSpPr>
       <p:sp>
         <p:nvSpPr>
-          <p:cNvPr id="98" name="PlaceHolder 1"/>
+          <p:cNvPr id="111" name="PlaceHolder 1"/>
           <p:cNvSpPr>
             <a:spLocks noGrp="1"/>
           </p:cNvSpPr>
@@ -601,7 +606,7 @@
       </p:sp>
       <p:sp>
         <p:nvSpPr>
-          <p:cNvPr id="99" name="PlaceHolder 2"/>
+          <p:cNvPr id="112" name="PlaceHolder 2"/>
           <p:cNvSpPr>
             <a:spLocks noGrp="1"/>
           </p:cNvSpPr>
@@ -639,7 +644,7 @@
                 <a:uFillTx/>
                 <a:latin typeface="Arial"/>
               </a:rPr>
-              <a:t>4-Bit CPU</a:t>
+              <a:t>490€</a:t>
             </a:r>
             <a:endParaRPr lang="en-US" sz="2000" b="0" u="none" strike="noStrike">
               <a:solidFill>
@@ -663,7 +668,7 @@
                 <a:uFillTx/>
                 <a:latin typeface="Arial"/>
               </a:rPr>
-              <a:t>60$ heute 490$</a:t>
+              <a:t>8 Kerne</a:t>
             </a:r>
             <a:endParaRPr lang="en-US" sz="2000" b="0" u="none" strike="noStrike">
               <a:solidFill>
@@ -687,31 +692,7 @@
                 <a:uFillTx/>
                 <a:latin typeface="Arial"/>
               </a:rPr>
-              <a:t>740 - 750 kHz</a:t>
-            </a:r>
-            <a:endParaRPr lang="en-US" sz="2000" b="0" u="none" strike="noStrike">
-              <a:solidFill>
-                <a:srgbClr val="000000"/>
-              </a:solidFill>
-              <a:effectLst/>
-              <a:uFillTx/>
-              <a:latin typeface="Arial"/>
-            </a:endParaRPr>
-          </a:p>
-          <a:p>
-            <a:pPr indent="0" algn="l">
-              <a:buNone/>
-            </a:pPr>
-            <a:r>
-              <a:rPr lang="en-US" sz="2000" b="0" u="none" strike="noStrike">
-                <a:solidFill>
-                  <a:srgbClr val="000000"/>
-                </a:solidFill>
-                <a:effectLst/>
-                <a:uFillTx/>
-                <a:latin typeface="Arial"/>
-              </a:rPr>
-              <a:t>1 Kern</a:t>
+              <a:t>4,7 – 5,6 GHz Taktgeschwindigkeit</a:t>
             </a:r>
             <a:endParaRPr lang="en-US" sz="2000" b="0" u="none" strike="noStrike">
               <a:solidFill>
@@ -729,7 +710,7 @@
 </p:notes>
 </file>
 
-<file path=ppt/notesSlides/notesSlide12.xml><?xml version="1.0" encoding="utf-8"?>
+<file path=ppt/notesSlides/notesSlide23.xml><?xml version="1.0" encoding="utf-8"?>
 <p:notes xmlns:a="http://schemas.openxmlformats.org/drawingml/2006/main" xmlns:p="http://schemas.openxmlformats.org/presentationml/2006/main" xmlns:r="http://schemas.openxmlformats.org/officeDocument/2006/relationships" xmlns:p14="http://schemas.microsoft.com/office/powerpoint/2010/main" xmlns:p15="http://schemas.microsoft.com/office/powerpoint/2012/main" xmlns:mc="http://schemas.openxmlformats.org/markup-compatibility/2006">
   <p:cSld>
     <p:spTree>
@@ -748,7 +729,7 @@
       </p:grpSpPr>
       <p:sp>
         <p:nvSpPr>
-          <p:cNvPr id="100" name="PlaceHolder 1"/>
+          <p:cNvPr id="113" name="PlaceHolder 1"/>
           <p:cNvSpPr>
             <a:spLocks noGrp="1"/>
           </p:cNvSpPr>
@@ -771,7 +752,7 @@
       </p:sp>
       <p:sp>
         <p:nvSpPr>
-          <p:cNvPr id="101" name="PlaceHolder 2"/>
+          <p:cNvPr id="114" name="PlaceHolder 2"/>
           <p:cNvSpPr>
             <a:spLocks noGrp="1"/>
           </p:cNvSpPr>
@@ -809,7 +790,7 @@
                 <a:uFillTx/>
                 <a:latin typeface="Arial"/>
               </a:rPr>
-              <a:t>490€</a:t>
+              <a:t>Speziell auf bestimmte boards zugeschnitten;</a:t>
             </a:r>
             <a:endParaRPr lang="en-US" sz="2000" b="0" u="none" strike="noStrike">
               <a:solidFill>
@@ -833,31 +814,7 @@
                 <a:uFillTx/>
                 <a:latin typeface="Arial"/>
               </a:rPr>
-              <a:t>8 Kerne</a:t>
-            </a:r>
-            <a:endParaRPr lang="en-US" sz="2000" b="0" u="none" strike="noStrike">
-              <a:solidFill>
-                <a:srgbClr val="000000"/>
-              </a:solidFill>
-              <a:effectLst/>
-              <a:uFillTx/>
-              <a:latin typeface="Arial"/>
-            </a:endParaRPr>
-          </a:p>
-          <a:p>
-            <a:pPr indent="0" algn="l">
-              <a:buNone/>
-            </a:pPr>
-            <a:r>
-              <a:rPr lang="en-US" sz="2000" b="0" u="none" strike="noStrike">
-                <a:solidFill>
-                  <a:srgbClr val="000000"/>
-                </a:solidFill>
-                <a:effectLst/>
-                <a:uFillTx/>
-                <a:latin typeface="Arial"/>
-              </a:rPr>
-              <a:t>4,7 – 5,6 GHz Taktgeschwindigkeit</a:t>
+              <a:t>C++ mit Bibliotheken</a:t>
             </a:r>
             <a:endParaRPr lang="en-US" sz="2000" b="0" u="none" strike="noStrike">
               <a:solidFill>
@@ -875,7 +832,7 @@
 </p:notes>
 </file>
 
-<file path=ppt/notesSlides/notesSlide13.xml><?xml version="1.0" encoding="utf-8"?>
+<file path=ppt/notesSlides/notesSlide5.xml><?xml version="1.0" encoding="utf-8"?>
 <p:notes xmlns:a="http://schemas.openxmlformats.org/drawingml/2006/main" xmlns:p="http://schemas.openxmlformats.org/presentationml/2006/main" xmlns:r="http://schemas.openxmlformats.org/officeDocument/2006/relationships" xmlns:p14="http://schemas.microsoft.com/office/powerpoint/2010/main" xmlns:p15="http://schemas.microsoft.com/office/powerpoint/2012/main" xmlns:mc="http://schemas.openxmlformats.org/markup-compatibility/2006">
   <p:cSld>
     <p:spTree>
@@ -894,7 +851,7 @@
       </p:grpSpPr>
       <p:sp>
         <p:nvSpPr>
-          <p:cNvPr id="102" name="PlaceHolder 1"/>
+          <p:cNvPr id="99" name="PlaceHolder 1"/>
           <p:cNvSpPr>
             <a:spLocks noGrp="1"/>
           </p:cNvSpPr>
@@ -917,7 +874,7 @@
       </p:sp>
       <p:sp>
         <p:nvSpPr>
-          <p:cNvPr id="103" name="PlaceHolder 2"/>
+          <p:cNvPr id="100" name="PlaceHolder 2"/>
           <p:cNvSpPr>
             <a:spLocks noGrp="1"/>
           </p:cNvSpPr>
@@ -955,7 +912,7 @@
                 <a:uFillTx/>
                 <a:latin typeface="Arial"/>
               </a:rPr>
-              <a:t>490€</a:t>
+              <a:t>Anwendung in Taschenrechnern</a:t>
             </a:r>
             <a:endParaRPr lang="en-US" sz="2000" b="0" u="none" strike="noStrike">
               <a:solidFill>
@@ -979,7 +936,7 @@
                 <a:uFillTx/>
                 <a:latin typeface="Arial"/>
               </a:rPr>
-              <a:t>8 Kerne</a:t>
+              <a:t>Chip wurde in der 38. Woche im Jahr 1971 hergestellt</a:t>
             </a:r>
             <a:endParaRPr lang="en-US" sz="2000" b="0" u="none" strike="noStrike">
               <a:solidFill>
@@ -994,17 +951,6 @@
             <a:pPr indent="0" algn="l">
               <a:buNone/>
             </a:pPr>
-            <a:r>
-              <a:rPr lang="en-US" sz="2000" b="0" u="none" strike="noStrike">
-                <a:solidFill>
-                  <a:srgbClr val="000000"/>
-                </a:solidFill>
-                <a:effectLst/>
-                <a:uFillTx/>
-                <a:latin typeface="Arial"/>
-              </a:rPr>
-              <a:t>4,7 – 5,6 GHz Taktgeschwindigkeit</a:t>
-            </a:r>
             <a:endParaRPr lang="en-US" sz="2000" b="0" u="none" strike="noStrike">
               <a:solidFill>
                 <a:srgbClr val="000000"/>
@@ -1021,7 +967,7 @@
 </p:notes>
 </file>
 
-<file path=ppt/notesSlides/notesSlide3.xml><?xml version="1.0" encoding="utf-8"?>
+<file path=ppt/notesSlides/notesSlide6.xml><?xml version="1.0" encoding="utf-8"?>
 <p:notes xmlns:a="http://schemas.openxmlformats.org/drawingml/2006/main" xmlns:p="http://schemas.openxmlformats.org/presentationml/2006/main" xmlns:r="http://schemas.openxmlformats.org/officeDocument/2006/relationships" xmlns:p14="http://schemas.microsoft.com/office/powerpoint/2010/main" xmlns:p15="http://schemas.microsoft.com/office/powerpoint/2012/main" xmlns:mc="http://schemas.openxmlformats.org/markup-compatibility/2006">
   <p:cSld>
     <p:spTree>
@@ -1040,7 +986,7 @@
       </p:grpSpPr>
       <p:sp>
         <p:nvSpPr>
-          <p:cNvPr id="88" name="PlaceHolder 1"/>
+          <p:cNvPr id="101" name="PlaceHolder 1"/>
           <p:cNvSpPr>
             <a:spLocks noGrp="1"/>
           </p:cNvSpPr>
@@ -1063,7 +1009,7 @@
       </p:sp>
       <p:sp>
         <p:nvSpPr>
-          <p:cNvPr id="89" name="PlaceHolder 2"/>
+          <p:cNvPr id="102" name="PlaceHolder 2"/>
           <p:cNvSpPr>
             <a:spLocks noGrp="1"/>
           </p:cNvSpPr>
@@ -1175,7 +1121,7 @@
       </p:grpSpPr>
       <p:sp>
         <p:nvSpPr>
-          <p:cNvPr id="90" name="PlaceHolder 1"/>
+          <p:cNvPr id="103" name="PlaceHolder 1"/>
           <p:cNvSpPr>
             <a:spLocks noGrp="1"/>
           </p:cNvSpPr>
@@ -1198,7 +1144,7 @@
       </p:sp>
       <p:sp>
         <p:nvSpPr>
-          <p:cNvPr id="91" name="PlaceHolder 2"/>
+          <p:cNvPr id="104" name="PlaceHolder 2"/>
           <p:cNvSpPr>
             <a:spLocks noGrp="1"/>
           </p:cNvSpPr>
@@ -1310,7 +1256,7 @@
       </p:grpSpPr>
       <p:sp>
         <p:nvSpPr>
-          <p:cNvPr id="92" name="PlaceHolder 1"/>
+          <p:cNvPr id="105" name="PlaceHolder 1"/>
           <p:cNvSpPr>
             <a:spLocks noGrp="1"/>
           </p:cNvSpPr>
@@ -1333,7 +1279,7 @@
       </p:sp>
       <p:sp>
         <p:nvSpPr>
-          <p:cNvPr id="93" name="PlaceHolder 2"/>
+          <p:cNvPr id="106" name="PlaceHolder 2"/>
           <p:cNvSpPr>
             <a:spLocks noGrp="1"/>
           </p:cNvSpPr>
@@ -1371,7 +1317,7 @@
                 <a:uFillTx/>
                 <a:latin typeface="Arial"/>
               </a:rPr>
-              <a:t>Anwendung in Taschenrechnern</a:t>
+              <a:t>4-Bit CPU</a:t>
             </a:r>
             <a:endParaRPr lang="en-US" sz="2000" b="0" u="none" strike="noStrike">
               <a:solidFill>
@@ -1395,7 +1341,7 @@
                 <a:uFillTx/>
                 <a:latin typeface="Arial"/>
               </a:rPr>
-              <a:t>Chip wurde in der 38. Woche im Jahr 1971 hergestellt</a:t>
+              <a:t>60$ heute ca. 490$</a:t>
             </a:r>
             <a:endParaRPr lang="en-US" sz="2000" b="0" u="none" strike="noStrike">
               <a:solidFill>
@@ -1410,6 +1356,17 @@
             <a:pPr indent="0" algn="l">
               <a:buNone/>
             </a:pPr>
+            <a:r>
+              <a:rPr lang="en-US" sz="2000" b="0" u="none" strike="noStrike">
+                <a:solidFill>
+                  <a:srgbClr val="000000"/>
+                </a:solidFill>
+                <a:effectLst/>
+                <a:uFillTx/>
+                <a:latin typeface="Arial"/>
+              </a:rPr>
+              <a:t>Man benötigte noch andere Chips wie Speicher und I/O Systeme wodurch ein System 1970 mehrere hundert Dollar kostete was heute mehreren tausend Dollar entsprechen würde</a:t>
+            </a:r>
             <a:endParaRPr lang="en-US" sz="2000" b="0" u="none" strike="noStrike">
               <a:solidFill>
                 <a:srgbClr val="000000"/>
@@ -1445,7 +1402,7 @@
       </p:grpSpPr>
       <p:sp>
         <p:nvSpPr>
-          <p:cNvPr id="94" name="PlaceHolder 1"/>
+          <p:cNvPr id="107" name="PlaceHolder 1"/>
           <p:cNvSpPr>
             <a:spLocks noGrp="1"/>
           </p:cNvSpPr>
@@ -1468,7 +1425,7 @@
       </p:sp>
       <p:sp>
         <p:nvSpPr>
-          <p:cNvPr id="95" name="PlaceHolder 2"/>
+          <p:cNvPr id="108" name="PlaceHolder 2"/>
           <p:cNvSpPr>
             <a:spLocks noGrp="1"/>
           </p:cNvSpPr>
@@ -1506,7 +1463,7 @@
                 <a:uFillTx/>
                 <a:latin typeface="Arial"/>
               </a:rPr>
-              <a:t>Anwendung in Taschenrechnern</a:t>
+              <a:t>4-Bit CPU</a:t>
             </a:r>
             <a:endParaRPr lang="en-US" sz="2000" b="0" u="none" strike="noStrike">
               <a:solidFill>
@@ -1530,7 +1487,7 @@
                 <a:uFillTx/>
                 <a:latin typeface="Arial"/>
               </a:rPr>
-              <a:t>Chip wurde in der 38. Woche im Jahr 1971 hergestellt</a:t>
+              <a:t>60$ heute 490$</a:t>
             </a:r>
             <a:endParaRPr lang="en-US" sz="2000" b="0" u="none" strike="noStrike">
               <a:solidFill>
@@ -1545,6 +1502,41 @@
             <a:pPr indent="0" algn="l">
               <a:buNone/>
             </a:pPr>
+            <a:r>
+              <a:rPr lang="en-US" sz="2000" b="0" u="none" strike="noStrike">
+                <a:solidFill>
+                  <a:srgbClr val="000000"/>
+                </a:solidFill>
+                <a:effectLst/>
+                <a:uFillTx/>
+                <a:latin typeface="Arial"/>
+              </a:rPr>
+              <a:t>740 - 750 kHz</a:t>
+            </a:r>
+            <a:endParaRPr lang="en-US" sz="2000" b="0" u="none" strike="noStrike">
+              <a:solidFill>
+                <a:srgbClr val="000000"/>
+              </a:solidFill>
+              <a:effectLst/>
+              <a:uFillTx/>
+              <a:latin typeface="Arial"/>
+            </a:endParaRPr>
+          </a:p>
+          <a:p>
+            <a:pPr indent="0" algn="l">
+              <a:buNone/>
+            </a:pPr>
+            <a:r>
+              <a:rPr lang="en-US" sz="2000" b="0" u="none" strike="noStrike">
+                <a:solidFill>
+                  <a:srgbClr val="000000"/>
+                </a:solidFill>
+                <a:effectLst/>
+                <a:uFillTx/>
+                <a:latin typeface="Arial"/>
+              </a:rPr>
+              <a:t>1 Kern</a:t>
+            </a:r>
             <a:endParaRPr lang="en-US" sz="2000" b="0" u="none" strike="noStrike">
               <a:solidFill>
                 <a:srgbClr val="000000"/>
@@ -1699,7 +1691,7 @@
         <p:txBody>
           <a:bodyPr/>
           <a:p>
-            <a:fld id="{466D4F44-38EF-40D5-B879-1F9DAB43A11B}" type="slidenum">
+            <a:fld id="{1E7BF8DE-5265-4C6A-B191-1A2F00DA1317}" type="slidenum">
               <a:t>&lt;#&gt;</a:t>
             </a:fld>
           </a:p>
@@ -1824,7 +1816,7 @@
         <p:txBody>
           <a:bodyPr/>
           <a:p>
-            <a:fld id="{B7FF5F9B-C687-4032-B6EA-B24AFCA08D45}" type="slidenum">
+            <a:fld id="{168E100D-330D-4F91-A282-5F049DAF19F4}" type="slidenum">
               <a:t>&lt;#&gt;</a:t>
             </a:fld>
           </a:p>
@@ -1949,7 +1941,7 @@
         <p:txBody>
           <a:bodyPr/>
           <a:p>
-            <a:fld id="{7197C83D-DF55-40DB-A3C3-A4E90042FCCC}" type="slidenum">
+            <a:fld id="{7E45A37E-5A70-4D64-8427-BA466F51EFAE}" type="slidenum">
               <a:t>&lt;#&gt;</a:t>
             </a:fld>
           </a:p>
@@ -2628,7 +2620,7 @@
             <a:pPr indent="0" algn="r">
               <a:buNone/>
             </a:pPr>
-            <a:fld id="{F5E452C2-5F7A-48AA-9713-B41791CDA553}" type="slidenum">
+            <a:fld id="{9A9DC703-8E4B-4C50-BAE3-047A5FAFC6FD}" type="slidenum">
               <a:rPr lang="en-US" sz="1400" b="0" u="none" strike="noStrike">
                 <a:solidFill>
                   <a:srgbClr val="000000"/>
@@ -2695,6 +2687,105 @@
           <a:chExt cx="0" cy="0"/>
         </a:xfrm>
       </p:grpSpPr>
+      <p:sp>
+        <p:nvSpPr>
+          <p:cNvPr id="17" name="PlaceHolder 1"/>
+          <p:cNvSpPr>
+            <a:spLocks noGrp="1"/>
+          </p:cNvSpPr>
+          <p:nvPr>
+            <p:ph type="title"/>
+          </p:nvPr>
+        </p:nvSpPr>
+        <p:spPr>
+          <a:xfrm>
+            <a:off x="457200" y="1976760"/>
+            <a:ext cx="9068760" cy="1108440"/>
+          </a:xfrm>
+          <a:prstGeom prst="rect">
+            <a:avLst/>
+          </a:prstGeom>
+          <a:noFill/>
+          <a:ln w="0">
+            <a:noFill/>
+          </a:ln>
+        </p:spPr>
+        <p:txBody>
+          <a:bodyPr lIns="0" tIns="0" rIns="0" bIns="0" anchor="ctr">
+            <a:spAutoFit/>
+          </a:bodyPr>
+          <a:p>
+            <a:pPr indent="0" algn="ctr">
+              <a:buNone/>
+            </a:pPr>
+            <a:r>
+              <a:rPr lang="en-US" sz="8000" b="1" u="none" strike="noStrike">
+                <a:solidFill>
+                  <a:srgbClr val="FFFFFF"/>
+                </a:solidFill>
+                <a:effectLst/>
+                <a:uFillTx/>
+                <a:latin typeface="3270 Nerd Font"/>
+              </a:rPr>
+              <a:t>Mikrocontroller</a:t>
+            </a:r>
+            <a:endParaRPr lang="en-US" sz="8000" b="0" u="none" strike="noStrike">
+              <a:solidFill>
+                <a:srgbClr val="FFFFFF"/>
+              </a:solidFill>
+              <a:effectLst/>
+              <a:uFillTx/>
+              <a:latin typeface="Arial"/>
+            </a:endParaRPr>
+          </a:p>
+        </p:txBody>
+      </p:sp>
+      <p:sp>
+        <p:nvSpPr>
+          <p:cNvPr id="18" name=""/>
+          <p:cNvSpPr txBox="1"/>
+          <p:nvPr/>
+        </p:nvSpPr>
+        <p:spPr>
+          <a:xfrm>
+            <a:off x="3657600" y="5140080"/>
+            <a:ext cx="2760840" cy="346320"/>
+          </a:xfrm>
+          <a:prstGeom prst="rect">
+            <a:avLst/>
+          </a:prstGeom>
+          <a:noFill/>
+          <a:ln w="0">
+            <a:noFill/>
+          </a:ln>
+        </p:spPr>
+        <p:txBody>
+          <a:bodyPr wrap="none" lIns="90000" tIns="45000" rIns="90000" bIns="45000" anchor="t">
+            <a:spAutoFit/>
+          </a:bodyPr>
+          <a:p>
+            <a:r>
+              <a:rPr lang="en-US" sz="1800" b="0" u="none" strike="noStrike">
+                <a:solidFill>
+                  <a:srgbClr val="FFFFFF"/>
+                </a:solidFill>
+                <a:effectLst/>
+                <a:uFillTx/>
+                <a:latin typeface="Arial"/>
+              </a:rPr>
+              <a:t>Finn Brandt – 19.06.2026</a:t>
+            </a:r>
+            <a:endParaRPr lang="en-US" sz="1800" b="0" u="none" strike="noStrike">
+              <a:solidFill>
+                <a:srgbClr val="FFFFFF"/>
+              </a:solidFill>
+              <a:effectLst/>
+              <a:uFillTx/>
+              <a:latin typeface="Arial"/>
+            </a:endParaRPr>
+          </a:p>
+        </p:txBody>
+      </p:sp>
     </p:spTree>
   </p:cSld>
 </p:sld>
@@ -2736,7 +2827,7 @@
       </p:grpSpPr>
       <p:sp>
         <p:nvSpPr>
-          <p:cNvPr id="51" name="PlaceHolder 1"/>
+          <p:cNvPr id="55" name="PlaceHolder 1"/>
           <p:cNvSpPr>
             <a:spLocks noGrp="1"/>
           </p:cNvSpPr>
@@ -2774,7 +2865,7 @@
                 <a:uFillTx/>
                 <a:latin typeface="3270 Nerd Font"/>
               </a:rPr>
-              <a:t>Der erste Mikroprozessor</a:t>
+              <a:t>Moderne Mikroprozessoren</a:t>
             </a:r>
             <a:endParaRPr lang="en-US" sz="4400" b="0" u="none" strike="noStrike">
               <a:solidFill>
@@ -2789,7 +2880,7 @@
       </p:sp>
       <p:sp>
         <p:nvSpPr>
-          <p:cNvPr id="52" name="PlaceHolder 2"/>
+          <p:cNvPr id="56" name="PlaceHolder 2"/>
           <p:cNvSpPr>
             <a:spLocks noGrp="1"/>
           </p:cNvSpPr>
@@ -2799,8 +2890,8 @@
         </p:nvSpPr>
         <p:spPr>
           <a:xfrm>
-            <a:off x="503640" y="1176840"/>
-            <a:ext cx="9097560" cy="1416960"/>
+            <a:off x="3657600" y="1326240"/>
+            <a:ext cx="5914800" cy="3931560"/>
           </a:xfrm>
           <a:prstGeom prst="rect">
             <a:avLst/>
@@ -2812,14 +2903,19 @@
         </p:spPr>
         <p:txBody>
           <a:bodyPr lIns="0" tIns="0" rIns="0" bIns="0" anchor="t">
-            <a:normAutofit/>
+            <a:normAutofit lnSpcReduction="9999"/>
           </a:bodyPr>
           <a:p>
-            <a:pPr indent="0" algn="l">
+            <a:pPr marL="216000" indent="-216000" algn="l">
               <a:spcBef>
                 <a:spcPts val="1414"/>
               </a:spcBef>
-              <a:buNone/>
+              <a:buClr>
+                <a:srgbClr val="FFFFFF"/>
+              </a:buClr>
+              <a:buSzPct val="85000"/>
+              <a:buFont typeface="Wingdings" charset="2"/>
+              <a:buChar char=""/>
             </a:pPr>
             <a:r>
               <a:rPr lang="en-US" sz="3200" b="0" u="none" strike="noStrike">
@@ -2830,8 +2926,29 @@
                 <a:uFillTx/>
                 <a:latin typeface="3270 Nerd Font"/>
               </a:rPr>
-              <a:t>November 1971: Der Intel 4004</a:t>
-            </a:r>
+              <a:t>Januar 2026</a:t>
+            </a:r>
+            <a:endParaRPr lang="en-US" sz="3200" b="0" u="none" strike="noStrike">
+              <a:solidFill>
+                <a:srgbClr val="FFFFFF"/>
+              </a:solidFill>
+              <a:effectLst/>
+              <a:uFillTx/>
+              <a:latin typeface="Arial"/>
+            </a:endParaRPr>
+          </a:p>
+          <a:p>
+            <a:pPr marL="216000" indent="-216000" algn="l">
+              <a:spcBef>
+                <a:spcPts val="1414"/>
+              </a:spcBef>
+              <a:buClr>
+                <a:srgbClr val="FFFFFF"/>
+              </a:buClr>
+              <a:buSzPct val="85000"/>
+              <a:buFont typeface="Wingdings" charset="2"/>
+              <a:buChar char=""/>
+            </a:pPr>
             <a:r>
               <a:rPr lang="en-US" sz="3200" b="0" u="none" strike="noStrike">
                 <a:solidFill>
@@ -2841,8 +2958,29 @@
                 <a:uFillTx/>
                 <a:latin typeface="3270 Nerd Font"/>
               </a:rPr>
-              <a:t> ist der erste Mikroprozessor auf einem einzigen C</a:t>
-            </a:r>
+              <a:t>490€</a:t>
+            </a:r>
+            <a:endParaRPr lang="en-US" sz="3200" b="0" u="none" strike="noStrike">
+              <a:solidFill>
+                <a:srgbClr val="FFFFFF"/>
+              </a:solidFill>
+              <a:effectLst/>
+              <a:uFillTx/>
+              <a:latin typeface="Arial"/>
+            </a:endParaRPr>
+          </a:p>
+          <a:p>
+            <a:pPr marL="216000" indent="-216000" algn="l">
+              <a:spcBef>
+                <a:spcPts val="1414"/>
+              </a:spcBef>
+              <a:buClr>
+                <a:srgbClr val="FFFFFF"/>
+              </a:buClr>
+              <a:buSzPct val="85000"/>
+              <a:buFont typeface="Wingdings" charset="2"/>
+              <a:buChar char=""/>
+            </a:pPr>
             <a:r>
               <a:rPr lang="en-US" sz="3200" b="0" u="none" strike="noStrike">
                 <a:solidFill>
@@ -2852,7 +2990,103 @@
                 <a:uFillTx/>
                 <a:latin typeface="3270 Nerd Font"/>
               </a:rPr>
-              <a:t>hip</a:t>
+              <a:t>64-Bit CPU</a:t>
+            </a:r>
+            <a:endParaRPr lang="en-US" sz="3200" b="0" u="none" strike="noStrike">
+              <a:solidFill>
+                <a:srgbClr val="FFFFFF"/>
+              </a:solidFill>
+              <a:effectLst/>
+              <a:uFillTx/>
+              <a:latin typeface="Arial"/>
+            </a:endParaRPr>
+          </a:p>
+          <a:p>
+            <a:pPr marL="216000" indent="-216000" algn="l">
+              <a:spcBef>
+                <a:spcPts val="1414"/>
+              </a:spcBef>
+              <a:buClr>
+                <a:srgbClr val="FFFFFF"/>
+              </a:buClr>
+              <a:buSzPct val="85000"/>
+              <a:buFont typeface="Wingdings" charset="2"/>
+              <a:buChar char=""/>
+            </a:pPr>
+            <a:r>
+              <a:rPr lang="en-US" sz="3200" b="0" u="none" strike="noStrike">
+                <a:solidFill>
+                  <a:srgbClr val="FFFFFF"/>
+                </a:solidFill>
+                <a:effectLst/>
+                <a:uFillTx/>
+                <a:latin typeface="3270 Nerd Font"/>
+              </a:rPr>
+              <a:t>8 Kerne</a:t>
+            </a:r>
+            <a:endParaRPr lang="en-US" sz="3200" b="0" u="none" strike="noStrike">
+              <a:solidFill>
+                <a:srgbClr val="FFFFFF"/>
+              </a:solidFill>
+              <a:effectLst/>
+              <a:uFillTx/>
+              <a:latin typeface="Arial"/>
+            </a:endParaRPr>
+          </a:p>
+          <a:p>
+            <a:pPr marL="216000" indent="-216000" algn="l">
+              <a:spcBef>
+                <a:spcPts val="1414"/>
+              </a:spcBef>
+              <a:buClr>
+                <a:srgbClr val="FFFFFF"/>
+              </a:buClr>
+              <a:buSzPct val="85000"/>
+              <a:buFont typeface="Wingdings" charset="2"/>
+              <a:buChar char=""/>
+            </a:pPr>
+            <a:r>
+              <a:rPr lang="en-US" sz="3200" b="0" u="none" strike="noStrike">
+                <a:solidFill>
+                  <a:srgbClr val="FFFFFF"/>
+                </a:solidFill>
+                <a:effectLst/>
+                <a:uFillTx/>
+                <a:latin typeface="3270 Nerd Font"/>
+              </a:rPr>
+              <a:t>4,7 – 5,6 GHz</a:t>
+            </a:r>
+            <a:endParaRPr lang="en-US" sz="3200" b="0" u="none" strike="noStrike">
+              <a:solidFill>
+                <a:srgbClr val="FFFFFF"/>
+              </a:solidFill>
+              <a:effectLst/>
+              <a:uFillTx/>
+              <a:latin typeface="Arial"/>
+            </a:endParaRPr>
+          </a:p>
+          <a:p>
+            <a:pPr marL="216000" indent="-216000" algn="l">
+              <a:spcBef>
+                <a:spcPts val="1414"/>
+              </a:spcBef>
+              <a:buClr>
+                <a:srgbClr val="FFFFFF"/>
+              </a:buClr>
+              <a:buSzPct val="85000"/>
+              <a:buFont typeface="Symbol" charset="2"/>
+              <a:buChar char=""/>
+            </a:pPr>
+            <a:r>
+              <a:rPr lang="en-US" sz="3200" b="1" u="none" strike="noStrike">
+                <a:solidFill>
+                  <a:srgbClr val="FFFFFF"/>
+                </a:solidFill>
+                <a:effectLst/>
+                <a:uFillTx/>
+                <a:latin typeface="3270 Nerd Font"/>
+              </a:rPr>
+              <a:t> Mehr als 7000-mal schneller</a:t>
             </a:r>
             <a:endParaRPr lang="en-US" sz="3200" b="0" u="none" strike="noStrike">
               <a:solidFill>
@@ -2865,42 +3099,16 @@
           </a:p>
         </p:txBody>
       </p:sp>
-      <p:pic>
-        <p:nvPicPr>
-          <p:cNvPr id="53" name=""/>
-          <p:cNvPicPr/>
-          <p:nvPr/>
-        </p:nvPicPr>
-        <p:blipFill>
-          <a:blip r:embed="rId1">
-            <a:alphaModFix amt="0"/>
-          </a:blip>
-          <a:stretch/>
-        </p:blipFill>
-        <p:spPr>
-          <a:xfrm>
-            <a:off x="228600" y="2593800"/>
-            <a:ext cx="4343400" cy="2892600"/>
-          </a:xfrm>
-          <a:prstGeom prst="rect">
-            <a:avLst/>
-          </a:prstGeom>
-          <a:noFill/>
-          <a:ln w="0">
-            <a:noFill/>
-          </a:ln>
-        </p:spPr>
-      </p:pic>
       <p:sp>
         <p:nvSpPr>
-          <p:cNvPr id="54" name=""/>
+          <p:cNvPr id="57" name=""/>
           <p:cNvSpPr txBox="1"/>
           <p:nvPr/>
         </p:nvSpPr>
         <p:spPr>
           <a:xfrm>
-            <a:off x="9572400" y="5257800"/>
-            <a:ext cx="461880" cy="401400"/>
+            <a:off x="9484200" y="5267880"/>
+            <a:ext cx="592560" cy="401400"/>
           </a:xfrm>
           <a:prstGeom prst="rect">
             <a:avLst/>
@@ -2924,7 +3132,7 @@
                 <a:uFillTx/>
                 <a:latin typeface="Arial"/>
               </a:rPr>
-              <a:t>[6]</a:t>
+              <a:t>[11]</a:t>
             </a:r>
             <a:endParaRPr lang="en-US" sz="1800" b="0" u="none" strike="noStrike">
               <a:solidFill>
@@ -2937,16 +3145,23 @@
           </a:p>
         </p:txBody>
       </p:sp>
-      <p:sp>
-        <p:nvSpPr>
-          <p:cNvPr id="55" name=""/>
-          <p:cNvSpPr txBox="1"/>
+      <p:pic>
+        <p:nvPicPr>
+          <p:cNvPr id="58" name=""/>
+          <p:cNvPicPr/>
           <p:nvPr/>
-        </p:nvSpPr>
+        </p:nvPicPr>
+        <p:blipFill>
+          <a:blip r:embed="rId1">
+            <a:alphaModFix amt="0"/>
+          </a:blip>
+          <a:srcRect l="28307" t="15792" r="28046" b="15759"/>
+          <a:stretch/>
+        </p:blipFill>
         <p:spPr>
           <a:xfrm>
-            <a:off x="5077080" y="2396880"/>
-            <a:ext cx="4524120" cy="2860920"/>
+            <a:off x="228960" y="2514600"/>
+            <a:ext cx="2742840" cy="2971440"/>
           </a:xfrm>
           <a:prstGeom prst="rect">
             <a:avLst/>
@@ -2956,109 +3171,48 @@
             <a:noFill/>
           </a:ln>
         </p:spPr>
-        <p:txBody>
-          <a:bodyPr lIns="90000" tIns="45000" rIns="90000" bIns="45000" anchor="t">
-            <a:spAutoFit/>
-          </a:bodyPr>
-          <a:p>
-            <a:pPr marL="216000" indent="-216000">
-              <a:buClr>
-                <a:srgbClr val="FFFFFF"/>
-              </a:buClr>
-              <a:buSzPct val="85000"/>
-              <a:buFont typeface="Wingdings" charset="2"/>
-              <a:buChar char=""/>
-            </a:pPr>
-            <a:r>
-              <a:rPr lang="en-US" sz="3200" b="0" u="none" strike="noStrike">
-                <a:solidFill>
-                  <a:srgbClr val="FFFFFF"/>
-                </a:solidFill>
-                <a:effectLst/>
-                <a:uFillTx/>
-                <a:latin typeface="3270 Nerd Font"/>
-              </a:rPr>
-              <a:t>Man benötigt externe Chips für Speicher und Peripherie</a:t>
-            </a:r>
-            <a:endParaRPr lang="en-US" sz="3200" b="0" u="none" strike="noStrike">
-              <a:solidFill>
-                <a:srgbClr val="FFFFFF"/>
-              </a:solidFill>
-              <a:effectLst/>
-              <a:uFillTx/>
-              <a:latin typeface="Arial"/>
-            </a:endParaRPr>
-          </a:p>
-        </p:txBody>
-      </p:sp>
+      </p:pic>
     </p:spTree>
   </p:cSld>
   <p:timing>
     <p:tnLst>
       <p:par>
-        <p:cTn id="77" dur="indefinite" restart="never" nodeType="tmRoot">
+        <p:cTn id="87" dur="indefinite" restart="never" nodeType="tmRoot">
           <p:childTnLst>
             <p:seq>
-              <p:cTn id="78" dur="indefinite" nodeType="mainSeq">
+              <p:cTn id="88" dur="indefinite" nodeType="mainSeq">
                 <p:childTnLst>
                   <p:par>
-                    <p:cTn id="79" fill="hold">
+                    <p:cTn id="89" fill="hold">
                       <p:stCondLst>
                         <p:cond delay="indefinite"/>
                       </p:stCondLst>
                       <p:childTnLst>
                         <p:par>
-                          <p:cTn id="80" fill="hold">
+                          <p:cTn id="90" fill="hold">
                             <p:stCondLst>
                               <p:cond delay="0"/>
                             </p:stCondLst>
                             <p:childTnLst>
                               <p:par>
-                                <p:cTn id="81" presetID="1" presetClass="entr" fill="hold" nodeType="clickEffect">
+                                <p:cTn id="91" presetID="1" presetClass="entr" fill="hold" nodeType="clickEffect">
                                   <p:stCondLst>
                                     <p:cond delay="0"/>
                                   </p:stCondLst>
                                   <p:childTnLst>
                                     <p:set>
                                       <p:cBhvr>
-                                        <p:cTn id="82" dur="1" fill="hold">
+                                        <p:cTn id="92" dur="1" fill="hold">
                                           <p:stCondLst>
                                             <p:cond delay="0"/>
                                           </p:stCondLst>
                                         </p:cTn>
                                         <p:tgtEl>
-                                          <p:spTgt spid="52">
+                                          <p:spTgt spid="56">
                                             <p:txEl>
                                               <p:pRg st="0" end="0"/>
                                             </p:txEl>
                                           </p:spTgt>
-                                        </p:tgtEl>
-                                        <p:attrNameLst>
-                                          <p:attrName>style.visibility</p:attrName>
-                                        </p:attrNameLst>
-                                      </p:cBhvr>
-                                      <p:to>
-                                        <p:strVal val="visible"/>
-                                      </p:to>
-                                    </p:set>
-                                  </p:childTnLst>
-                                </p:cTn>
-                              </p:par>
-                              <p:par>
-                                <p:cTn id="83" presetID="1" presetClass="entr" fill="hold" nodeType="withEffect">
-                                  <p:stCondLst>
-                                    <p:cond delay="0"/>
-                                  </p:stCondLst>
-                                  <p:childTnLst>
-                                    <p:set>
-                                      <p:cBhvr>
-                                        <p:cTn id="84" dur="1" fill="hold">
-                                          <p:stCondLst>
-                                            <p:cond delay="0"/>
-                                          </p:stCondLst>
-                                        </p:cTn>
-                                        <p:tgtEl>
-                                          <p:spTgt spid="53"/>
                                         </p:tgtEl>
                                         <p:attrNameLst>
                                           <p:attrName>style.visibility</p:attrName>
@@ -3078,34 +3232,83 @@
                     </p:cTn>
                   </p:par>
                   <p:par>
-                    <p:cTn id="85" fill="hold">
+                    <p:cTn id="93" fill="hold">
                       <p:stCondLst>
                         <p:cond delay="indefinite"/>
                       </p:stCondLst>
                       <p:childTnLst>
                         <p:par>
-                          <p:cTn id="86" fill="hold">
+                          <p:cTn id="94" fill="hold">
                             <p:stCondLst>
                               <p:cond delay="0"/>
                             </p:stCondLst>
                             <p:childTnLst>
                               <p:par>
-                                <p:cTn id="87" presetID="1" presetClass="entr" fill="hold" nodeType="clickEffect">
+                                <p:cTn id="95" presetID="1" presetClass="entr" fill="hold" nodeType="clickEffect">
                                   <p:stCondLst>
                                     <p:cond delay="0"/>
                                   </p:stCondLst>
                                   <p:childTnLst>
                                     <p:set>
                                       <p:cBhvr>
-                                        <p:cTn id="88" dur="1" fill="hold">
+                                        <p:cTn id="96" dur="1" fill="hold">
                                           <p:stCondLst>
                                             <p:cond delay="0"/>
                                           </p:stCondLst>
                                         </p:cTn>
                                         <p:tgtEl>
-                                          <p:spTgt spid="55">
+                                          <p:spTgt spid="56">
                                             <p:txEl>
-                                              <p:pRg st="0" end="0"/>
+                                              <p:pRg st="1" end="1"/>
+                                            </p:txEl>
+                                          </p:spTgt>
+                                        </p:tgtEl>
+                                        <p:attrNameLst>
+                                          <p:attrName>style.visibility</p:attrName>
+                                        </p:attrNameLst>
+                                      </p:cBhvr>
+                                      <p:to>
+                                        <p:strVal val="visible"/>
+                                      </p:to>
+                                    </p:set>
+                                  </p:childTnLst>
+                                </p:cTn>
+                              </p:par>
+                            </p:childTnLst>
+                          </p:cTn>
+                        </p:par>
+                      </p:childTnLst>
+                    </p:cTn>
+                  </p:par>
+                  <p:par>
+                    <p:cTn id="97" fill="hold">
+                      <p:stCondLst>
+                        <p:cond delay="indefinite"/>
+                      </p:stCondLst>
+                      <p:childTnLst>
+                        <p:par>
+                          <p:cTn id="98" fill="hold">
+                            <p:stCondLst>
+                              <p:cond delay="0"/>
+                            </p:stCondLst>
+                            <p:childTnLst>
+                              <p:par>
+                                <p:cTn id="99" presetID="1" presetClass="entr" fill="hold" nodeType="clickEffect">
+                                  <p:stCondLst>
+                                    <p:cond delay="0"/>
+                                  </p:stCondLst>
+                                  <p:childTnLst>
+                                    <p:set>
+                                      <p:cBhvr>
+                                        <p:cTn id="100" dur="1" fill="hold">
+                                          <p:stCondLst>
+                                            <p:cond delay="0"/>
+                                          </p:stCondLst>
+                                        </p:cTn>
+                                        <p:tgtEl>
+                                          <p:spTgt spid="56">
+                                            <p:txEl>
+                                              <p:pRg st="2" end="2"/>
                                             </p:txEl>
                                           </p:spTgt>
                                         </p:tgtEl>
@@ -3187,7 +3390,7 @@
       </p:grpSpPr>
       <p:sp>
         <p:nvSpPr>
-          <p:cNvPr id="56" name="PlaceHolder 1"/>
+          <p:cNvPr id="59" name="PlaceHolder 1"/>
           <p:cNvSpPr>
             <a:spLocks noGrp="1"/>
           </p:cNvSpPr>
@@ -3225,7 +3428,7 @@
                 <a:uFillTx/>
                 <a:latin typeface="3270 Nerd Font"/>
               </a:rPr>
-              <a:t>Der erste Mikroprozessor</a:t>
+              <a:t>Moderne Mikrocontroller</a:t>
             </a:r>
             <a:endParaRPr lang="en-US" sz="4400" b="0" u="none" strike="noStrike">
               <a:solidFill>
@@ -3238,22 +3441,20 @@
           </a:p>
         </p:txBody>
       </p:sp>
-      <p:pic>
-        <p:nvPicPr>
-          <p:cNvPr id="57" name=""/>
-          <p:cNvPicPr/>
-          <p:nvPr/>
-        </p:nvPicPr>
-        <p:blipFill>
-          <a:blip r:embed="rId1">
-            <a:alphaModFix amt="0"/>
-          </a:blip>
-          <a:stretch/>
-        </p:blipFill>
+      <p:sp>
+        <p:nvSpPr>
+          <p:cNvPr id="60" name="PlaceHolder 2"/>
+          <p:cNvSpPr>
+            <a:spLocks noGrp="1"/>
+          </p:cNvSpPr>
+          <p:nvPr>
+            <p:ph/>
+          </p:nvPr>
+        </p:nvSpPr>
         <p:spPr>
           <a:xfrm>
-            <a:off x="228600" y="2593800"/>
-            <a:ext cx="4343400" cy="2892600"/>
+            <a:off x="3657600" y="1326240"/>
+            <a:ext cx="5914800" cy="3931560"/>
           </a:xfrm>
           <a:prstGeom prst="rect">
             <a:avLst/>
@@ -3263,17 +3464,182 @@
             <a:noFill/>
           </a:ln>
         </p:spPr>
-      </p:pic>
+        <p:txBody>
+          <a:bodyPr lIns="0" tIns="0" rIns="0" bIns="0" anchor="t">
+            <a:normAutofit/>
+          </a:bodyPr>
+          <a:p>
+            <a:pPr marL="216000" indent="-216000" algn="l">
+              <a:spcBef>
+                <a:spcPts val="1414"/>
+              </a:spcBef>
+              <a:buClr>
+                <a:srgbClr val="FFFFFF"/>
+              </a:buClr>
+              <a:buSzPct val="85000"/>
+              <a:buFont typeface="Wingdings" charset="2"/>
+              <a:buChar char=""/>
+            </a:pPr>
+            <a:r>
+              <a:rPr lang="en-US" sz="3200" b="0" u="none" strike="noStrike">
+                <a:solidFill>
+                  <a:srgbClr val="FFFFFF"/>
+                </a:solidFill>
+                <a:effectLst/>
+                <a:uFillTx/>
+                <a:latin typeface="3270 Nerd Font"/>
+              </a:rPr>
+              <a:t>August 2024</a:t>
+            </a:r>
+            <a:endParaRPr lang="en-US" sz="3200" b="0" u="none" strike="noStrike">
+              <a:solidFill>
+                <a:srgbClr val="FFFFFF"/>
+              </a:solidFill>
+              <a:effectLst/>
+              <a:uFillTx/>
+              <a:latin typeface="Arial"/>
+            </a:endParaRPr>
+          </a:p>
+          <a:p>
+            <a:pPr marL="216000" indent="-216000" algn="l">
+              <a:spcBef>
+                <a:spcPts val="1414"/>
+              </a:spcBef>
+              <a:buClr>
+                <a:srgbClr val="FFFFFF"/>
+              </a:buClr>
+              <a:buSzPct val="85000"/>
+              <a:buFont typeface="Wingdings" charset="2"/>
+              <a:buChar char=""/>
+            </a:pPr>
+            <a:r>
+              <a:rPr lang="en-US" sz="3200" b="0" u="none" strike="noStrike">
+                <a:solidFill>
+                  <a:srgbClr val="FFFFFF"/>
+                </a:solidFill>
+                <a:effectLst/>
+                <a:uFillTx/>
+                <a:latin typeface="3270 Nerd Font"/>
+              </a:rPr>
+              <a:t>1€</a:t>
+            </a:r>
+            <a:endParaRPr lang="en-US" sz="3200" b="0" u="none" strike="noStrike">
+              <a:solidFill>
+                <a:srgbClr val="FFFFFF"/>
+              </a:solidFill>
+              <a:effectLst/>
+              <a:uFillTx/>
+              <a:latin typeface="Arial"/>
+            </a:endParaRPr>
+          </a:p>
+          <a:p>
+            <a:pPr marL="216000" indent="-216000" algn="l">
+              <a:spcBef>
+                <a:spcPts val="1414"/>
+              </a:spcBef>
+              <a:buClr>
+                <a:srgbClr val="FFFFFF"/>
+              </a:buClr>
+              <a:buSzPct val="85000"/>
+              <a:buFont typeface="Wingdings" charset="2"/>
+              <a:buChar char=""/>
+            </a:pPr>
+            <a:r>
+              <a:rPr lang="en-US" sz="3200" b="0" u="none" strike="noStrike">
+                <a:solidFill>
+                  <a:srgbClr val="FFFFFF"/>
+                </a:solidFill>
+                <a:effectLst/>
+                <a:uFillTx/>
+                <a:latin typeface="3270 Nerd Font"/>
+              </a:rPr>
+              <a:t>32-Bit CPU</a:t>
+            </a:r>
+            <a:endParaRPr lang="en-US" sz="3200" b="0" u="none" strike="noStrike">
+              <a:solidFill>
+                <a:srgbClr val="FFFFFF"/>
+              </a:solidFill>
+              <a:effectLst/>
+              <a:uFillTx/>
+              <a:latin typeface="Arial"/>
+            </a:endParaRPr>
+          </a:p>
+          <a:p>
+            <a:pPr marL="216000" indent="-216000" algn="l">
+              <a:spcBef>
+                <a:spcPts val="1414"/>
+              </a:spcBef>
+              <a:buClr>
+                <a:srgbClr val="FFFFFF"/>
+              </a:buClr>
+              <a:buSzPct val="85000"/>
+              <a:buFont typeface="Wingdings" charset="2"/>
+              <a:buChar char=""/>
+            </a:pPr>
+            <a:r>
+              <a:rPr lang="en-US" sz="3200" b="0" u="none" strike="noStrike">
+                <a:solidFill>
+                  <a:srgbClr val="FFFFFF"/>
+                </a:solidFill>
+                <a:effectLst/>
+                <a:uFillTx/>
+                <a:latin typeface="3270 Nerd Font"/>
+              </a:rPr>
+              <a:t>150 MHz</a:t>
+            </a:r>
+            <a:endParaRPr lang="en-US" sz="3200" b="0" u="none" strike="noStrike">
+              <a:solidFill>
+                <a:srgbClr val="FFFFFF"/>
+              </a:solidFill>
+              <a:effectLst/>
+              <a:uFillTx/>
+              <a:latin typeface="Arial"/>
+            </a:endParaRPr>
+          </a:p>
+          <a:p>
+            <a:pPr marL="216000" indent="-216000" algn="l">
+              <a:spcBef>
+                <a:spcPts val="1414"/>
+              </a:spcBef>
+              <a:buClr>
+                <a:srgbClr val="FFFFFF"/>
+              </a:buClr>
+              <a:buSzPct val="85000"/>
+              <a:buFont typeface="Wingdings" charset="2"/>
+              <a:buChar char=""/>
+            </a:pPr>
+            <a:r>
+              <a:rPr lang="en-US" sz="3200" b="0" u="none" strike="noStrike">
+                <a:solidFill>
+                  <a:srgbClr val="FFFFFF"/>
+                </a:solidFill>
+                <a:effectLst/>
+                <a:uFillTx/>
+                <a:latin typeface="3270 Nerd Font"/>
+              </a:rPr>
+              <a:t>520 KB RAM</a:t>
+            </a:r>
+            <a:endParaRPr lang="en-US" sz="3200" b="0" u="none" strike="noStrike">
+              <a:solidFill>
+                <a:srgbClr val="FFFFFF"/>
+              </a:solidFill>
+              <a:effectLst/>
+              <a:uFillTx/>
+              <a:latin typeface="Arial"/>
+            </a:endParaRPr>
+          </a:p>
+        </p:txBody>
+      </p:sp>
       <p:sp>
         <p:nvSpPr>
-          <p:cNvPr id="58" name=""/>
+          <p:cNvPr id="61" name=""/>
           <p:cNvSpPr txBox="1"/>
           <p:nvPr/>
         </p:nvSpPr>
         <p:spPr>
           <a:xfrm>
-            <a:off x="9572400" y="5257800"/>
-            <a:ext cx="461880" cy="401400"/>
+            <a:off x="9484200" y="5267880"/>
+            <a:ext cx="592560" cy="401400"/>
           </a:xfrm>
           <a:prstGeom prst="rect">
             <a:avLst/>
@@ -3297,7 +3663,7 @@
                 <a:uFillTx/>
                 <a:latin typeface="Arial"/>
               </a:rPr>
-              <a:t>[6]</a:t>
+              <a:t>[12]</a:t>
             </a:r>
             <a:endParaRPr lang="en-US" sz="1800" b="0" u="none" strike="noStrike">
               <a:solidFill>
@@ -3310,16 +3676,22 @@
           </a:p>
         </p:txBody>
       </p:sp>
-      <p:sp>
-        <p:nvSpPr>
-          <p:cNvPr id="59" name=""/>
-          <p:cNvSpPr txBox="1"/>
+      <p:pic>
+        <p:nvPicPr>
+          <p:cNvPr id="62" name=""/>
+          <p:cNvPicPr/>
           <p:nvPr/>
-        </p:nvSpPr>
+        </p:nvPicPr>
+        <p:blipFill>
+          <a:blip r:embed="rId1">
+            <a:alphaModFix amt="0"/>
+          </a:blip>
+          <a:stretch/>
+        </p:blipFill>
         <p:spPr>
           <a:xfrm>
-            <a:off x="5077080" y="1371600"/>
-            <a:ext cx="4524120" cy="3886200"/>
+            <a:off x="343080" y="2514600"/>
+            <a:ext cx="2857320" cy="2857320"/>
           </a:xfrm>
           <a:prstGeom prst="rect">
             <a:avLst/>
@@ -3329,288 +3701,9 @@
             <a:noFill/>
           </a:ln>
         </p:spPr>
-        <p:txBody>
-          <a:bodyPr lIns="90000" tIns="45000" rIns="90000" bIns="45000" anchor="t">
-            <a:spAutoFit/>
-          </a:bodyPr>
-          <a:p>
-            <a:pPr marL="216000" indent="-216000">
-              <a:spcBef>
-                <a:spcPts val="1191"/>
-              </a:spcBef>
-              <a:spcAft>
-                <a:spcPts val="992"/>
-              </a:spcAft>
-              <a:buClr>
-                <a:srgbClr val="FFFFFF"/>
-              </a:buClr>
-              <a:buSzPct val="85000"/>
-              <a:buFont typeface="Wingdings" charset="2"/>
-              <a:buChar char=""/>
-            </a:pPr>
-            <a:r>
-              <a:rPr lang="en-US" sz="3200" b="0" u="none" strike="noStrike">
-                <a:solidFill>
-                  <a:srgbClr val="FFFFFF"/>
-                </a:solidFill>
-                <a:effectLst/>
-                <a:uFillTx/>
-                <a:latin typeface="3270 Nerd Font"/>
-              </a:rPr>
-              <a:t>Damals 60$ heute 480$ </a:t>
-            </a:r>
-            <a:endParaRPr lang="en-US" sz="3200" b="0" u="none" strike="noStrike">
-              <a:solidFill>
-                <a:srgbClr val="FFFFFF"/>
-              </a:solidFill>
-              <a:effectLst/>
-              <a:uFillTx/>
-              <a:latin typeface="Arial"/>
-            </a:endParaRPr>
-          </a:p>
-          <a:p>
-            <a:pPr marL="216000" indent="-216000">
-              <a:lnSpc>
-                <a:spcPct val="100000"/>
-              </a:lnSpc>
-              <a:spcBef>
-                <a:spcPts val="1191"/>
-              </a:spcBef>
-              <a:spcAft>
-                <a:spcPts val="992"/>
-              </a:spcAft>
-              <a:buClr>
-                <a:srgbClr val="FFFFFF"/>
-              </a:buClr>
-              <a:buSzPct val="85000"/>
-              <a:buFont typeface="Wingdings" charset="2"/>
-              <a:buChar char=""/>
-            </a:pPr>
-            <a:r>
-              <a:rPr lang="en-US" sz="3200" b="0" u="none" strike="noStrike">
-                <a:solidFill>
-                  <a:srgbClr val="FFFFFF"/>
-                </a:solidFill>
-                <a:effectLst/>
-                <a:uFillTx/>
-                <a:latin typeface="3270 Nerd Font"/>
-              </a:rPr>
-              <a:t>4-Bit CPU</a:t>
-            </a:r>
-            <a:endParaRPr lang="en-US" sz="3200" b="0" u="none" strike="noStrike">
-              <a:solidFill>
-                <a:srgbClr val="FFFFFF"/>
-              </a:solidFill>
-              <a:effectLst/>
-              <a:uFillTx/>
-              <a:latin typeface="Arial"/>
-            </a:endParaRPr>
-          </a:p>
-          <a:p>
-            <a:pPr marL="216000" indent="-216000">
-              <a:lnSpc>
-                <a:spcPct val="100000"/>
-              </a:lnSpc>
-              <a:spcBef>
-                <a:spcPts val="1191"/>
-              </a:spcBef>
-              <a:spcAft>
-                <a:spcPts val="992"/>
-              </a:spcAft>
-              <a:buClr>
-                <a:srgbClr val="FFFFFF"/>
-              </a:buClr>
-              <a:buSzPct val="85000"/>
-              <a:buFont typeface="Wingdings" charset="2"/>
-              <a:buChar char=""/>
-            </a:pPr>
-            <a:r>
-              <a:rPr lang="en-US" sz="3200" b="0" u="none" strike="noStrike">
-                <a:solidFill>
-                  <a:srgbClr val="FFFFFF"/>
-                </a:solidFill>
-                <a:effectLst/>
-                <a:uFillTx/>
-                <a:latin typeface="3270 Nerd Font"/>
-              </a:rPr>
-              <a:t>1 Kern</a:t>
-            </a:r>
-            <a:endParaRPr lang="en-US" sz="3200" b="0" u="none" strike="noStrike">
-              <a:solidFill>
-                <a:srgbClr val="FFFFFF"/>
-              </a:solidFill>
-              <a:effectLst/>
-              <a:uFillTx/>
-              <a:latin typeface="Arial"/>
-            </a:endParaRPr>
-          </a:p>
-          <a:p>
-            <a:pPr marL="216000" indent="-216000">
-              <a:spcBef>
-                <a:spcPts val="1191"/>
-              </a:spcBef>
-              <a:spcAft>
-                <a:spcPts val="992"/>
-              </a:spcAft>
-              <a:buClr>
-                <a:srgbClr val="FFFFFF"/>
-              </a:buClr>
-              <a:buSzPct val="85000"/>
-              <a:buFont typeface="Wingdings" charset="2"/>
-              <a:buChar char=""/>
-            </a:pPr>
-            <a:r>
-              <a:rPr lang="en-US" sz="3200" b="0" u="none" strike="noStrike">
-                <a:solidFill>
-                  <a:srgbClr val="FFFFFF"/>
-                </a:solidFill>
-                <a:effectLst/>
-                <a:uFillTx/>
-                <a:latin typeface="3270 Nerd Font"/>
-              </a:rPr>
-              <a:t>740 - 750 kHz</a:t>
-            </a:r>
-            <a:endParaRPr lang="en-US" sz="3200" b="0" u="none" strike="noStrike">
-              <a:solidFill>
-                <a:srgbClr val="FFFFFF"/>
-              </a:solidFill>
-              <a:effectLst/>
-              <a:uFillTx/>
-              <a:latin typeface="Arial"/>
-            </a:endParaRPr>
-          </a:p>
-        </p:txBody>
-      </p:sp>
+      </p:pic>
     </p:spTree>
   </p:cSld>
-  <p:timing>
-    <p:tnLst>
-      <p:par>
-        <p:cTn id="89" dur="indefinite" restart="never" nodeType="tmRoot">
-          <p:childTnLst>
-            <p:seq>
-              <p:cTn id="90" dur="indefinite" nodeType="mainSeq">
-                <p:childTnLst>
-                  <p:par>
-                    <p:cTn id="91" fill="hold">
-                      <p:stCondLst>
-                        <p:cond delay="indefinite"/>
-                      </p:stCondLst>
-                      <p:childTnLst>
-                        <p:par>
-                          <p:cTn id="92" fill="hold">
-                            <p:stCondLst>
-                              <p:cond delay="0"/>
-                            </p:stCondLst>
-                            <p:childTnLst>
-                              <p:par>
-                                <p:cTn id="93" presetID="1" presetClass="entr" fill="hold" nodeType="clickEffect">
-                                  <p:stCondLst>
-                                    <p:cond delay="0"/>
-                                  </p:stCondLst>
-                                  <p:childTnLst>
-                                    <p:set>
-                                      <p:cBhvr>
-                                        <p:cTn id="94" dur="1" fill="hold">
-                                          <p:stCondLst>
-                                            <p:cond delay="0"/>
-                                          </p:stCondLst>
-                                        </p:cTn>
-                                        <p:tgtEl>
-                                          <p:spTgt spid="59">
-                                            <p:txEl>
-                                              <p:pRg st="0" end="0"/>
-                                            </p:txEl>
-                                          </p:spTgt>
-                                        </p:tgtEl>
-                                        <p:attrNameLst>
-                                          <p:attrName>style.visibility</p:attrName>
-                                        </p:attrNameLst>
-                                      </p:cBhvr>
-                                      <p:to>
-                                        <p:strVal val="visible"/>
-                                      </p:to>
-                                    </p:set>
-                                  </p:childTnLst>
-                                </p:cTn>
-                              </p:par>
-                            </p:childTnLst>
-                          </p:cTn>
-                        </p:par>
-                      </p:childTnLst>
-                    </p:cTn>
-                  </p:par>
-                  <p:par>
-                    <p:cTn id="95" fill="hold">
-                      <p:stCondLst>
-                        <p:cond delay="indefinite"/>
-                      </p:stCondLst>
-                      <p:childTnLst>
-                        <p:par>
-                          <p:cTn id="96" fill="hold">
-                            <p:stCondLst>
-                              <p:cond delay="0"/>
-                            </p:stCondLst>
-                            <p:childTnLst>
-                              <p:par>
-                                <p:cTn id="97" presetID="1" presetClass="entr" fill="hold" nodeType="clickEffect">
-                                  <p:stCondLst>
-                                    <p:cond delay="0"/>
-                                  </p:stCondLst>
-                                  <p:childTnLst>
-                                    <p:set>
-                                      <p:cBhvr>
-                                        <p:cTn id="98" dur="1" fill="hold">
-                                          <p:stCondLst>
-                                            <p:cond delay="0"/>
-                                          </p:stCondLst>
-                                        </p:cTn>
-                                        <p:tgtEl>
-                                          <p:spTgt spid="59">
-                                            <p:txEl>
-                                              <p:pRg st="1" end="1"/>
-                                            </p:txEl>
-                                          </p:spTgt>
-                                        </p:tgtEl>
-                                        <p:attrNameLst>
-                                          <p:attrName>style.visibility</p:attrName>
-                                        </p:attrNameLst>
-                                      </p:cBhvr>
-                                      <p:to>
-                                        <p:strVal val="visible"/>
-                                      </p:to>
-                                    </p:set>
-                                  </p:childTnLst>
-                                </p:cTn>
-                              </p:par>
-                            </p:childTnLst>
-                          </p:cTn>
-                        </p:par>
-                      </p:childTnLst>
-                    </p:cTn>
-                  </p:par>
-                </p:childTnLst>
-              </p:cTn>
-              <p:prevCondLst>
-                <p:cond evt="onPrev">
-                  <p:tgtEl>
-                    <p:sldTgt/>
-                  </p:tgtEl>
-                </p:cond>
-              </p:prevCondLst>
-              <p:nextCondLst>
-                <p:cond evt="onNext">
-                  <p:tgtEl>
-                    <p:sldTgt/>
-                  </p:tgtEl>
-                </p:cond>
-              </p:nextCondLst>
-            </p:seq>
-          </p:childTnLst>
-        </p:cTn>
-      </p:par>
-    </p:tnLst>
-  </p:timing>
 </p:sld>
 </file>
 
@@ -3650,7 +3743,7 @@
       </p:grpSpPr>
       <p:sp>
         <p:nvSpPr>
-          <p:cNvPr id="60" name="PlaceHolder 1"/>
+          <p:cNvPr id="63" name="PlaceHolder 1"/>
           <p:cNvSpPr>
             <a:spLocks noGrp="1"/>
           </p:cNvSpPr>
@@ -3688,7 +3781,7 @@
                 <a:uFillTx/>
                 <a:latin typeface="3270 Nerd Font"/>
               </a:rPr>
-              <a:t>Moderne Mikroprozessoren</a:t>
+              <a:t>Aufbau</a:t>
             </a:r>
             <a:endParaRPr lang="en-US" sz="4400" b="0" u="none" strike="noStrike">
               <a:solidFill>
@@ -3703,7 +3796,7 @@
       </p:sp>
       <p:sp>
         <p:nvSpPr>
-          <p:cNvPr id="61" name="PlaceHolder 2"/>
+          <p:cNvPr id="64" name="PlaceHolder 2"/>
           <p:cNvSpPr>
             <a:spLocks noGrp="1"/>
           </p:cNvSpPr>
@@ -3713,8 +3806,8 @@
         </p:nvSpPr>
         <p:spPr>
           <a:xfrm>
-            <a:off x="3657600" y="1326240"/>
-            <a:ext cx="5914800" cy="3931560"/>
+            <a:off x="503640" y="1326240"/>
+            <a:ext cx="9068760" cy="3931560"/>
           </a:xfrm>
           <a:prstGeom prst="rect">
             <a:avLst/>
@@ -3729,7 +3822,7 @@
             <a:normAutofit lnSpcReduction="9999"/>
           </a:bodyPr>
           <a:p>
-            <a:pPr marL="216000" indent="-216000" algn="l">
+            <a:pPr marL="432000" indent="-324000" algn="l">
               <a:spcBef>
                 <a:spcPts val="1414"/>
               </a:spcBef>
@@ -3749,7 +3842,7 @@
                 <a:uFillTx/>
                 <a:latin typeface="3270 Nerd Font"/>
               </a:rPr>
-              <a:t>Januar 2026</a:t>
+              <a:t>Prozessor</a:t>
             </a:r>
             <a:endParaRPr lang="en-US" sz="3200" b="0" u="none" strike="noStrike">
               <a:solidFill>
@@ -3761,7 +3854,7 @@
             </a:endParaRPr>
           </a:p>
           <a:p>
-            <a:pPr marL="216000" indent="-216000" algn="l">
+            <a:pPr marL="432000" indent="-324000" algn="l">
               <a:spcBef>
                 <a:spcPts val="1414"/>
               </a:spcBef>
@@ -3781,7 +3874,7 @@
                 <a:uFillTx/>
                 <a:latin typeface="3270 Nerd Font"/>
               </a:rPr>
-              <a:t>490€</a:t>
+              <a:t>RAM (Random-access memory)</a:t>
             </a:r>
             <a:endParaRPr lang="en-US" sz="3200" b="0" u="none" strike="noStrike">
               <a:solidFill>
@@ -3793,7 +3886,7 @@
             </a:endParaRPr>
           </a:p>
           <a:p>
-            <a:pPr marL="216000" indent="-216000" algn="l">
+            <a:pPr marL="432000" indent="-324000" algn="l">
               <a:spcBef>
                 <a:spcPts val="1414"/>
               </a:spcBef>
@@ -3813,7 +3906,7 @@
                 <a:uFillTx/>
                 <a:latin typeface="3270 Nerd Font"/>
               </a:rPr>
-              <a:t>64-Bit CPU</a:t>
+              <a:t>ROM (Read-only memory)</a:t>
             </a:r>
             <a:endParaRPr lang="en-US" sz="3200" b="0" u="none" strike="noStrike">
               <a:solidFill>
@@ -3825,7 +3918,7 @@
             </a:endParaRPr>
           </a:p>
           <a:p>
-            <a:pPr marL="216000" indent="-216000" algn="l">
+            <a:pPr marL="432000" indent="-324000" algn="l">
               <a:spcBef>
                 <a:spcPts val="1414"/>
               </a:spcBef>
@@ -3845,7 +3938,7 @@
                 <a:uFillTx/>
                 <a:latin typeface="3270 Nerd Font"/>
               </a:rPr>
-              <a:t>8 Kerne</a:t>
+              <a:t>A/D Converter</a:t>
             </a:r>
             <a:endParaRPr lang="en-US" sz="3200" b="0" u="none" strike="noStrike">
               <a:solidFill>
@@ -3857,7 +3950,7 @@
             </a:endParaRPr>
           </a:p>
           <a:p>
-            <a:pPr marL="216000" indent="-216000" algn="l">
+            <a:pPr marL="432000" indent="-324000" algn="l">
               <a:spcBef>
                 <a:spcPts val="1414"/>
               </a:spcBef>
@@ -3877,7 +3970,7 @@
                 <a:uFillTx/>
                 <a:latin typeface="3270 Nerd Font"/>
               </a:rPr>
-              <a:t>4,7 – 5,6 GHz</a:t>
+              <a:t>Timer</a:t>
             </a:r>
             <a:endParaRPr lang="en-US" sz="3200" b="0" u="none" strike="noStrike">
               <a:solidFill>
@@ -3889,7 +3982,7 @@
             </a:endParaRPr>
           </a:p>
           <a:p>
-            <a:pPr marL="216000" indent="-216000" algn="l">
+            <a:pPr marL="432000" indent="-324000" algn="l">
               <a:spcBef>
                 <a:spcPts val="1414"/>
               </a:spcBef>
@@ -3897,11 +3990,11 @@
                 <a:srgbClr val="FFFFFF"/>
               </a:buClr>
               <a:buSzPct val="85000"/>
-              <a:buFont typeface="Symbol" charset="2"/>
-              <a:buChar char=""/>
-            </a:pPr>
-            <a:r>
-              <a:rPr lang="en-US" sz="3200" b="1" u="none" strike="noStrike">
+              <a:buFont typeface="Wingdings" charset="2"/>
+              <a:buChar char=""/>
+            </a:pPr>
+            <a:r>
+              <a:rPr lang="en-US" sz="3200" b="0" u="none" strike="noStrike">
                 <a:solidFill>
                   <a:srgbClr val="FFFFFF"/>
                 </a:solidFill>
@@ -3909,7 +4002,39 @@
                 <a:uFillTx/>
                 <a:latin typeface="3270 Nerd Font"/>
               </a:rPr>
-              <a:t> Mehr als 7000-mal schneller</a:t>
+              <a:t>Interrupts</a:t>
+            </a:r>
+            <a:endParaRPr lang="en-US" sz="3200" b="0" u="none" strike="noStrike">
+              <a:solidFill>
+                <a:srgbClr val="FFFFFF"/>
+              </a:solidFill>
+              <a:effectLst/>
+              <a:uFillTx/>
+              <a:latin typeface="Arial"/>
+            </a:endParaRPr>
+          </a:p>
+          <a:p>
+            <a:pPr marL="432000" indent="-324000" algn="l">
+              <a:spcBef>
+                <a:spcPts val="1414"/>
+              </a:spcBef>
+              <a:buClr>
+                <a:srgbClr val="FFFFFF"/>
+              </a:buClr>
+              <a:buSzPct val="85000"/>
+              <a:buFont typeface="Wingdings" charset="2"/>
+              <a:buChar char=""/>
+            </a:pPr>
+            <a:r>
+              <a:rPr lang="en-US" sz="3200" b="0" u="none" strike="noStrike">
+                <a:solidFill>
+                  <a:srgbClr val="FFFFFF"/>
+                </a:solidFill>
+                <a:effectLst/>
+                <a:uFillTx/>
+                <a:latin typeface="3270 Nerd Font"/>
+              </a:rPr>
+              <a:t>Bus</a:t>
             </a:r>
             <a:endParaRPr lang="en-US" sz="3200" b="0" u="none" strike="noStrike">
               <a:solidFill>
@@ -3924,14 +4049,14 @@
       </p:sp>
       <p:sp>
         <p:nvSpPr>
-          <p:cNvPr id="62" name=""/>
+          <p:cNvPr id="65" name=""/>
           <p:cNvSpPr txBox="1"/>
           <p:nvPr/>
         </p:nvSpPr>
         <p:spPr>
           <a:xfrm>
-            <a:off x="9484200" y="5267880"/>
-            <a:ext cx="592560" cy="401400"/>
+            <a:off x="9572400" y="5257800"/>
+            <a:ext cx="461880" cy="401400"/>
           </a:xfrm>
           <a:prstGeom prst="rect">
             <a:avLst/>
@@ -3955,7 +4080,7 @@
                 <a:uFillTx/>
                 <a:latin typeface="Arial"/>
               </a:rPr>
-              <a:t>[11]</a:t>
+              <a:t>[7]</a:t>
             </a:r>
             <a:endParaRPr lang="en-US" sz="1800" b="0" u="none" strike="noStrike">
               <a:solidFill>
@@ -3970,7 +4095,7 @@
       </p:sp>
       <p:pic>
         <p:nvPicPr>
-          <p:cNvPr id="63" name=""/>
+          <p:cNvPr id="66" name=""/>
           <p:cNvPicPr/>
           <p:nvPr/>
         </p:nvPicPr>
@@ -3978,13 +4103,12 @@
           <a:blip r:embed="rId1">
             <a:alphaModFix amt="0"/>
           </a:blip>
-          <a:srcRect l="28307" t="15792" r="28046" b="15759"/>
           <a:stretch/>
         </p:blipFill>
         <p:spPr>
           <a:xfrm>
-            <a:off x="228960" y="2514600"/>
-            <a:ext cx="2742840" cy="2971440"/>
+            <a:off x="6177600" y="3657600"/>
+            <a:ext cx="3566160" cy="1371600"/>
           </a:xfrm>
           <a:prstGeom prst="rect">
             <a:avLst/>
@@ -4000,38 +4124,38 @@
   <p:timing>
     <p:tnLst>
       <p:par>
-        <p:cTn id="99" dur="indefinite" restart="never" nodeType="tmRoot">
+        <p:cTn id="101" dur="indefinite" restart="never" nodeType="tmRoot">
           <p:childTnLst>
             <p:seq>
-              <p:cTn id="100" dur="indefinite" nodeType="mainSeq">
+              <p:cTn id="102" dur="indefinite" nodeType="mainSeq">
                 <p:childTnLst>
                   <p:par>
-                    <p:cTn id="101" fill="hold">
+                    <p:cTn id="103" fill="hold">
                       <p:stCondLst>
                         <p:cond delay="indefinite"/>
                       </p:stCondLst>
                       <p:childTnLst>
                         <p:par>
-                          <p:cTn id="102" fill="hold">
+                          <p:cTn id="104" fill="hold">
                             <p:stCondLst>
                               <p:cond delay="0"/>
                             </p:stCondLst>
                             <p:childTnLst>
                               <p:par>
-                                <p:cTn id="103" presetID="1" presetClass="entr" fill="hold" nodeType="clickEffect">
+                                <p:cTn id="105" presetID="1" presetClass="entr" fill="hold" nodeType="clickEffect">
                                   <p:stCondLst>
                                     <p:cond delay="0"/>
                                   </p:stCondLst>
                                   <p:childTnLst>
                                     <p:set>
                                       <p:cBhvr>
-                                        <p:cTn id="104" dur="1" fill="hold">
+                                        <p:cTn id="106" dur="1" fill="hold">
                                           <p:stCondLst>
                                             <p:cond delay="0"/>
                                           </p:stCondLst>
                                         </p:cTn>
                                         <p:tgtEl>
-                                          <p:spTgt spid="61">
+                                          <p:spTgt spid="64">
                                             <p:txEl>
                                               <p:pRg st="0" end="0"/>
                                             </p:txEl>
@@ -4055,32 +4179,32 @@
                     </p:cTn>
                   </p:par>
                   <p:par>
-                    <p:cTn id="105" fill="hold">
+                    <p:cTn id="107" fill="hold">
                       <p:stCondLst>
                         <p:cond delay="indefinite"/>
                       </p:stCondLst>
                       <p:childTnLst>
                         <p:par>
-                          <p:cTn id="106" fill="hold">
+                          <p:cTn id="108" fill="hold">
                             <p:stCondLst>
                               <p:cond delay="0"/>
                             </p:stCondLst>
                             <p:childTnLst>
                               <p:par>
-                                <p:cTn id="107" presetID="1" presetClass="entr" fill="hold" nodeType="clickEffect">
+                                <p:cTn id="109" presetID="1" presetClass="entr" fill="hold" nodeType="clickEffect">
                                   <p:stCondLst>
                                     <p:cond delay="0"/>
                                   </p:stCondLst>
                                   <p:childTnLst>
                                     <p:set>
                                       <p:cBhvr>
-                                        <p:cTn id="108" dur="1" fill="hold">
+                                        <p:cTn id="110" dur="1" fill="hold">
                                           <p:stCondLst>
                                             <p:cond delay="0"/>
                                           </p:stCondLst>
                                         </p:cTn>
                                         <p:tgtEl>
-                                          <p:spTgt spid="61">
+                                          <p:spTgt spid="64">
                                             <p:txEl>
                                               <p:pRg st="1" end="1"/>
                                             </p:txEl>
@@ -4104,34 +4228,208 @@
                     </p:cTn>
                   </p:par>
                   <p:par>
-                    <p:cTn id="109" fill="hold">
+                    <p:cTn id="111" fill="hold">
                       <p:stCondLst>
                         <p:cond delay="indefinite"/>
                       </p:stCondLst>
                       <p:childTnLst>
                         <p:par>
-                          <p:cTn id="110" fill="hold">
+                          <p:cTn id="112" fill="hold">
                             <p:stCondLst>
                               <p:cond delay="0"/>
                             </p:stCondLst>
                             <p:childTnLst>
                               <p:par>
-                                <p:cTn id="111" presetID="1" presetClass="entr" fill="hold" nodeType="clickEffect">
+                                <p:cTn id="113" presetID="1" presetClass="entr" fill="hold" nodeType="clickEffect">
                                   <p:stCondLst>
                                     <p:cond delay="0"/>
                                   </p:stCondLst>
                                   <p:childTnLst>
                                     <p:set>
                                       <p:cBhvr>
-                                        <p:cTn id="112" dur="1" fill="hold">
+                                        <p:cTn id="114" dur="1" fill="hold">
                                           <p:stCondLst>
                                             <p:cond delay="0"/>
                                           </p:stCondLst>
                                         </p:cTn>
                                         <p:tgtEl>
-                                          <p:spTgt spid="61">
+                                          <p:spTgt spid="64">
                                             <p:txEl>
                                               <p:pRg st="2" end="2"/>
+                                            </p:txEl>
+                                          </p:spTgt>
+                                        </p:tgtEl>
+                                        <p:attrNameLst>
+                                          <p:attrName>style.visibility</p:attrName>
+                                        </p:attrNameLst>
+                                      </p:cBhvr>
+                                      <p:to>
+                                        <p:strVal val="visible"/>
+                                      </p:to>
+                                    </p:set>
+                                  </p:childTnLst>
+                                </p:cTn>
+                              </p:par>
+                            </p:childTnLst>
+                          </p:cTn>
+                        </p:par>
+                      </p:childTnLst>
+                    </p:cTn>
+                  </p:par>
+                  <p:par>
+                    <p:cTn id="115" fill="hold">
+                      <p:stCondLst>
+                        <p:cond delay="indefinite"/>
+                      </p:stCondLst>
+                      <p:childTnLst>
+                        <p:par>
+                          <p:cTn id="116" fill="hold">
+                            <p:stCondLst>
+                              <p:cond delay="0"/>
+                            </p:stCondLst>
+                            <p:childTnLst>
+                              <p:par>
+                                <p:cTn id="117" presetID="1" presetClass="entr" fill="hold" nodeType="clickEffect">
+                                  <p:stCondLst>
+                                    <p:cond delay="0"/>
+                                  </p:stCondLst>
+                                  <p:childTnLst>
+                                    <p:set>
+                                      <p:cBhvr>
+                                        <p:cTn id="118" dur="1" fill="hold">
+                                          <p:stCondLst>
+                                            <p:cond delay="0"/>
+                                          </p:stCondLst>
+                                        </p:cTn>
+                                        <p:tgtEl>
+                                          <p:spTgt spid="64">
+                                            <p:txEl>
+                                              <p:pRg st="3" end="3"/>
+                                            </p:txEl>
+                                          </p:spTgt>
+                                        </p:tgtEl>
+                                        <p:attrNameLst>
+                                          <p:attrName>style.visibility</p:attrName>
+                                        </p:attrNameLst>
+                                      </p:cBhvr>
+                                      <p:to>
+                                        <p:strVal val="visible"/>
+                                      </p:to>
+                                    </p:set>
+                                  </p:childTnLst>
+                                </p:cTn>
+                              </p:par>
+                            </p:childTnLst>
+                          </p:cTn>
+                        </p:par>
+                      </p:childTnLst>
+                    </p:cTn>
+                  </p:par>
+                  <p:par>
+                    <p:cTn id="119" fill="hold">
+                      <p:stCondLst>
+                        <p:cond delay="indefinite"/>
+                      </p:stCondLst>
+                      <p:childTnLst>
+                        <p:par>
+                          <p:cTn id="120" fill="hold">
+                            <p:stCondLst>
+                              <p:cond delay="0"/>
+                            </p:stCondLst>
+                            <p:childTnLst>
+                              <p:par>
+                                <p:cTn id="121" presetID="1" presetClass="entr" fill="hold" nodeType="clickEffect">
+                                  <p:stCondLst>
+                                    <p:cond delay="0"/>
+                                  </p:stCondLst>
+                                  <p:childTnLst>
+                                    <p:set>
+                                      <p:cBhvr>
+                                        <p:cTn id="122" dur="1" fill="hold">
+                                          <p:stCondLst>
+                                            <p:cond delay="0"/>
+                                          </p:stCondLst>
+                                        </p:cTn>
+                                        <p:tgtEl>
+                                          <p:spTgt spid="64">
+                                            <p:txEl>
+                                              <p:pRg st="4" end="4"/>
+                                            </p:txEl>
+                                          </p:spTgt>
+                                        </p:tgtEl>
+                                        <p:attrNameLst>
+                                          <p:attrName>style.visibility</p:attrName>
+                                        </p:attrNameLst>
+                                      </p:cBhvr>
+                                      <p:to>
+                                        <p:strVal val="visible"/>
+                                      </p:to>
+                                    </p:set>
+                                  </p:childTnLst>
+                                </p:cTn>
+                              </p:par>
+                              <p:par>
+                                <p:cTn id="123" presetID="1" presetClass="entr" fill="hold" nodeType="withEffect">
+                                  <p:stCondLst>
+                                    <p:cond delay="0"/>
+                                  </p:stCondLst>
+                                  <p:childTnLst>
+                                    <p:set>
+                                      <p:cBhvr>
+                                        <p:cTn id="124" dur="1" fill="hold">
+                                          <p:stCondLst>
+                                            <p:cond delay="0"/>
+                                          </p:stCondLst>
+                                        </p:cTn>
+                                        <p:tgtEl>
+                                          <p:spTgt spid="66"/>
+                                        </p:tgtEl>
+                                        <p:attrNameLst>
+                                          <p:attrName>style.visibility</p:attrName>
+                                        </p:attrNameLst>
+                                      </p:cBhvr>
+                                      <p:to>
+                                        <p:strVal val="visible"/>
+                                      </p:to>
+                                    </p:set>
+                                  </p:childTnLst>
+                                </p:cTn>
+                              </p:par>
+                            </p:childTnLst>
+                          </p:cTn>
+                        </p:par>
+                      </p:childTnLst>
+                    </p:cTn>
+                  </p:par>
+                  <p:par>
+                    <p:cTn id="125" fill="hold">
+                      <p:stCondLst>
+                        <p:cond delay="indefinite"/>
+                      </p:stCondLst>
+                      <p:childTnLst>
+                        <p:par>
+                          <p:cTn id="126" fill="hold">
+                            <p:stCondLst>
+                              <p:cond delay="0"/>
+                            </p:stCondLst>
+                            <p:childTnLst>
+                              <p:par>
+                                <p:cTn id="127" presetID="1" presetClass="entr" fill="hold" nodeType="clickEffect">
+                                  <p:stCondLst>
+                                    <p:cond delay="0"/>
+                                  </p:stCondLst>
+                                  <p:childTnLst>
+                                    <p:set>
+                                      <p:cBhvr>
+                                        <p:cTn id="128" dur="1" fill="hold">
+                                          <p:stCondLst>
+                                            <p:cond delay="0"/>
+                                          </p:stCondLst>
+                                        </p:cTn>
+                                        <p:tgtEl>
+                                          <p:spTgt spid="64">
+                                            <p:txEl>
+                                              <p:pRg st="5" end="5"/>
                                             </p:txEl>
                                           </p:spTgt>
                                         </p:tgtEl>
@@ -4211,20 +4509,22 @@
           <a:chExt cx="0" cy="0"/>
         </a:xfrm>
       </p:grpSpPr>
-      <p:sp>
-        <p:nvSpPr>
-          <p:cNvPr id="64" name="PlaceHolder 1"/>
-          <p:cNvSpPr>
-            <a:spLocks noGrp="1"/>
-          </p:cNvSpPr>
-          <p:nvPr>
-            <p:ph type="title"/>
-          </p:nvPr>
-        </p:nvSpPr>
+      <p:pic>
+        <p:nvPicPr>
+          <p:cNvPr id="67" name=""/>
+          <p:cNvPicPr/>
+          <p:nvPr/>
+        </p:nvPicPr>
+        <p:blipFill>
+          <a:blip r:embed="rId1">
+            <a:alphaModFix amt="0"/>
+          </a:blip>
+          <a:stretch/>
+        </p:blipFill>
         <p:spPr>
           <a:xfrm>
-            <a:off x="503640" y="225720"/>
-            <a:ext cx="9068760" cy="946440"/>
+            <a:off x="1293840" y="1325880"/>
+            <a:ext cx="7487640" cy="3931560"/>
           </a:xfrm>
           <a:prstGeom prst="rect">
             <a:avLst/>
@@ -4234,50 +4534,23 @@
             <a:noFill/>
           </a:ln>
         </p:spPr>
-        <p:txBody>
-          <a:bodyPr lIns="0" tIns="0" rIns="0" bIns="0" anchor="ctr">
-            <a:spAutoFit/>
-          </a:bodyPr>
-          <a:p>
-            <a:pPr indent="0" algn="ctr">
-              <a:buNone/>
-            </a:pPr>
-            <a:r>
-              <a:rPr lang="en-US" sz="4400" b="1" u="none" strike="noStrike">
-                <a:solidFill>
-                  <a:srgbClr val="FFFFFF"/>
-                </a:solidFill>
-                <a:effectLst/>
-                <a:uFillTx/>
-                <a:latin typeface="3270 Nerd Font"/>
-              </a:rPr>
-              <a:t>Moderne Mikrocontroller</a:t>
-            </a:r>
-            <a:endParaRPr lang="en-US" sz="4400" b="0" u="none" strike="noStrike">
-              <a:solidFill>
-                <a:srgbClr val="FFFFFF"/>
-              </a:solidFill>
-              <a:effectLst/>
-              <a:uFillTx/>
-              <a:latin typeface="Arial"/>
-            </a:endParaRPr>
-          </a:p>
-        </p:txBody>
-      </p:sp>
-      <p:sp>
-        <p:nvSpPr>
-          <p:cNvPr id="65" name="PlaceHolder 2"/>
-          <p:cNvSpPr>
-            <a:spLocks noGrp="1"/>
-          </p:cNvSpPr>
-          <p:nvPr>
-            <p:ph/>
-          </p:nvPr>
-        </p:nvSpPr>
+      </p:pic>
+      <p:pic>
+        <p:nvPicPr>
+          <p:cNvPr id="68" name=""/>
+          <p:cNvPicPr/>
+          <p:nvPr/>
+        </p:nvPicPr>
+        <p:blipFill>
+          <a:blip r:embed="rId2">
+            <a:alphaModFix amt="0"/>
+          </a:blip>
+          <a:stretch/>
+        </p:blipFill>
         <p:spPr>
           <a:xfrm>
-            <a:off x="3657600" y="1326240"/>
-            <a:ext cx="5914800" cy="3931560"/>
+            <a:off x="-369720" y="0"/>
+            <a:ext cx="10797840" cy="5669280"/>
           </a:xfrm>
           <a:prstGeom prst="rect">
             <a:avLst/>
@@ -4287,181 +4560,16 @@
             <a:noFill/>
           </a:ln>
         </p:spPr>
-        <p:txBody>
-          <a:bodyPr lIns="0" tIns="0" rIns="0" bIns="0" anchor="t">
-            <a:normAutofit/>
-          </a:bodyPr>
-          <a:p>
-            <a:pPr marL="216000" indent="-216000" algn="l">
-              <a:spcBef>
-                <a:spcPts val="1414"/>
-              </a:spcBef>
-              <a:buClr>
-                <a:srgbClr val="FFFFFF"/>
-              </a:buClr>
-              <a:buSzPct val="85000"/>
-              <a:buFont typeface="Wingdings" charset="2"/>
-              <a:buChar char=""/>
-            </a:pPr>
-            <a:r>
-              <a:rPr lang="en-US" sz="3200" b="0" u="none" strike="noStrike">
-                <a:solidFill>
-                  <a:srgbClr val="FFFFFF"/>
-                </a:solidFill>
-                <a:effectLst/>
-                <a:uFillTx/>
-                <a:latin typeface="3270 Nerd Font"/>
-              </a:rPr>
-              <a:t>August 2024</a:t>
-            </a:r>
-            <a:endParaRPr lang="en-US" sz="3200" b="0" u="none" strike="noStrike">
-              <a:solidFill>
-                <a:srgbClr val="FFFFFF"/>
-              </a:solidFill>
-              <a:effectLst/>
-              <a:uFillTx/>
-              <a:latin typeface="Arial"/>
-            </a:endParaRPr>
-          </a:p>
-          <a:p>
-            <a:pPr marL="216000" indent="-216000" algn="l">
-              <a:spcBef>
-                <a:spcPts val="1414"/>
-              </a:spcBef>
-              <a:buClr>
-                <a:srgbClr val="FFFFFF"/>
-              </a:buClr>
-              <a:buSzPct val="85000"/>
-              <a:buFont typeface="Wingdings" charset="2"/>
-              <a:buChar char=""/>
-            </a:pPr>
-            <a:r>
-              <a:rPr lang="en-US" sz="3200" b="0" u="none" strike="noStrike">
-                <a:solidFill>
-                  <a:srgbClr val="FFFFFF"/>
-                </a:solidFill>
-                <a:effectLst/>
-                <a:uFillTx/>
-                <a:latin typeface="3270 Nerd Font"/>
-              </a:rPr>
-              <a:t>1€</a:t>
-            </a:r>
-            <a:endParaRPr lang="en-US" sz="3200" b="0" u="none" strike="noStrike">
-              <a:solidFill>
-                <a:srgbClr val="FFFFFF"/>
-              </a:solidFill>
-              <a:effectLst/>
-              <a:uFillTx/>
-              <a:latin typeface="Arial"/>
-            </a:endParaRPr>
-          </a:p>
-          <a:p>
-            <a:pPr marL="216000" indent="-216000" algn="l">
-              <a:spcBef>
-                <a:spcPts val="1414"/>
-              </a:spcBef>
-              <a:buClr>
-                <a:srgbClr val="FFFFFF"/>
-              </a:buClr>
-              <a:buSzPct val="85000"/>
-              <a:buFont typeface="Wingdings" charset="2"/>
-              <a:buChar char=""/>
-            </a:pPr>
-            <a:r>
-              <a:rPr lang="en-US" sz="3200" b="0" u="none" strike="noStrike">
-                <a:solidFill>
-                  <a:srgbClr val="FFFFFF"/>
-                </a:solidFill>
-                <a:effectLst/>
-                <a:uFillTx/>
-                <a:latin typeface="3270 Nerd Font"/>
-              </a:rPr>
-              <a:t>32-Bit CPU</a:t>
-            </a:r>
-            <a:endParaRPr lang="en-US" sz="3200" b="0" u="none" strike="noStrike">
-              <a:solidFill>
-                <a:srgbClr val="FFFFFF"/>
-              </a:solidFill>
-              <a:effectLst/>
-              <a:uFillTx/>
-              <a:latin typeface="Arial"/>
-            </a:endParaRPr>
-          </a:p>
-          <a:p>
-            <a:pPr marL="216000" indent="-216000" algn="l">
-              <a:spcBef>
-                <a:spcPts val="1414"/>
-              </a:spcBef>
-              <a:buClr>
-                <a:srgbClr val="FFFFFF"/>
-              </a:buClr>
-              <a:buSzPct val="85000"/>
-              <a:buFont typeface="Wingdings" charset="2"/>
-              <a:buChar char=""/>
-            </a:pPr>
-            <a:r>
-              <a:rPr lang="en-US" sz="3200" b="0" u="none" strike="noStrike">
-                <a:solidFill>
-                  <a:srgbClr val="FFFFFF"/>
-                </a:solidFill>
-                <a:effectLst/>
-                <a:uFillTx/>
-                <a:latin typeface="3270 Nerd Font"/>
-              </a:rPr>
-              <a:t>150 MHz</a:t>
-            </a:r>
-            <a:endParaRPr lang="en-US" sz="3200" b="0" u="none" strike="noStrike">
-              <a:solidFill>
-                <a:srgbClr val="FFFFFF"/>
-              </a:solidFill>
-              <a:effectLst/>
-              <a:uFillTx/>
-              <a:latin typeface="Arial"/>
-            </a:endParaRPr>
-          </a:p>
-          <a:p>
-            <a:pPr marL="216000" indent="-216000" algn="l">
-              <a:spcBef>
-                <a:spcPts val="1414"/>
-              </a:spcBef>
-              <a:buClr>
-                <a:srgbClr val="FFFFFF"/>
-              </a:buClr>
-              <a:buSzPct val="85000"/>
-              <a:buFont typeface="Wingdings" charset="2"/>
-              <a:buChar char=""/>
-            </a:pPr>
-            <a:r>
-              <a:rPr lang="en-US" sz="3200" b="0" u="none" strike="noStrike">
-                <a:solidFill>
-                  <a:srgbClr val="FFFFFF"/>
-                </a:solidFill>
-                <a:effectLst/>
-                <a:uFillTx/>
-                <a:latin typeface="3270 Nerd Font"/>
-              </a:rPr>
-              <a:t>520 KB RAM</a:t>
-            </a:r>
-            <a:endParaRPr lang="en-US" sz="3200" b="0" u="none" strike="noStrike">
-              <a:solidFill>
-                <a:srgbClr val="FFFFFF"/>
-              </a:solidFill>
-              <a:effectLst/>
-              <a:uFillTx/>
-              <a:latin typeface="Arial"/>
-            </a:endParaRPr>
-          </a:p>
-        </p:txBody>
-      </p:sp>
+      </p:pic>
       <p:sp>
         <p:nvSpPr>
-          <p:cNvPr id="66" name=""/>
+          <p:cNvPr id="69" name=""/>
           <p:cNvSpPr txBox="1"/>
           <p:nvPr/>
         </p:nvSpPr>
         <p:spPr>
           <a:xfrm>
-            <a:off x="9484200" y="5267880"/>
+            <a:off x="9484200" y="5085000"/>
             <a:ext cx="592560" cy="401400"/>
           </a:xfrm>
           <a:prstGeom prst="rect">
@@ -4480,13 +4588,13 @@
             <a:r>
               <a:rPr lang="en-US" sz="1800" b="0" u="none" strike="noStrike">
                 <a:solidFill>
-                  <a:srgbClr val="FFFFFF"/>
+                  <a:srgbClr val="000000"/>
                 </a:solidFill>
                 <a:effectLst/>
                 <a:uFillTx/>
                 <a:latin typeface="Arial"/>
               </a:rPr>
-              <a:t>[12]</a:t>
+              <a:t>[10]</a:t>
             </a:r>
             <a:endParaRPr lang="en-US" sz="1800" b="0" u="none" strike="noStrike">
               <a:solidFill>
@@ -4499,32 +4607,6 @@
           </a:p>
         </p:txBody>
       </p:sp>
-      <p:pic>
-        <p:nvPicPr>
-          <p:cNvPr id="67" name=""/>
-          <p:cNvPicPr/>
-          <p:nvPr/>
-        </p:nvPicPr>
-        <p:blipFill>
-          <a:blip r:embed="rId1">
-            <a:alphaModFix amt="0"/>
-          </a:blip>
-          <a:stretch/>
-        </p:blipFill>
-        <p:spPr>
-          <a:xfrm>
-            <a:off x="343080" y="2514600"/>
-            <a:ext cx="2857320" cy="2857320"/>
-          </a:xfrm>
-          <a:prstGeom prst="rect">
-            <a:avLst/>
-          </a:prstGeom>
-          <a:noFill/>
-          <a:ln w="0">
-            <a:noFill/>
-          </a:ln>
-        </p:spPr>
-      </p:pic>
     </p:spTree>
   </p:cSld>
 </p:sld>
@@ -4566,7 +4648,7 @@
       </p:grpSpPr>
       <p:sp>
         <p:nvSpPr>
-          <p:cNvPr id="68" name="PlaceHolder 1"/>
+          <p:cNvPr id="70" name="PlaceHolder 1"/>
           <p:cNvSpPr>
             <a:spLocks noGrp="1"/>
           </p:cNvSpPr>
@@ -4604,7 +4686,7 @@
                 <a:uFillTx/>
                 <a:latin typeface="3270 Nerd Font"/>
               </a:rPr>
-              <a:t>Aufbau</a:t>
+              <a:t>Wie funktioniert ein MC</a:t>
             </a:r>
             <a:endParaRPr lang="en-US" sz="4400" b="0" u="none" strike="noStrike">
               <a:solidFill>
@@ -4619,7 +4701,7 @@
       </p:sp>
       <p:sp>
         <p:nvSpPr>
-          <p:cNvPr id="69" name="PlaceHolder 2"/>
+          <p:cNvPr id="71" name="PlaceHolder 2"/>
           <p:cNvSpPr>
             <a:spLocks noGrp="1"/>
           </p:cNvSpPr>
@@ -4642,7 +4724,7 @@
         </p:spPr>
         <p:txBody>
           <a:bodyPr lIns="0" tIns="0" rIns="0" bIns="0" anchor="t">
-            <a:normAutofit lnSpcReduction="9999"/>
+            <a:normAutofit/>
           </a:bodyPr>
           <a:p>
             <a:pPr marL="432000" indent="-324000" algn="l">
@@ -4657,7 +4739,7 @@
               <a:buChar char=""/>
             </a:pPr>
             <a:r>
-              <a:rPr lang="en-US" sz="3200" b="0" u="none" strike="noStrike">
+              <a:rPr lang="en-US" sz="2800" b="0" u="none" strike="noStrike">
                 <a:solidFill>
                   <a:srgbClr val="FFFFFF"/>
                 </a:solidFill>
@@ -4665,9 +4747,9 @@
                 <a:uFillTx/>
                 <a:latin typeface="3270 Nerd Font"/>
               </a:rPr>
-              <a:t>Prozessor</a:t>
-            </a:r>
-            <a:endParaRPr lang="en-US" sz="3200" b="0" u="none" strike="noStrike">
+              <a:t>Die CPU liest das Programm aus dem ROM aus</a:t>
+            </a:r>
+            <a:endParaRPr lang="en-US" sz="2800" b="0" u="none" strike="noStrike">
               <a:solidFill>
                 <a:srgbClr val="FFFFFF"/>
               </a:solidFill>
@@ -4689,7 +4771,7 @@
               <a:buChar char=""/>
             </a:pPr>
             <a:r>
-              <a:rPr lang="en-US" sz="3200" b="0" u="none" strike="noStrike">
+              <a:rPr lang="en-US" sz="2800" b="0" u="none" strike="noStrike">
                 <a:solidFill>
                   <a:srgbClr val="FFFFFF"/>
                 </a:solidFill>
@@ -4697,9 +4779,9 @@
                 <a:uFillTx/>
                 <a:latin typeface="3270 Nerd Font"/>
               </a:rPr>
-              <a:t>RAM (Random-access memory)</a:t>
-            </a:r>
-            <a:endParaRPr lang="en-US" sz="3200" b="0" u="none" strike="noStrike">
+              <a:t>Die CPU decodiert den Befehl</a:t>
+            </a:r>
+            <a:endParaRPr lang="en-US" sz="2800" b="0" u="none" strike="noStrike">
               <a:solidFill>
                 <a:srgbClr val="FFFFFF"/>
               </a:solidFill>
@@ -4721,7 +4803,7 @@
               <a:buChar char=""/>
             </a:pPr>
             <a:r>
-              <a:rPr lang="en-US" sz="3200" b="0" u="none" strike="noStrike">
+              <a:rPr lang="en-US" sz="2800" b="0" u="none" strike="noStrike">
                 <a:solidFill>
                   <a:srgbClr val="FFFFFF"/>
                 </a:solidFill>
@@ -4729,9 +4811,9 @@
                 <a:uFillTx/>
                 <a:latin typeface="3270 Nerd Font"/>
               </a:rPr>
-              <a:t>ROM (Read-only memory)</a:t>
-            </a:r>
-            <a:endParaRPr lang="en-US" sz="3200" b="0" u="none" strike="noStrike">
+              <a:t>Die CPU führt den Befehl aus</a:t>
+            </a:r>
+            <a:endParaRPr lang="en-US" sz="2800" b="0" u="none" strike="noStrike">
               <a:solidFill>
                 <a:srgbClr val="FFFFFF"/>
               </a:solidFill>
@@ -4753,7 +4835,7 @@
               <a:buChar char=""/>
             </a:pPr>
             <a:r>
-              <a:rPr lang="en-US" sz="3200" b="0" u="none" strike="noStrike">
+              <a:rPr lang="en-US" sz="2800" b="0" u="none" strike="noStrike">
                 <a:solidFill>
                   <a:srgbClr val="FFFFFF"/>
                 </a:solidFill>
@@ -4761,31 +4843,26 @@
                 <a:uFillTx/>
                 <a:latin typeface="3270 Nerd Font"/>
               </a:rPr>
-              <a:t>A/D Converter</a:t>
-            </a:r>
-            <a:endParaRPr lang="en-US" sz="3200" b="0" u="none" strike="noStrike">
-              <a:solidFill>
-                <a:srgbClr val="FFFFFF"/>
-              </a:solidFill>
-              <a:effectLst/>
-              <a:uFillTx/>
-              <a:latin typeface="Arial"/>
-            </a:endParaRPr>
-          </a:p>
-          <a:p>
-            <a:pPr marL="432000" indent="-324000" algn="l">
+              <a:t>Pro Takt wird ein Befehl ausgeführt</a:t>
+            </a:r>
+            <a:endParaRPr lang="en-US" sz="2800" b="0" u="none" strike="noStrike">
+              <a:solidFill>
+                <a:srgbClr val="FFFFFF"/>
+              </a:solidFill>
+              <a:effectLst/>
+              <a:uFillTx/>
+              <a:latin typeface="Arial"/>
+            </a:endParaRPr>
+          </a:p>
+          <a:p>
+            <a:pPr marL="432000" indent="0" algn="l">
               <a:spcBef>
                 <a:spcPts val="1414"/>
               </a:spcBef>
-              <a:buClr>
-                <a:srgbClr val="FFFFFF"/>
-              </a:buClr>
-              <a:buSzPct val="85000"/>
-              <a:buFont typeface="Wingdings" charset="2"/>
-              <a:buChar char=""/>
-            </a:pPr>
-            <a:r>
-              <a:rPr lang="en-US" sz="3200" b="0" u="none" strike="noStrike">
+              <a:buNone/>
+            </a:pPr>
+            <a:r>
+              <a:rPr lang="en-US" sz="2600" b="0" u="none" strike="noStrike">
                 <a:solidFill>
                   <a:srgbClr val="FFFFFF"/>
                 </a:solidFill>
@@ -4793,73 +4870,9 @@
                 <a:uFillTx/>
                 <a:latin typeface="3270 Nerd Font"/>
               </a:rPr>
-              <a:t>Timer</a:t>
-            </a:r>
-            <a:endParaRPr lang="en-US" sz="3200" b="0" u="none" strike="noStrike">
-              <a:solidFill>
-                <a:srgbClr val="FFFFFF"/>
-              </a:solidFill>
-              <a:effectLst/>
-              <a:uFillTx/>
-              <a:latin typeface="Arial"/>
-            </a:endParaRPr>
-          </a:p>
-          <a:p>
-            <a:pPr marL="432000" indent="-324000" algn="l">
-              <a:spcBef>
-                <a:spcPts val="1414"/>
-              </a:spcBef>
-              <a:buClr>
-                <a:srgbClr val="FFFFFF"/>
-              </a:buClr>
-              <a:buSzPct val="85000"/>
-              <a:buFont typeface="Wingdings" charset="2"/>
-              <a:buChar char=""/>
-            </a:pPr>
-            <a:r>
-              <a:rPr lang="en-US" sz="3200" b="0" u="none" strike="noStrike">
-                <a:solidFill>
-                  <a:srgbClr val="FFFFFF"/>
-                </a:solidFill>
-                <a:effectLst/>
-                <a:uFillTx/>
-                <a:latin typeface="3270 Nerd Font"/>
-              </a:rPr>
-              <a:t>Interrupts</a:t>
-            </a:r>
-            <a:endParaRPr lang="en-US" sz="3200" b="0" u="none" strike="noStrike">
-              <a:solidFill>
-                <a:srgbClr val="FFFFFF"/>
-              </a:solidFill>
-              <a:effectLst/>
-              <a:uFillTx/>
-              <a:latin typeface="Arial"/>
-            </a:endParaRPr>
-          </a:p>
-          <a:p>
-            <a:pPr marL="432000" indent="-324000" algn="l">
-              <a:spcBef>
-                <a:spcPts val="1414"/>
-              </a:spcBef>
-              <a:buClr>
-                <a:srgbClr val="FFFFFF"/>
-              </a:buClr>
-              <a:buSzPct val="85000"/>
-              <a:buFont typeface="Wingdings" charset="2"/>
-              <a:buChar char=""/>
-            </a:pPr>
-            <a:r>
-              <a:rPr lang="en-US" sz="3200" b="0" u="none" strike="noStrike">
-                <a:solidFill>
-                  <a:srgbClr val="FFFFFF"/>
-                </a:solidFill>
-                <a:effectLst/>
-                <a:uFillTx/>
-                <a:latin typeface="3270 Nerd Font"/>
-              </a:rPr>
-              <a:t>Bus</a:t>
-            </a:r>
-            <a:endParaRPr lang="en-US" sz="3200" b="0" u="none" strike="noStrike">
+              <a:t>(16 MHz → 16.000.000 Befehle pro Sekunde)</a:t>
+            </a:r>
+            <a:endParaRPr lang="en-US" sz="2600" b="0" u="none" strike="noStrike">
               <a:solidFill>
                 <a:srgbClr val="FFFFFF"/>
               </a:solidFill>
@@ -4870,284 +4883,16 @@
           </a:p>
         </p:txBody>
       </p:sp>
-      <p:sp>
-        <p:nvSpPr>
-          <p:cNvPr id="70" name=""/>
-          <p:cNvSpPr txBox="1"/>
-          <p:nvPr/>
-        </p:nvSpPr>
-        <p:spPr>
-          <a:xfrm>
-            <a:off x="9572400" y="5257800"/>
-            <a:ext cx="461880" cy="401400"/>
-          </a:xfrm>
-          <a:prstGeom prst="rect">
-            <a:avLst/>
-          </a:prstGeom>
-          <a:noFill/>
-          <a:ln w="0">
-            <a:noFill/>
-          </a:ln>
-        </p:spPr>
-        <p:txBody>
-          <a:bodyPr wrap="none" lIns="90000" tIns="45000" rIns="90000" bIns="45000" anchor="t">
-            <a:spAutoFit/>
-          </a:bodyPr>
-          <a:p>
-            <a:r>
-              <a:rPr lang="en-US" sz="1800" b="0" u="none" strike="noStrike">
-                <a:solidFill>
-                  <a:srgbClr val="FFFFFF"/>
-                </a:solidFill>
-                <a:effectLst/>
-                <a:uFillTx/>
-                <a:latin typeface="Arial"/>
-              </a:rPr>
-              <a:t>[7]</a:t>
-            </a:r>
-            <a:endParaRPr lang="en-US" sz="1800" b="0" u="none" strike="noStrike">
-              <a:solidFill>
-                <a:srgbClr val="FFFFFF"/>
-              </a:solidFill>
-              <a:effectLst/>
-              <a:uFillTx/>
-              <a:latin typeface="Arial"/>
-            </a:endParaRPr>
-          </a:p>
-        </p:txBody>
-      </p:sp>
-      <p:pic>
-        <p:nvPicPr>
-          <p:cNvPr id="71" name=""/>
-          <p:cNvPicPr/>
-          <p:nvPr/>
-        </p:nvPicPr>
-        <p:blipFill>
-          <a:blip r:embed="rId1">
-            <a:alphaModFix amt="0"/>
-          </a:blip>
-          <a:stretch/>
-        </p:blipFill>
-        <p:spPr>
-          <a:xfrm>
-            <a:off x="6177600" y="3657600"/>
-            <a:ext cx="3566160" cy="1371600"/>
-          </a:xfrm>
-          <a:prstGeom prst="rect">
-            <a:avLst/>
-          </a:prstGeom>
-          <a:noFill/>
-          <a:ln w="0">
-            <a:noFill/>
-          </a:ln>
-        </p:spPr>
-      </p:pic>
     </p:spTree>
   </p:cSld>
   <p:timing>
     <p:tnLst>
       <p:par>
-        <p:cTn id="113" dur="indefinite" restart="never" nodeType="tmRoot">
+        <p:cTn id="129" dur="indefinite" restart="never" nodeType="tmRoot">
           <p:childTnLst>
             <p:seq>
-              <p:cTn id="114" dur="indefinite" nodeType="mainSeq">
+              <p:cTn id="130" dur="indefinite" nodeType="mainSeq">
                 <p:childTnLst>
-                  <p:par>
-                    <p:cTn id="115" fill="hold">
-                      <p:stCondLst>
-                        <p:cond delay="indefinite"/>
-                      </p:stCondLst>
-                      <p:childTnLst>
-                        <p:par>
-                          <p:cTn id="116" fill="hold">
-                            <p:stCondLst>
-                              <p:cond delay="0"/>
-                            </p:stCondLst>
-                            <p:childTnLst>
-                              <p:par>
-                                <p:cTn id="117" presetID="1" presetClass="entr" fill="hold" nodeType="clickEffect">
-                                  <p:stCondLst>
-                                    <p:cond delay="0"/>
-                                  </p:stCondLst>
-                                  <p:childTnLst>
-                                    <p:set>
-                                      <p:cBhvr>
-                                        <p:cTn id="118" dur="1" fill="hold">
-                                          <p:stCondLst>
-                                            <p:cond delay="0"/>
-                                          </p:stCondLst>
-                                        </p:cTn>
-                                        <p:tgtEl>
-                                          <p:spTgt spid="69">
-                                            <p:txEl>
-                                              <p:pRg st="0" end="0"/>
-                                            </p:txEl>
-                                          </p:spTgt>
-                                        </p:tgtEl>
-                                        <p:attrNameLst>
-                                          <p:attrName>style.visibility</p:attrName>
-                                        </p:attrNameLst>
-                                      </p:cBhvr>
-                                      <p:to>
-                                        <p:strVal val="visible"/>
-                                      </p:to>
-                                    </p:set>
-                                  </p:childTnLst>
-                                </p:cTn>
-                              </p:par>
-                            </p:childTnLst>
-                          </p:cTn>
-                        </p:par>
-                      </p:childTnLst>
-                    </p:cTn>
-                  </p:par>
-                  <p:par>
-                    <p:cTn id="119" fill="hold">
-                      <p:stCondLst>
-                        <p:cond delay="indefinite"/>
-                      </p:stCondLst>
-                      <p:childTnLst>
-                        <p:par>
-                          <p:cTn id="120" fill="hold">
-                            <p:stCondLst>
-                              <p:cond delay="0"/>
-                            </p:stCondLst>
-                            <p:childTnLst>
-                              <p:par>
-                                <p:cTn id="121" presetID="1" presetClass="entr" fill="hold" nodeType="clickEffect">
-                                  <p:stCondLst>
-                                    <p:cond delay="0"/>
-                                  </p:stCondLst>
-                                  <p:childTnLst>
-                                    <p:set>
-                                      <p:cBhvr>
-                                        <p:cTn id="122" dur="1" fill="hold">
-                                          <p:stCondLst>
-                                            <p:cond delay="0"/>
-                                          </p:stCondLst>
-                                        </p:cTn>
-                                        <p:tgtEl>
-                                          <p:spTgt spid="69">
-                                            <p:txEl>
-                                              <p:pRg st="1" end="1"/>
-                                            </p:txEl>
-                                          </p:spTgt>
-                                        </p:tgtEl>
-                                        <p:attrNameLst>
-                                          <p:attrName>style.visibility</p:attrName>
-                                        </p:attrNameLst>
-                                      </p:cBhvr>
-                                      <p:to>
-                                        <p:strVal val="visible"/>
-                                      </p:to>
-                                    </p:set>
-                                  </p:childTnLst>
-                                </p:cTn>
-                              </p:par>
-                            </p:childTnLst>
-                          </p:cTn>
-                        </p:par>
-                      </p:childTnLst>
-                    </p:cTn>
-                  </p:par>
-                  <p:par>
-                    <p:cTn id="123" fill="hold">
-                      <p:stCondLst>
-                        <p:cond delay="indefinite"/>
-                      </p:stCondLst>
-                      <p:childTnLst>
-                        <p:par>
-                          <p:cTn id="124" fill="hold">
-                            <p:stCondLst>
-                              <p:cond delay="0"/>
-                            </p:stCondLst>
-                            <p:childTnLst>
-                              <p:par>
-                                <p:cTn id="125" presetID="1" presetClass="entr" fill="hold" nodeType="clickEffect">
-                                  <p:stCondLst>
-                                    <p:cond delay="0"/>
-                                  </p:stCondLst>
-                                  <p:childTnLst>
-                                    <p:set>
-                                      <p:cBhvr>
-                                        <p:cTn id="126" dur="1" fill="hold">
-                                          <p:stCondLst>
-                                            <p:cond delay="0"/>
-                                          </p:stCondLst>
-                                        </p:cTn>
-                                        <p:tgtEl>
-                                          <p:spTgt spid="69">
-                                            <p:txEl>
-                                              <p:pRg st="2" end="2"/>
-                                            </p:txEl>
-                                          </p:spTgt>
-                                        </p:tgtEl>
-                                        <p:attrNameLst>
-                                          <p:attrName>style.visibility</p:attrName>
-                                        </p:attrNameLst>
-                                      </p:cBhvr>
-                                      <p:to>
-                                        <p:strVal val="visible"/>
-                                      </p:to>
-                                    </p:set>
-                                  </p:childTnLst>
-                                </p:cTn>
-                              </p:par>
-                            </p:childTnLst>
-                          </p:cTn>
-                        </p:par>
-                      </p:childTnLst>
-                    </p:cTn>
-                  </p:par>
-                  <p:par>
-                    <p:cTn id="127" fill="hold">
-                      <p:stCondLst>
-                        <p:cond delay="indefinite"/>
-                      </p:stCondLst>
-                      <p:childTnLst>
-                        <p:par>
-                          <p:cTn id="128" fill="hold">
-                            <p:stCondLst>
-                              <p:cond delay="0"/>
-                            </p:stCondLst>
-                            <p:childTnLst>
-                              <p:par>
-                                <p:cTn id="129" presetID="1" presetClass="entr" fill="hold" nodeType="clickEffect">
-                                  <p:stCondLst>
-                                    <p:cond delay="0"/>
-                                  </p:stCondLst>
-                                  <p:childTnLst>
-                                    <p:set>
-                                      <p:cBhvr>
-                                        <p:cTn id="130" dur="1" fill="hold">
-                                          <p:stCondLst>
-                                            <p:cond delay="0"/>
-                                          </p:stCondLst>
-                                        </p:cTn>
-                                        <p:tgtEl>
-                                          <p:spTgt spid="69">
-                                            <p:txEl>
-                                              <p:pRg st="3" end="3"/>
-                                            </p:txEl>
-                                          </p:spTgt>
-                                        </p:tgtEl>
-                                        <p:attrNameLst>
-                                          <p:attrName>style.visibility</p:attrName>
-                                        </p:attrNameLst>
-                                      </p:cBhvr>
-                                      <p:to>
-                                        <p:strVal val="visible"/>
-                                      </p:to>
-                                    </p:set>
-                                  </p:childTnLst>
-                                </p:cTn>
-                              </p:par>
-                            </p:childTnLst>
-                          </p:cTn>
-                        </p:par>
-                      </p:childTnLst>
-                    </p:cTn>
-                  </p:par>
                   <p:par>
                     <p:cTn id="131" fill="hold">
                       <p:stCondLst>
@@ -5174,38 +4919,11 @@
                                           </p:stCondLst>
                                         </p:cTn>
                                         <p:tgtEl>
-                                          <p:spTgt spid="69">
+                                          <p:spTgt spid="71">
                                             <p:txEl>
-                                              <p:pRg st="4" end="4"/>
+                                              <p:pRg st="0" end="0"/>
                                             </p:txEl>
                                           </p:spTgt>
-                                        </p:tgtEl>
-                                        <p:attrNameLst>
-                                          <p:attrName>style.visibility</p:attrName>
-                                        </p:attrNameLst>
-                                      </p:cBhvr>
-                                      <p:to>
-                                        <p:strVal val="visible"/>
-                                      </p:to>
-                                    </p:set>
-                                  </p:childTnLst>
-                                </p:cTn>
-                              </p:par>
-                              <p:par>
-                                <p:cTn id="135" presetID="1" presetClass="entr" fill="hold" nodeType="withEffect">
-                                  <p:stCondLst>
-                                    <p:cond delay="0"/>
-                                  </p:stCondLst>
-                                  <p:childTnLst>
-                                    <p:set>
-                                      <p:cBhvr>
-                                        <p:cTn id="136" dur="1" fill="hold">
-                                          <p:stCondLst>
-                                            <p:cond delay="0"/>
-                                          </p:stCondLst>
-                                        </p:cTn>
-                                        <p:tgtEl>
-                                          <p:spTgt spid="71"/>
                                         </p:tgtEl>
                                         <p:attrNameLst>
                                           <p:attrName>style.visibility</p:attrName>
@@ -5225,34 +4943,132 @@
                     </p:cTn>
                   </p:par>
                   <p:par>
-                    <p:cTn id="137" fill="hold">
+                    <p:cTn id="135" fill="hold">
                       <p:stCondLst>
                         <p:cond delay="indefinite"/>
                       </p:stCondLst>
                       <p:childTnLst>
                         <p:par>
-                          <p:cTn id="138" fill="hold">
+                          <p:cTn id="136" fill="hold">
                             <p:stCondLst>
                               <p:cond delay="0"/>
                             </p:stCondLst>
                             <p:childTnLst>
                               <p:par>
-                                <p:cTn id="139" presetID="1" presetClass="entr" fill="hold" nodeType="clickEffect">
+                                <p:cTn id="137" presetID="1" presetClass="entr" fill="hold" nodeType="clickEffect">
                                   <p:stCondLst>
                                     <p:cond delay="0"/>
                                   </p:stCondLst>
                                   <p:childTnLst>
                                     <p:set>
                                       <p:cBhvr>
-                                        <p:cTn id="140" dur="1" fill="hold">
+                                        <p:cTn id="138" dur="1" fill="hold">
                                           <p:stCondLst>
                                             <p:cond delay="0"/>
                                           </p:stCondLst>
                                         </p:cTn>
                                         <p:tgtEl>
-                                          <p:spTgt spid="69">
+                                          <p:spTgt spid="71">
                                             <p:txEl>
-                                              <p:pRg st="5" end="5"/>
+                                              <p:pRg st="1" end="1"/>
+                                            </p:txEl>
+                                          </p:spTgt>
+                                        </p:tgtEl>
+                                        <p:attrNameLst>
+                                          <p:attrName>style.visibility</p:attrName>
+                                        </p:attrNameLst>
+                                      </p:cBhvr>
+                                      <p:to>
+                                        <p:strVal val="visible"/>
+                                      </p:to>
+                                    </p:set>
+                                  </p:childTnLst>
+                                </p:cTn>
+                              </p:par>
+                            </p:childTnLst>
+                          </p:cTn>
+                        </p:par>
+                      </p:childTnLst>
+                    </p:cTn>
+                  </p:par>
+                  <p:par>
+                    <p:cTn id="139" fill="hold">
+                      <p:stCondLst>
+                        <p:cond delay="indefinite"/>
+                      </p:stCondLst>
+                      <p:childTnLst>
+                        <p:par>
+                          <p:cTn id="140" fill="hold">
+                            <p:stCondLst>
+                              <p:cond delay="0"/>
+                            </p:stCondLst>
+                            <p:childTnLst>
+                              <p:par>
+                                <p:cTn id="141" presetID="1" presetClass="entr" fill="hold" nodeType="clickEffect">
+                                  <p:stCondLst>
+                                    <p:cond delay="0"/>
+                                  </p:stCondLst>
+                                  <p:childTnLst>
+                                    <p:set>
+                                      <p:cBhvr>
+                                        <p:cTn id="142" dur="1" fill="hold">
+                                          <p:stCondLst>
+                                            <p:cond delay="0"/>
+                                          </p:stCondLst>
+                                        </p:cTn>
+                                        <p:tgtEl>
+                                          <p:spTgt spid="71">
+                                            <p:txEl>
+                                              <p:pRg st="2" end="2"/>
+                                            </p:txEl>
+                                          </p:spTgt>
+                                        </p:tgtEl>
+                                        <p:attrNameLst>
+                                          <p:attrName>style.visibility</p:attrName>
+                                        </p:attrNameLst>
+                                      </p:cBhvr>
+                                      <p:to>
+                                        <p:strVal val="visible"/>
+                                      </p:to>
+                                    </p:set>
+                                  </p:childTnLst>
+                                </p:cTn>
+                              </p:par>
+                            </p:childTnLst>
+                          </p:cTn>
+                        </p:par>
+                      </p:childTnLst>
+                    </p:cTn>
+                  </p:par>
+                  <p:par>
+                    <p:cTn id="143" fill="hold">
+                      <p:stCondLst>
+                        <p:cond delay="indefinite"/>
+                      </p:stCondLst>
+                      <p:childTnLst>
+                        <p:par>
+                          <p:cTn id="144" fill="hold">
+                            <p:stCondLst>
+                              <p:cond delay="0"/>
+                            </p:stCondLst>
+                            <p:childTnLst>
+                              <p:par>
+                                <p:cTn id="145" presetID="1" presetClass="entr" fill="hold" nodeType="clickEffect">
+                                  <p:stCondLst>
+                                    <p:cond delay="0"/>
+                                  </p:stCondLst>
+                                  <p:childTnLst>
+                                    <p:set>
+                                      <p:cBhvr>
+                                        <p:cTn id="146" dur="1" fill="hold">
+                                          <p:stCondLst>
+                                            <p:cond delay="0"/>
+                                          </p:stCondLst>
+                                        </p:cTn>
+                                        <p:tgtEl>
+                                          <p:spTgt spid="71">
+                                            <p:txEl>
+                                              <p:pRg st="3" end="3"/>
                                             </p:txEl>
                                           </p:spTgt>
                                         </p:tgtEl>
@@ -5332,68 +5148,20 @@
           <a:chExt cx="0" cy="0"/>
         </a:xfrm>
       </p:grpSpPr>
-      <p:pic>
-        <p:nvPicPr>
-          <p:cNvPr id="72" name=""/>
-          <p:cNvPicPr/>
-          <p:nvPr/>
-        </p:nvPicPr>
-        <p:blipFill>
-          <a:blip r:embed="rId1">
-            <a:alphaModFix amt="0"/>
-          </a:blip>
-          <a:stretch/>
-        </p:blipFill>
-        <p:spPr>
-          <a:xfrm>
-            <a:off x="1293840" y="1325880"/>
-            <a:ext cx="7487640" cy="3931560"/>
-          </a:xfrm>
-          <a:prstGeom prst="rect">
-            <a:avLst/>
-          </a:prstGeom>
-          <a:noFill/>
-          <a:ln w="0">
-            <a:noFill/>
-          </a:ln>
-        </p:spPr>
-      </p:pic>
-      <p:pic>
-        <p:nvPicPr>
-          <p:cNvPr id="73" name=""/>
-          <p:cNvPicPr/>
-          <p:nvPr/>
-        </p:nvPicPr>
-        <p:blipFill>
-          <a:blip r:embed="rId2">
-            <a:alphaModFix amt="0"/>
-          </a:blip>
-          <a:stretch/>
-        </p:blipFill>
-        <p:spPr>
-          <a:xfrm>
-            <a:off x="-369720" y="0"/>
-            <a:ext cx="10797840" cy="5669280"/>
-          </a:xfrm>
-          <a:prstGeom prst="rect">
-            <a:avLst/>
-          </a:prstGeom>
-          <a:noFill/>
-          <a:ln w="0">
-            <a:noFill/>
-          </a:ln>
-        </p:spPr>
-      </p:pic>
       <p:sp>
         <p:nvSpPr>
-          <p:cNvPr id="74" name=""/>
-          <p:cNvSpPr txBox="1"/>
-          <p:nvPr/>
+          <p:cNvPr id="72" name="PlaceHolder 1"/>
+          <p:cNvSpPr>
+            <a:spLocks noGrp="1"/>
+          </p:cNvSpPr>
+          <p:nvPr>
+            <p:ph type="title"/>
+          </p:nvPr>
         </p:nvSpPr>
         <p:spPr>
           <a:xfrm>
-            <a:off x="9484200" y="5085000"/>
-            <a:ext cx="592560" cy="401400"/>
+            <a:off x="503640" y="225720"/>
+            <a:ext cx="9068760" cy="946440"/>
           </a:xfrm>
           <a:prstGeom prst="rect">
             <a:avLst/>
@@ -5404,22 +5172,86 @@
           </a:ln>
         </p:spPr>
         <p:txBody>
-          <a:bodyPr wrap="none" lIns="90000" tIns="45000" rIns="90000" bIns="45000" anchor="t">
+          <a:bodyPr lIns="0" tIns="0" rIns="0" bIns="0" anchor="ctr">
             <a:spAutoFit/>
           </a:bodyPr>
           <a:p>
-            <a:r>
-              <a:rPr lang="en-US" sz="1800" b="0" u="none" strike="noStrike">
-                <a:solidFill>
-                  <a:srgbClr val="000000"/>
-                </a:solidFill>
-                <a:effectLst/>
-                <a:uFillTx/>
-                <a:latin typeface="Arial"/>
-              </a:rPr>
-              <a:t>[10]</a:t>
-            </a:r>
-            <a:endParaRPr lang="en-US" sz="1800" b="0" u="none" strike="noStrike">
+            <a:pPr indent="0" algn="ctr">
+              <a:buNone/>
+            </a:pPr>
+            <a:r>
+              <a:rPr lang="en-US" sz="4400" b="1" u="none" strike="noStrike">
+                <a:solidFill>
+                  <a:srgbClr val="FFFFFF"/>
+                </a:solidFill>
+                <a:effectLst/>
+                <a:uFillTx/>
+                <a:latin typeface="3270 Nerd Font"/>
+              </a:rPr>
+              <a:t>Was genau macht die CPU</a:t>
+            </a:r>
+            <a:endParaRPr lang="en-US" sz="4400" b="0" u="none" strike="noStrike">
+              <a:solidFill>
+                <a:srgbClr val="FFFFFF"/>
+              </a:solidFill>
+              <a:effectLst/>
+              <a:uFillTx/>
+              <a:latin typeface="Arial"/>
+            </a:endParaRPr>
+          </a:p>
+        </p:txBody>
+      </p:sp>
+      <p:sp>
+        <p:nvSpPr>
+          <p:cNvPr id="73" name="PlaceHolder 2"/>
+          <p:cNvSpPr>
+            <a:spLocks noGrp="1"/>
+          </p:cNvSpPr>
+          <p:nvPr>
+            <p:ph/>
+          </p:nvPr>
+        </p:nvSpPr>
+        <p:spPr>
+          <a:xfrm>
+            <a:off x="503640" y="1326240"/>
+            <a:ext cx="9068760" cy="3931560"/>
+          </a:xfrm>
+          <a:prstGeom prst="rect">
+            <a:avLst/>
+          </a:prstGeom>
+          <a:noFill/>
+          <a:ln w="0">
+            <a:noFill/>
+          </a:ln>
+        </p:spPr>
+        <p:txBody>
+          <a:bodyPr lIns="0" tIns="0" rIns="0" bIns="0" anchor="t">
+            <a:normAutofit/>
+          </a:bodyPr>
+          <a:p>
+            <a:pPr marL="432000" indent="-324000" algn="l">
+              <a:spcBef>
+                <a:spcPts val="1414"/>
+              </a:spcBef>
+              <a:buClr>
+                <a:srgbClr val="FFFFFF"/>
+              </a:buClr>
+              <a:buSzPct val="85000"/>
+              <a:buFont typeface="Wingdings" charset="2"/>
+              <a:buChar char=""/>
+            </a:pPr>
+            <a:r>
+              <a:rPr lang="en-US" sz="2800" b="0" u="none" strike="noStrike">
+                <a:solidFill>
+                  <a:srgbClr val="FFFFFF"/>
+                </a:solidFill>
+                <a:effectLst/>
+                <a:uFillTx/>
+                <a:latin typeface="3270 Nerd Font"/>
+              </a:rPr>
+              <a:t>Kontrolleinheit: verarbeitet die Befehle</a:t>
+            </a:r>
+            <a:endParaRPr lang="en-US" sz="2800" b="0" u="none" strike="noStrike">
               <a:solidFill>
                 <a:srgbClr val="FFFFFF"/>
               </a:solidFill>
@@ -5471,7 +5303,7 @@
       </p:grpSpPr>
       <p:sp>
         <p:nvSpPr>
-          <p:cNvPr id="75" name="PlaceHolder 1"/>
+          <p:cNvPr id="74" name="PlaceHolder 1"/>
           <p:cNvSpPr>
             <a:spLocks noGrp="1"/>
           </p:cNvSpPr>
@@ -5509,7 +5341,125 @@
                 <a:uFillTx/>
                 <a:latin typeface="3270 Nerd Font"/>
               </a:rPr>
-              <a:t>Wie funktioniert ein MC</a:t>
+              <a:t>Was genau macht die CPU</a:t>
+            </a:r>
+            <a:endParaRPr lang="en-US" sz="4400" b="0" u="none" strike="noStrike">
+              <a:solidFill>
+                <a:srgbClr val="FFFFFF"/>
+              </a:solidFill>
+              <a:effectLst/>
+              <a:uFillTx/>
+              <a:latin typeface="Arial"/>
+            </a:endParaRPr>
+          </a:p>
+        </p:txBody>
+      </p:sp>
+      <p:pic>
+        <p:nvPicPr>
+          <p:cNvPr id="75" name=""/>
+          <p:cNvPicPr/>
+          <p:nvPr/>
+        </p:nvPicPr>
+        <p:blipFill>
+          <a:blip r:embed="rId1">
+            <a:alphaModFix amt="0"/>
+          </a:blip>
+          <a:stretch/>
+        </p:blipFill>
+        <p:spPr>
+          <a:xfrm>
+            <a:off x="2165400" y="1325880"/>
+            <a:ext cx="5744880" cy="3931560"/>
+          </a:xfrm>
+          <a:prstGeom prst="rect">
+            <a:avLst/>
+          </a:prstGeom>
+          <a:noFill/>
+          <a:ln w="0">
+            <a:noFill/>
+          </a:ln>
+        </p:spPr>
+      </p:pic>
+    </p:spTree>
+  </p:cSld>
+</p:sld>
+</file>
+
+<file path=ppt/slides/slide17.xml><?xml version="1.0" encoding="utf-8"?>
+<p:sld xmlns:a="http://schemas.openxmlformats.org/drawingml/2006/main" xmlns:p="http://schemas.openxmlformats.org/presentationml/2006/main" xmlns:r="http://schemas.openxmlformats.org/officeDocument/2006/relationships" xmlns:p14="http://schemas.microsoft.com/office/powerpoint/2010/main" xmlns:p15="http://schemas.microsoft.com/office/powerpoint/2012/main" xmlns:mc="http://schemas.openxmlformats.org/markup-compatibility/2006">
+  <p:cSld>
+    <p:bg>
+      <p:bgPr>
+        <a:gradFill rotWithShape="0">
+          <a:gsLst>
+            <a:gs pos="0">
+              <a:srgbClr val="282828"/>
+            </a:gs>
+            <a:gs pos="100000">
+              <a:srgbClr val="1D2021"/>
+            </a:gs>
+          </a:gsLst>
+          <a:path path="rect">
+            <a:fillToRect l="50000" t="50000" r="50000" b="50000"/>
+          </a:path>
+        </a:gradFill>
+      </p:bgPr>
+    </p:bg>
+    <p:spTree>
+      <p:nvGrpSpPr>
+        <p:cNvPr id="1" name=""/>
+        <p:cNvGrpSpPr/>
+        <p:nvPr/>
+      </p:nvGrpSpPr>
+      <p:grpSpPr>
+        <a:xfrm>
+          <a:off x="0" y="0"/>
+          <a:ext cx="0" cy="0"/>
+          <a:chOff x="0" y="0"/>
+          <a:chExt cx="0" cy="0"/>
+        </a:xfrm>
+      </p:grpSpPr>
+      <p:sp>
+        <p:nvSpPr>
+          <p:cNvPr id="76" name="PlaceHolder 1"/>
+          <p:cNvSpPr>
+            <a:spLocks noGrp="1"/>
+          </p:cNvSpPr>
+          <p:nvPr>
+            <p:ph type="title"/>
+          </p:nvPr>
+        </p:nvSpPr>
+        <p:spPr>
+          <a:xfrm>
+            <a:off x="503640" y="225720"/>
+            <a:ext cx="9068760" cy="946440"/>
+          </a:xfrm>
+          <a:prstGeom prst="rect">
+            <a:avLst/>
+          </a:prstGeom>
+          <a:noFill/>
+          <a:ln w="0">
+            <a:noFill/>
+          </a:ln>
+        </p:spPr>
+        <p:txBody>
+          <a:bodyPr lIns="0" tIns="0" rIns="0" bIns="0" anchor="ctr">
+            <a:spAutoFit/>
+          </a:bodyPr>
+          <a:p>
+            <a:pPr indent="0" algn="ctr">
+              <a:buNone/>
+            </a:pPr>
+            <a:r>
+              <a:rPr lang="en-US" sz="4400" b="1" u="none" strike="noStrike">
+                <a:solidFill>
+                  <a:srgbClr val="FFFFFF"/>
+                </a:solidFill>
+                <a:effectLst/>
+                <a:uFillTx/>
+                <a:latin typeface="3270 Nerd Font"/>
+              </a:rPr>
+              <a:t>Was genau macht die CPU</a:t>
             </a:r>
             <a:endParaRPr lang="en-US" sz="4400" b="0" u="none" strike="noStrike">
               <a:solidFill>
@@ -5524,7 +5474,7 @@
       </p:sp>
       <p:sp>
         <p:nvSpPr>
-          <p:cNvPr id="76" name="PlaceHolder 2"/>
+          <p:cNvPr id="77" name="PlaceHolder 2"/>
           <p:cNvSpPr>
             <a:spLocks noGrp="1"/>
           </p:cNvSpPr>
@@ -5570,7 +5520,7 @@
                 <a:uFillTx/>
                 <a:latin typeface="3270 Nerd Font"/>
               </a:rPr>
-              <a:t>Die CPU liest das Programm aus dem ROM aus</a:t>
+              <a:t>Kontrolleinheit: verarbeitet die Befehle</a:t>
             </a:r>
             <a:endParaRPr lang="en-US" sz="2800" b="0" u="none" strike="noStrike">
               <a:solidFill>
@@ -5581,6 +5531,280 @@
               <a:latin typeface="Arial"/>
             </a:endParaRPr>
           </a:p>
+          <a:p>
+            <a:pPr marL="432000" indent="-324000" algn="l">
+              <a:spcBef>
+                <a:spcPts val="1191"/>
+              </a:spcBef>
+              <a:spcAft>
+                <a:spcPts val="992"/>
+              </a:spcAft>
+              <a:buClr>
+                <a:srgbClr val="FFFFFF"/>
+              </a:buClr>
+              <a:buSzPct val="85000"/>
+              <a:buFont typeface="Wingdings" charset="2"/>
+              <a:buChar char=""/>
+            </a:pPr>
+            <a:r>
+              <a:rPr lang="en-US" sz="2800" b="0" u="none" strike="noStrike">
+                <a:solidFill>
+                  <a:srgbClr val="FFFFFF"/>
+                </a:solidFill>
+                <a:effectLst/>
+                <a:uFillTx/>
+                <a:latin typeface="3270 Nerd Font"/>
+              </a:rPr>
+              <a:t>Arithmetisch-logische Einheit: führt Berechnungen durch</a:t>
+            </a:r>
+            <a:endParaRPr lang="en-US" sz="2800" b="0" u="none" strike="noStrike">
+              <a:solidFill>
+                <a:srgbClr val="FFFFFF"/>
+              </a:solidFill>
+              <a:effectLst/>
+              <a:uFillTx/>
+              <a:latin typeface="Arial"/>
+            </a:endParaRPr>
+          </a:p>
+        </p:txBody>
+      </p:sp>
+    </p:spTree>
+  </p:cSld>
+</p:sld>
+</file>
+
+<file path=ppt/slides/slide18.xml><?xml version="1.0" encoding="utf-8"?>
+<p:sld xmlns:a="http://schemas.openxmlformats.org/drawingml/2006/main" xmlns:p="http://schemas.openxmlformats.org/presentationml/2006/main" xmlns:r="http://schemas.openxmlformats.org/officeDocument/2006/relationships" xmlns:p14="http://schemas.microsoft.com/office/powerpoint/2010/main" xmlns:p15="http://schemas.microsoft.com/office/powerpoint/2012/main" xmlns:mc="http://schemas.openxmlformats.org/markup-compatibility/2006">
+  <p:cSld>
+    <p:bg>
+      <p:bgPr>
+        <a:gradFill rotWithShape="0">
+          <a:gsLst>
+            <a:gs pos="0">
+              <a:srgbClr val="282828"/>
+            </a:gs>
+            <a:gs pos="100000">
+              <a:srgbClr val="1D2021"/>
+            </a:gs>
+          </a:gsLst>
+          <a:path path="rect">
+            <a:fillToRect l="50000" t="50000" r="50000" b="50000"/>
+          </a:path>
+        </a:gradFill>
+      </p:bgPr>
+    </p:bg>
+    <p:spTree>
+      <p:nvGrpSpPr>
+        <p:cNvPr id="1" name=""/>
+        <p:cNvGrpSpPr/>
+        <p:nvPr/>
+      </p:nvGrpSpPr>
+      <p:grpSpPr>
+        <a:xfrm>
+          <a:off x="0" y="0"/>
+          <a:ext cx="0" cy="0"/>
+          <a:chOff x="0" y="0"/>
+          <a:chExt cx="0" cy="0"/>
+        </a:xfrm>
+      </p:grpSpPr>
+      <p:sp>
+        <p:nvSpPr>
+          <p:cNvPr id="78" name="PlaceHolder 1"/>
+          <p:cNvSpPr>
+            <a:spLocks noGrp="1"/>
+          </p:cNvSpPr>
+          <p:nvPr>
+            <p:ph type="title"/>
+          </p:nvPr>
+        </p:nvSpPr>
+        <p:spPr>
+          <a:xfrm>
+            <a:off x="503640" y="225720"/>
+            <a:ext cx="9068760" cy="946440"/>
+          </a:xfrm>
+          <a:prstGeom prst="rect">
+            <a:avLst/>
+          </a:prstGeom>
+          <a:noFill/>
+          <a:ln w="0">
+            <a:noFill/>
+          </a:ln>
+        </p:spPr>
+        <p:txBody>
+          <a:bodyPr lIns="0" tIns="0" rIns="0" bIns="0" anchor="ctr">
+            <a:spAutoFit/>
+          </a:bodyPr>
+          <a:p>
+            <a:pPr indent="0" algn="ctr">
+              <a:buNone/>
+            </a:pPr>
+            <a:r>
+              <a:rPr lang="en-US" sz="4400" b="1" u="none" strike="noStrike">
+                <a:solidFill>
+                  <a:srgbClr val="FFFFFF"/>
+                </a:solidFill>
+                <a:effectLst/>
+                <a:uFillTx/>
+                <a:latin typeface="3270 Nerd Font"/>
+              </a:rPr>
+              <a:t>Was genau macht die CPU</a:t>
+            </a:r>
+            <a:endParaRPr lang="en-US" sz="4400" b="0" u="none" strike="noStrike">
+              <a:solidFill>
+                <a:srgbClr val="FFFFFF"/>
+              </a:solidFill>
+              <a:effectLst/>
+              <a:uFillTx/>
+              <a:latin typeface="Arial"/>
+            </a:endParaRPr>
+          </a:p>
+        </p:txBody>
+      </p:sp>
+      <p:pic>
+        <p:nvPicPr>
+          <p:cNvPr id="79" name=""/>
+          <p:cNvPicPr/>
+          <p:nvPr/>
+        </p:nvPicPr>
+        <p:blipFill>
+          <a:blip r:embed="rId1">
+            <a:alphaModFix amt="0"/>
+          </a:blip>
+          <a:stretch/>
+        </p:blipFill>
+        <p:spPr>
+          <a:xfrm>
+            <a:off x="2165400" y="1325880"/>
+            <a:ext cx="5744880" cy="3931560"/>
+          </a:xfrm>
+          <a:prstGeom prst="rect">
+            <a:avLst/>
+          </a:prstGeom>
+          <a:noFill/>
+          <a:ln w="0">
+            <a:noFill/>
+          </a:ln>
+        </p:spPr>
+      </p:pic>
+    </p:spTree>
+  </p:cSld>
+</p:sld>
+</file>
+
+<file path=ppt/slides/slide19.xml><?xml version="1.0" encoding="utf-8"?>
+<p:sld xmlns:a="http://schemas.openxmlformats.org/drawingml/2006/main" xmlns:p="http://schemas.openxmlformats.org/presentationml/2006/main" xmlns:r="http://schemas.openxmlformats.org/officeDocument/2006/relationships" xmlns:p14="http://schemas.microsoft.com/office/powerpoint/2010/main" xmlns:p15="http://schemas.microsoft.com/office/powerpoint/2012/main" xmlns:mc="http://schemas.openxmlformats.org/markup-compatibility/2006">
+  <p:cSld>
+    <p:bg>
+      <p:bgPr>
+        <a:gradFill rotWithShape="0">
+          <a:gsLst>
+            <a:gs pos="0">
+              <a:srgbClr val="282828"/>
+            </a:gs>
+            <a:gs pos="100000">
+              <a:srgbClr val="1D2021"/>
+            </a:gs>
+          </a:gsLst>
+          <a:path path="rect">
+            <a:fillToRect l="50000" t="50000" r="50000" b="50000"/>
+          </a:path>
+        </a:gradFill>
+      </p:bgPr>
+    </p:bg>
+    <p:spTree>
+      <p:nvGrpSpPr>
+        <p:cNvPr id="1" name=""/>
+        <p:cNvGrpSpPr/>
+        <p:nvPr/>
+      </p:nvGrpSpPr>
+      <p:grpSpPr>
+        <a:xfrm>
+          <a:off x="0" y="0"/>
+          <a:ext cx="0" cy="0"/>
+          <a:chOff x="0" y="0"/>
+          <a:chExt cx="0" cy="0"/>
+        </a:xfrm>
+      </p:grpSpPr>
+      <p:sp>
+        <p:nvSpPr>
+          <p:cNvPr id="80" name="PlaceHolder 1"/>
+          <p:cNvSpPr>
+            <a:spLocks noGrp="1"/>
+          </p:cNvSpPr>
+          <p:nvPr>
+            <p:ph type="title"/>
+          </p:nvPr>
+        </p:nvSpPr>
+        <p:spPr>
+          <a:xfrm>
+            <a:off x="503640" y="225720"/>
+            <a:ext cx="9068760" cy="946440"/>
+          </a:xfrm>
+          <a:prstGeom prst="rect">
+            <a:avLst/>
+          </a:prstGeom>
+          <a:noFill/>
+          <a:ln w="0">
+            <a:noFill/>
+          </a:ln>
+        </p:spPr>
+        <p:txBody>
+          <a:bodyPr lIns="0" tIns="0" rIns="0" bIns="0" anchor="ctr">
+            <a:spAutoFit/>
+          </a:bodyPr>
+          <a:p>
+            <a:pPr indent="0" algn="ctr">
+              <a:buNone/>
+            </a:pPr>
+            <a:r>
+              <a:rPr lang="en-US" sz="4400" b="1" u="none" strike="noStrike">
+                <a:solidFill>
+                  <a:srgbClr val="FFFFFF"/>
+                </a:solidFill>
+                <a:effectLst/>
+                <a:uFillTx/>
+                <a:latin typeface="3270 Nerd Font"/>
+              </a:rPr>
+              <a:t>Was genau macht die CPU</a:t>
+            </a:r>
+            <a:endParaRPr lang="en-US" sz="4400" b="0" u="none" strike="noStrike">
+              <a:solidFill>
+                <a:srgbClr val="FFFFFF"/>
+              </a:solidFill>
+              <a:effectLst/>
+              <a:uFillTx/>
+              <a:latin typeface="Arial"/>
+            </a:endParaRPr>
+          </a:p>
+        </p:txBody>
+      </p:sp>
+      <p:sp>
+        <p:nvSpPr>
+          <p:cNvPr id="81" name="PlaceHolder 2"/>
+          <p:cNvSpPr>
+            <a:spLocks noGrp="1"/>
+          </p:cNvSpPr>
+          <p:nvPr>
+            <p:ph/>
+          </p:nvPr>
+        </p:nvSpPr>
+        <p:spPr>
+          <a:xfrm>
+            <a:off x="503640" y="1326240"/>
+            <a:ext cx="9068760" cy="3931560"/>
+          </a:xfrm>
+          <a:prstGeom prst="rect">
+            <a:avLst/>
+          </a:prstGeom>
+          <a:noFill/>
+          <a:ln w="0">
+            <a:noFill/>
+          </a:ln>
+        </p:spPr>
+        <p:txBody>
+          <a:bodyPr lIns="0" tIns="0" rIns="0" bIns="0" anchor="t">
+            <a:normAutofit/>
+          </a:bodyPr>
           <a:p>
             <a:pPr marL="432000" indent="-324000" algn="l">
               <a:spcBef>
@@ -5602,7 +5826,7 @@
                 <a:uFillTx/>
                 <a:latin typeface="3270 Nerd Font"/>
               </a:rPr>
-              <a:t>Die CPU decodiert den Befehl</a:t>
+              <a:t>Kontrolleinheit: verarbeitet die Befehle</a:t>
             </a:r>
             <a:endParaRPr lang="en-US" sz="2800" b="0" u="none" strike="noStrike">
               <a:solidFill>
@@ -5613,6 +5837,218 @@
               <a:latin typeface="Arial"/>
             </a:endParaRPr>
           </a:p>
+          <a:p>
+            <a:pPr marL="432000" indent="-324000" algn="l">
+              <a:spcBef>
+                <a:spcPts val="1191"/>
+              </a:spcBef>
+              <a:spcAft>
+                <a:spcPts val="992"/>
+              </a:spcAft>
+              <a:buClr>
+                <a:srgbClr val="FFFFFF"/>
+              </a:buClr>
+              <a:buSzPct val="85000"/>
+              <a:buFont typeface="Wingdings" charset="2"/>
+              <a:buChar char=""/>
+            </a:pPr>
+            <a:r>
+              <a:rPr lang="en-US" sz="2800" b="0" u="none" strike="noStrike">
+                <a:solidFill>
+                  <a:srgbClr val="FFFFFF"/>
+                </a:solidFill>
+                <a:effectLst/>
+                <a:uFillTx/>
+                <a:latin typeface="3270 Nerd Font"/>
+              </a:rPr>
+              <a:t>Arithmetisch-logische Einheit: führt Berechnungen durch</a:t>
+            </a:r>
+            <a:endParaRPr lang="en-US" sz="2800" b="0" u="none" strike="noStrike">
+              <a:solidFill>
+                <a:srgbClr val="FFFFFF"/>
+              </a:solidFill>
+              <a:effectLst/>
+              <a:uFillTx/>
+              <a:latin typeface="Arial"/>
+            </a:endParaRPr>
+          </a:p>
+          <a:p>
+            <a:pPr marL="432000" indent="-324000" algn="l">
+              <a:spcBef>
+                <a:spcPts val="1191"/>
+              </a:spcBef>
+              <a:spcAft>
+                <a:spcPts val="992"/>
+              </a:spcAft>
+              <a:buClr>
+                <a:srgbClr val="FFFFFF"/>
+              </a:buClr>
+              <a:buSzPct val="85000"/>
+              <a:buFont typeface="Wingdings" charset="2"/>
+              <a:buChar char=""/>
+            </a:pPr>
+            <a:r>
+              <a:rPr lang="en-US" sz="2800" b="0" u="none" strike="noStrike">
+                <a:solidFill>
+                  <a:srgbClr val="FFFFFF"/>
+                </a:solidFill>
+                <a:effectLst/>
+                <a:uFillTx/>
+                <a:latin typeface="3270 Nerd Font"/>
+              </a:rPr>
+              <a:t>Register: extrem schnelle Zwischenspeicher</a:t>
+            </a:r>
+            <a:endParaRPr lang="en-US" sz="2800" b="0" u="none" strike="noStrike">
+              <a:solidFill>
+                <a:srgbClr val="FFFFFF"/>
+              </a:solidFill>
+              <a:effectLst/>
+              <a:uFillTx/>
+              <a:latin typeface="Arial"/>
+            </a:endParaRPr>
+          </a:p>
+          <a:p>
+            <a:pPr marL="432000" indent="0" algn="l">
+              <a:spcBef>
+                <a:spcPts val="1191"/>
+              </a:spcBef>
+              <a:spcAft>
+                <a:spcPts val="992"/>
+              </a:spcAft>
+              <a:buNone/>
+            </a:pPr>
+            <a:endParaRPr lang="en-US" sz="2800" b="0" u="none" strike="noStrike">
+              <a:solidFill>
+                <a:srgbClr val="FFFFFF"/>
+              </a:solidFill>
+              <a:effectLst/>
+              <a:uFillTx/>
+              <a:latin typeface="Arial"/>
+            </a:endParaRPr>
+          </a:p>
+        </p:txBody>
+      </p:sp>
+    </p:spTree>
+  </p:cSld>
+</p:sld>
+</file>
+
+<file path=ppt/slides/slide2.xml><?xml version="1.0" encoding="utf-8"?>
+<p:sld xmlns:a="http://schemas.openxmlformats.org/drawingml/2006/main" xmlns:p="http://schemas.openxmlformats.org/presentationml/2006/main" xmlns:r="http://schemas.openxmlformats.org/officeDocument/2006/relationships" xmlns:p14="http://schemas.microsoft.com/office/powerpoint/2010/main" xmlns:p15="http://schemas.microsoft.com/office/powerpoint/2012/main" xmlns:mc="http://schemas.openxmlformats.org/markup-compatibility/2006">
+  <p:cSld>
+    <p:bg>
+      <p:bgPr>
+        <a:gradFill rotWithShape="0">
+          <a:gsLst>
+            <a:gs pos="0">
+              <a:srgbClr val="282828"/>
+            </a:gs>
+            <a:gs pos="100000">
+              <a:srgbClr val="1D2021"/>
+            </a:gs>
+          </a:gsLst>
+          <a:path path="rect">
+            <a:fillToRect l="50000" t="50000" r="50000" b="50000"/>
+          </a:path>
+        </a:gradFill>
+      </p:bgPr>
+    </p:bg>
+    <p:spTree>
+      <p:nvGrpSpPr>
+        <p:cNvPr id="1" name=""/>
+        <p:cNvGrpSpPr/>
+        <p:nvPr/>
+      </p:nvGrpSpPr>
+      <p:grpSpPr>
+        <a:xfrm>
+          <a:off x="0" y="0"/>
+          <a:ext cx="0" cy="0"/>
+          <a:chOff x="0" y="0"/>
+          <a:chExt cx="0" cy="0"/>
+        </a:xfrm>
+      </p:grpSpPr>
+      <p:sp>
+        <p:nvSpPr>
+          <p:cNvPr id="19" name="PlaceHolder 1"/>
+          <p:cNvSpPr>
+            <a:spLocks noGrp="1"/>
+          </p:cNvSpPr>
+          <p:nvPr>
+            <p:ph type="title"/>
+          </p:nvPr>
+        </p:nvSpPr>
+        <p:spPr>
+          <a:xfrm>
+            <a:off x="503640" y="225720"/>
+            <a:ext cx="9068760" cy="946440"/>
+          </a:xfrm>
+          <a:prstGeom prst="rect">
+            <a:avLst/>
+          </a:prstGeom>
+          <a:noFill/>
+          <a:ln w="0">
+            <a:noFill/>
+          </a:ln>
+        </p:spPr>
+        <p:txBody>
+          <a:bodyPr lIns="0" tIns="0" rIns="0" bIns="0" anchor="ctr">
+            <a:spAutoFit/>
+          </a:bodyPr>
+          <a:p>
+            <a:pPr indent="0" algn="ctr">
+              <a:buNone/>
+            </a:pPr>
+            <a:r>
+              <a:rPr lang="en-US" sz="4400" b="1" u="none" strike="noStrike">
+                <a:solidFill>
+                  <a:schemeClr val="lt1">
+                    <a:lumOff val="0"/>
+                  </a:schemeClr>
+                </a:solidFill>
+                <a:effectLst/>
+                <a:uFillTx/>
+                <a:latin typeface="3270 Nerd Font"/>
+              </a:rPr>
+              <a:t>Anwendung</a:t>
+            </a:r>
+            <a:endParaRPr lang="en-US" sz="4400" b="0" u="none" strike="noStrike">
+              <a:solidFill>
+                <a:srgbClr val="FFFFFF"/>
+              </a:solidFill>
+              <a:effectLst/>
+              <a:uFillTx/>
+              <a:latin typeface="Arial"/>
+            </a:endParaRPr>
+          </a:p>
+        </p:txBody>
+      </p:sp>
+      <p:sp>
+        <p:nvSpPr>
+          <p:cNvPr id="20" name="PlaceHolder 2"/>
+          <p:cNvSpPr>
+            <a:spLocks noGrp="1"/>
+          </p:cNvSpPr>
+          <p:nvPr>
+            <p:ph/>
+          </p:nvPr>
+        </p:nvSpPr>
+        <p:spPr>
+          <a:xfrm>
+            <a:off x="503640" y="1326240"/>
+            <a:ext cx="9097560" cy="3931560"/>
+          </a:xfrm>
+          <a:prstGeom prst="rect">
+            <a:avLst/>
+          </a:prstGeom>
+          <a:noFill/>
+          <a:ln w="0">
+            <a:noFill/>
+          </a:ln>
+        </p:spPr>
+        <p:txBody>
+          <a:bodyPr lIns="0" tIns="0" rIns="0" bIns="0" anchor="t">
+            <a:normAutofit lnSpcReduction="9999"/>
+          </a:bodyPr>
           <a:p>
             <a:pPr marL="432000" indent="-324000" algn="l">
               <a:spcBef>
@@ -5626,7 +6062,7 @@
               <a:buChar char=""/>
             </a:pPr>
             <a:r>
-              <a:rPr lang="en-US" sz="2800" b="0" u="none" strike="noStrike">
+              <a:rPr lang="en-US" sz="3200" b="0" u="none" strike="noStrike">
                 <a:solidFill>
                   <a:srgbClr val="FFFFFF"/>
                 </a:solidFill>
@@ -5634,9 +6070,9 @@
                 <a:uFillTx/>
                 <a:latin typeface="3270 Nerd Font"/>
               </a:rPr>
-              <a:t>Die CPU führt den Befehl aus</a:t>
-            </a:r>
-            <a:endParaRPr lang="en-US" sz="2800" b="0" u="none" strike="noStrike">
+              <a:t>Haushaltsgeräte</a:t>
+            </a:r>
+            <a:endParaRPr lang="en-US" sz="3200" b="0" u="none" strike="noStrike">
               <a:solidFill>
                 <a:srgbClr val="FFFFFF"/>
               </a:solidFill>
@@ -5658,7 +6094,7 @@
               <a:buChar char=""/>
             </a:pPr>
             <a:r>
-              <a:rPr lang="en-US" sz="2800" b="0" u="none" strike="noStrike">
+              <a:rPr lang="en-US" sz="3200" b="0" u="none" strike="noStrike">
                 <a:solidFill>
                   <a:srgbClr val="FFFFFF"/>
                 </a:solidFill>
@@ -5666,26 +6102,31 @@
                 <a:uFillTx/>
                 <a:latin typeface="3270 Nerd Font"/>
               </a:rPr>
-              <a:t>Pro Takt wird ein Befehl ausgeführt</a:t>
-            </a:r>
-            <a:endParaRPr lang="en-US" sz="2800" b="0" u="none" strike="noStrike">
-              <a:solidFill>
-                <a:srgbClr val="FFFFFF"/>
-              </a:solidFill>
-              <a:effectLst/>
-              <a:uFillTx/>
-              <a:latin typeface="Arial"/>
-            </a:endParaRPr>
-          </a:p>
-          <a:p>
-            <a:pPr marL="432000" indent="0" algn="l">
+              <a:t>Programmierbare Maschinen</a:t>
+            </a:r>
+            <a:endParaRPr lang="en-US" sz="3200" b="0" u="none" strike="noStrike">
+              <a:solidFill>
+                <a:srgbClr val="FFFFFF"/>
+              </a:solidFill>
+              <a:effectLst/>
+              <a:uFillTx/>
+              <a:latin typeface="Arial"/>
+            </a:endParaRPr>
+          </a:p>
+          <a:p>
+            <a:pPr marL="432000" indent="-324000" algn="l">
               <a:spcBef>
                 <a:spcPts val="1414"/>
               </a:spcBef>
-              <a:buNone/>
-            </a:pPr>
-            <a:r>
-              <a:rPr lang="en-US" sz="2600" b="0" u="none" strike="noStrike">
+              <a:buClr>
+                <a:srgbClr val="FFFFFF"/>
+              </a:buClr>
+              <a:buSzPct val="85000"/>
+              <a:buFont typeface="Wingdings" charset="2"/>
+              <a:buChar char=""/>
+            </a:pPr>
+            <a:r>
+              <a:rPr lang="en-US" sz="3200" b="0" u="none" strike="noStrike">
                 <a:solidFill>
                   <a:srgbClr val="FFFFFF"/>
                 </a:solidFill>
@@ -5693,9 +6134,313 @@
                 <a:uFillTx/>
                 <a:latin typeface="3270 Nerd Font"/>
               </a:rPr>
-              <a:t>(16 MHz → 16.000.000 Befehle pro Sekunde)</a:t>
-            </a:r>
-            <a:endParaRPr lang="en-US" sz="2600" b="0" u="none" strike="noStrike">
+              <a:t>Kontrollsysteme</a:t>
+            </a:r>
+            <a:endParaRPr lang="en-US" sz="3200" b="0" u="none" strike="noStrike">
+              <a:solidFill>
+                <a:srgbClr val="FFFFFF"/>
+              </a:solidFill>
+              <a:effectLst/>
+              <a:uFillTx/>
+              <a:latin typeface="Arial"/>
+            </a:endParaRPr>
+          </a:p>
+          <a:p>
+            <a:pPr marL="432000" indent="-324000" algn="l">
+              <a:spcBef>
+                <a:spcPts val="1414"/>
+              </a:spcBef>
+              <a:buClr>
+                <a:srgbClr val="FFFFFF"/>
+              </a:buClr>
+              <a:buSzPct val="85000"/>
+              <a:buFont typeface="Wingdings" charset="2"/>
+              <a:buChar char=""/>
+            </a:pPr>
+            <a:r>
+              <a:rPr lang="en-US" sz="3200" b="0" u="none" strike="noStrike">
+                <a:solidFill>
+                  <a:srgbClr val="FFFFFF"/>
+                </a:solidFill>
+                <a:effectLst/>
+                <a:uFillTx/>
+                <a:latin typeface="3270 Nerd Font"/>
+              </a:rPr>
+              <a:t>Roboter</a:t>
+            </a:r>
+            <a:endParaRPr lang="en-US" sz="3200" b="0" u="none" strike="noStrike">
+              <a:solidFill>
+                <a:srgbClr val="FFFFFF"/>
+              </a:solidFill>
+              <a:effectLst/>
+              <a:uFillTx/>
+              <a:latin typeface="Arial"/>
+            </a:endParaRPr>
+          </a:p>
+          <a:p>
+            <a:pPr marL="432000" indent="-324000" algn="l">
+              <a:spcBef>
+                <a:spcPts val="1414"/>
+              </a:spcBef>
+              <a:buClr>
+                <a:srgbClr val="FFFFFF"/>
+              </a:buClr>
+              <a:buSzPct val="85000"/>
+              <a:buFont typeface="Wingdings" charset="2"/>
+              <a:buChar char=""/>
+            </a:pPr>
+            <a:r>
+              <a:rPr lang="en-US" sz="3200" b="0" u="none" strike="noStrike">
+                <a:solidFill>
+                  <a:srgbClr val="FFFFFF"/>
+                </a:solidFill>
+                <a:effectLst/>
+                <a:uFillTx/>
+                <a:latin typeface="3270 Nerd Font"/>
+              </a:rPr>
+              <a:t>Chipkarten</a:t>
+            </a:r>
+            <a:endParaRPr lang="en-US" sz="3200" b="0" u="none" strike="noStrike">
+              <a:solidFill>
+                <a:srgbClr val="FFFFFF"/>
+              </a:solidFill>
+              <a:effectLst/>
+              <a:uFillTx/>
+              <a:latin typeface="Arial"/>
+            </a:endParaRPr>
+          </a:p>
+          <a:p>
+            <a:pPr marL="432000" indent="-324000" algn="l">
+              <a:spcBef>
+                <a:spcPts val="1414"/>
+              </a:spcBef>
+              <a:buClr>
+                <a:srgbClr val="FFFFFF"/>
+              </a:buClr>
+              <a:buSzPct val="85000"/>
+              <a:buFont typeface="Wingdings" charset="2"/>
+              <a:buChar char=""/>
+            </a:pPr>
+            <a:r>
+              <a:rPr lang="en-US" sz="3200" b="0" u="none" strike="noStrike">
+                <a:solidFill>
+                  <a:srgbClr val="FFFFFF"/>
+                </a:solidFill>
+                <a:effectLst/>
+                <a:uFillTx/>
+                <a:latin typeface="3270 Nerd Font"/>
+              </a:rPr>
+              <a:t>Peripheriegeräte</a:t>
+            </a:r>
+            <a:endParaRPr lang="en-US" sz="3200" b="0" u="none" strike="noStrike">
+              <a:solidFill>
+                <a:srgbClr val="FFFFFF"/>
+              </a:solidFill>
+              <a:effectLst/>
+              <a:uFillTx/>
+              <a:latin typeface="Arial"/>
+            </a:endParaRPr>
+          </a:p>
+          <a:p>
+            <a:pPr marL="432000" indent="-324000" algn="l">
+              <a:spcBef>
+                <a:spcPts val="1414"/>
+              </a:spcBef>
+              <a:buClr>
+                <a:srgbClr val="FFFFFF"/>
+              </a:buClr>
+              <a:buSzPct val="85000"/>
+              <a:buFont typeface="Wingdings" charset="2"/>
+              <a:buChar char=""/>
+            </a:pPr>
+            <a:r>
+              <a:rPr lang="en-US" sz="3600" b="1" u="none" strike="noStrike">
+                <a:solidFill>
+                  <a:srgbClr val="FFFFFF"/>
+                </a:solidFill>
+                <a:effectLst/>
+                <a:uFillTx/>
+                <a:latin typeface="3270 Nerd Font"/>
+              </a:rPr>
+              <a:t>Eingebettete Systeme</a:t>
+            </a:r>
+            <a:endParaRPr lang="en-US" sz="3600" b="0" u="none" strike="noStrike">
+              <a:solidFill>
+                <a:srgbClr val="FFFFFF"/>
+              </a:solidFill>
+              <a:effectLst/>
+              <a:uFillTx/>
+              <a:latin typeface="Arial"/>
+            </a:endParaRPr>
+          </a:p>
+        </p:txBody>
+      </p:sp>
+      <p:pic>
+        <p:nvPicPr>
+          <p:cNvPr id="21" name=""/>
+          <p:cNvPicPr/>
+          <p:nvPr/>
+        </p:nvPicPr>
+        <p:blipFill>
+          <a:blip r:embed="rId1">
+            <a:alphaModFix amt="0"/>
+          </a:blip>
+          <a:stretch/>
+        </p:blipFill>
+        <p:spPr>
+          <a:xfrm>
+            <a:off x="8588160" y="3200400"/>
+            <a:ext cx="1203120" cy="2057400"/>
+          </a:xfrm>
+          <a:prstGeom prst="rect">
+            <a:avLst/>
+          </a:prstGeom>
+          <a:noFill/>
+          <a:ln w="0">
+            <a:noFill/>
+          </a:ln>
+        </p:spPr>
+      </p:pic>
+      <p:pic>
+        <p:nvPicPr>
+          <p:cNvPr id="22" name=""/>
+          <p:cNvPicPr/>
+          <p:nvPr/>
+        </p:nvPicPr>
+        <p:blipFill>
+          <a:blip r:embed="rId2">
+            <a:alphaModFix amt="0"/>
+          </a:blip>
+          <a:stretch/>
+        </p:blipFill>
+        <p:spPr>
+          <a:xfrm>
+            <a:off x="6629400" y="4326840"/>
+            <a:ext cx="1600200" cy="930960"/>
+          </a:xfrm>
+          <a:prstGeom prst="rect">
+            <a:avLst/>
+          </a:prstGeom>
+          <a:noFill/>
+          <a:ln w="0">
+            <a:noFill/>
+          </a:ln>
+        </p:spPr>
+      </p:pic>
+      <p:pic>
+        <p:nvPicPr>
+          <p:cNvPr id="23" name=""/>
+          <p:cNvPicPr/>
+          <p:nvPr/>
+        </p:nvPicPr>
+        <p:blipFill>
+          <a:blip r:embed="rId3">
+            <a:alphaModFix amt="0"/>
+          </a:blip>
+          <a:stretch/>
+        </p:blipFill>
+        <p:spPr>
+          <a:xfrm>
+            <a:off x="7543800" y="225720"/>
+            <a:ext cx="2239920" cy="2239920"/>
+          </a:xfrm>
+          <a:prstGeom prst="rect">
+            <a:avLst/>
+          </a:prstGeom>
+          <a:noFill/>
+          <a:ln w="0">
+            <a:noFill/>
+          </a:ln>
+        </p:spPr>
+      </p:pic>
+      <p:pic>
+        <p:nvPicPr>
+          <p:cNvPr id="24" name=""/>
+          <p:cNvPicPr/>
+          <p:nvPr/>
+        </p:nvPicPr>
+        <p:blipFill>
+          <a:blip r:embed="rId4">
+            <a:alphaModFix amt="0"/>
+          </a:blip>
+          <a:stretch/>
+        </p:blipFill>
+        <p:spPr>
+          <a:xfrm>
+            <a:off x="6400800" y="2514600"/>
+            <a:ext cx="1054440" cy="887040"/>
+          </a:xfrm>
+          <a:prstGeom prst="rect">
+            <a:avLst/>
+          </a:prstGeom>
+          <a:noFill/>
+          <a:ln w="0">
+            <a:noFill/>
+          </a:ln>
+        </p:spPr>
+      </p:pic>
+      <p:pic>
+        <p:nvPicPr>
+          <p:cNvPr id="25" name=""/>
+          <p:cNvPicPr/>
+          <p:nvPr/>
+        </p:nvPicPr>
+        <p:blipFill>
+          <a:blip r:embed="rId5">
+            <a:alphaModFix amt="0"/>
+          </a:blip>
+          <a:stretch/>
+        </p:blipFill>
+        <p:spPr>
+          <a:xfrm>
+            <a:off x="7673760" y="2337480"/>
+            <a:ext cx="914400" cy="1091520"/>
+          </a:xfrm>
+          <a:prstGeom prst="rect">
+            <a:avLst/>
+          </a:prstGeom>
+          <a:noFill/>
+          <a:ln w="0">
+            <a:noFill/>
+          </a:ln>
+        </p:spPr>
+      </p:pic>
+      <p:sp>
+        <p:nvSpPr>
+          <p:cNvPr id="26" name=""/>
+          <p:cNvSpPr txBox="1"/>
+          <p:nvPr/>
+        </p:nvSpPr>
+        <p:spPr>
+          <a:xfrm>
+            <a:off x="9144000" y="5257800"/>
+            <a:ext cx="846000" cy="401400"/>
+          </a:xfrm>
+          <a:prstGeom prst="rect">
+            <a:avLst/>
+          </a:prstGeom>
+          <a:noFill/>
+          <a:ln w="0">
+            <a:noFill/>
+          </a:ln>
+        </p:spPr>
+        <p:txBody>
+          <a:bodyPr wrap="none" lIns="90000" tIns="45000" rIns="90000" bIns="45000" anchor="t">
+            <a:spAutoFit/>
+          </a:bodyPr>
+          <a:p>
+            <a:r>
+              <a:rPr lang="en-US" sz="1800" b="0" u="none" strike="noStrike">
+                <a:solidFill>
+                  <a:srgbClr val="FFFFFF"/>
+                </a:solidFill>
+                <a:effectLst/>
+                <a:uFillTx/>
+                <a:latin typeface="Arial"/>
+              </a:rPr>
+              <a:t>[1,2,3]</a:t>
+            </a:r>
+            <a:endParaRPr lang="en-US" sz="1800" b="0" u="none" strike="noStrike">
               <a:solidFill>
                 <a:srgbClr val="FFFFFF"/>
               </a:solidFill>
@@ -5711,38 +6456,38 @@
   <p:timing>
     <p:tnLst>
       <p:par>
-        <p:cTn id="141" dur="indefinite" restart="never" nodeType="tmRoot">
+        <p:cTn id="1" dur="indefinite" restart="never" nodeType="tmRoot">
           <p:childTnLst>
             <p:seq>
-              <p:cTn id="142" dur="indefinite" nodeType="mainSeq">
+              <p:cTn id="2" dur="indefinite" nodeType="mainSeq">
                 <p:childTnLst>
                   <p:par>
-                    <p:cTn id="143" fill="hold">
+                    <p:cTn id="3" fill="hold">
                       <p:stCondLst>
                         <p:cond delay="indefinite"/>
                       </p:stCondLst>
                       <p:childTnLst>
                         <p:par>
-                          <p:cTn id="144" fill="hold">
+                          <p:cTn id="4" fill="hold">
                             <p:stCondLst>
                               <p:cond delay="0"/>
                             </p:stCondLst>
                             <p:childTnLst>
                               <p:par>
-                                <p:cTn id="145" presetID="1" presetClass="entr" fill="hold" nodeType="clickEffect">
+                                <p:cTn id="5" presetID="1" presetClass="entr" fill="hold" nodeType="clickEffect">
                                   <p:stCondLst>
                                     <p:cond delay="0"/>
                                   </p:stCondLst>
                                   <p:childTnLst>
                                     <p:set>
                                       <p:cBhvr>
-                                        <p:cTn id="146" dur="1" fill="hold">
+                                        <p:cTn id="6" dur="1" fill="hold">
                                           <p:stCondLst>
                                             <p:cond delay="0"/>
                                           </p:stCondLst>
                                         </p:cTn>
                                         <p:tgtEl>
-                                          <p:spTgt spid="76">
+                                          <p:spTgt spid="20">
                                             <p:txEl>
                                               <p:pRg st="0" end="0"/>
                                             </p:txEl>
@@ -5766,34 +6511,289 @@
                     </p:cTn>
                   </p:par>
                   <p:par>
-                    <p:cTn id="147" fill="hold">
+                    <p:cTn id="7" fill="hold">
                       <p:stCondLst>
                         <p:cond delay="indefinite"/>
                       </p:stCondLst>
                       <p:childTnLst>
                         <p:par>
-                          <p:cTn id="148" fill="hold">
+                          <p:cTn id="8" fill="hold">
                             <p:stCondLst>
                               <p:cond delay="0"/>
                             </p:stCondLst>
                             <p:childTnLst>
                               <p:par>
-                                <p:cTn id="149" presetID="1" presetClass="entr" fill="hold" nodeType="clickEffect">
+                                <p:cTn id="9" presetID="1" presetClass="entr" fill="hold" nodeType="clickEffect">
                                   <p:stCondLst>
                                     <p:cond delay="0"/>
                                   </p:stCondLst>
                                   <p:childTnLst>
                                     <p:set>
                                       <p:cBhvr>
-                                        <p:cTn id="150" dur="1" fill="hold">
+                                        <p:cTn id="10" dur="1" fill="hold">
                                           <p:stCondLst>
                                             <p:cond delay="0"/>
                                           </p:stCondLst>
                                         </p:cTn>
                                         <p:tgtEl>
-                                          <p:spTgt spid="76">
+                                          <p:spTgt spid="20">
                                             <p:txEl>
                                               <p:pRg st="1" end="1"/>
+                                            </p:txEl>
+                                          </p:spTgt>
+                                        </p:tgtEl>
+                                        <p:attrNameLst>
+                                          <p:attrName>style.visibility</p:attrName>
+                                        </p:attrNameLst>
+                                      </p:cBhvr>
+                                      <p:to>
+                                        <p:strVal val="visible"/>
+                                      </p:to>
+                                    </p:set>
+                                  </p:childTnLst>
+                                </p:cTn>
+                              </p:par>
+                              <p:par>
+                                <p:cTn id="11" presetID="1" presetClass="entr" fill="hold" nodeType="withEffect">
+                                  <p:stCondLst>
+                                    <p:cond delay="0"/>
+                                  </p:stCondLst>
+                                  <p:childTnLst>
+                                    <p:set>
+                                      <p:cBhvr>
+                                        <p:cTn id="12" dur="1" fill="hold">
+                                          <p:stCondLst>
+                                            <p:cond delay="0"/>
+                                          </p:stCondLst>
+                                        </p:cTn>
+                                        <p:tgtEl>
+                                          <p:spTgt spid="23"/>
+                                        </p:tgtEl>
+                                        <p:attrNameLst>
+                                          <p:attrName>style.visibility</p:attrName>
+                                        </p:attrNameLst>
+                                      </p:cBhvr>
+                                      <p:to>
+                                        <p:strVal val="visible"/>
+                                      </p:to>
+                                    </p:set>
+                                  </p:childTnLst>
+                                </p:cTn>
+                              </p:par>
+                            </p:childTnLst>
+                          </p:cTn>
+                        </p:par>
+                      </p:childTnLst>
+                    </p:cTn>
+                  </p:par>
+                  <p:par>
+                    <p:cTn id="13" fill="hold">
+                      <p:stCondLst>
+                        <p:cond delay="indefinite"/>
+                      </p:stCondLst>
+                      <p:childTnLst>
+                        <p:par>
+                          <p:cTn id="14" fill="hold">
+                            <p:stCondLst>
+                              <p:cond delay="0"/>
+                            </p:stCondLst>
+                            <p:childTnLst>
+                              <p:par>
+                                <p:cTn id="15" presetID="1" presetClass="entr" fill="hold" nodeType="clickEffect">
+                                  <p:stCondLst>
+                                    <p:cond delay="0"/>
+                                  </p:stCondLst>
+                                  <p:childTnLst>
+                                    <p:set>
+                                      <p:cBhvr>
+                                        <p:cTn id="16" dur="1" fill="hold">
+                                          <p:stCondLst>
+                                            <p:cond delay="0"/>
+                                          </p:stCondLst>
+                                        </p:cTn>
+                                        <p:tgtEl>
+                                          <p:spTgt spid="20">
+                                            <p:txEl>
+                                              <p:pRg st="2" end="2"/>
+                                            </p:txEl>
+                                          </p:spTgt>
+                                        </p:tgtEl>
+                                        <p:attrNameLst>
+                                          <p:attrName>style.visibility</p:attrName>
+                                        </p:attrNameLst>
+                                      </p:cBhvr>
+                                      <p:to>
+                                        <p:strVal val="visible"/>
+                                      </p:to>
+                                    </p:set>
+                                  </p:childTnLst>
+                                </p:cTn>
+                              </p:par>
+                              <p:par>
+                                <p:cTn id="17" presetID="1" presetClass="entr" fill="hold" nodeType="withEffect">
+                                  <p:stCondLst>
+                                    <p:cond delay="0"/>
+                                  </p:stCondLst>
+                                  <p:childTnLst>
+                                    <p:set>
+                                      <p:cBhvr>
+                                        <p:cTn id="18" dur="1" fill="hold">
+                                          <p:stCondLst>
+                                            <p:cond delay="0"/>
+                                          </p:stCondLst>
+                                        </p:cTn>
+                                        <p:tgtEl>
+                                          <p:spTgt spid="24"/>
+                                        </p:tgtEl>
+                                        <p:attrNameLst>
+                                          <p:attrName>style.visibility</p:attrName>
+                                        </p:attrNameLst>
+                                      </p:cBhvr>
+                                      <p:to>
+                                        <p:strVal val="visible"/>
+                                      </p:to>
+                                    </p:set>
+                                  </p:childTnLst>
+                                </p:cTn>
+                              </p:par>
+                              <p:par>
+                                <p:cTn id="19" presetID="1" presetClass="entr" fill="hold" nodeType="withEffect">
+                                  <p:stCondLst>
+                                    <p:cond delay="0"/>
+                                  </p:stCondLst>
+                                  <p:childTnLst>
+                                    <p:set>
+                                      <p:cBhvr>
+                                        <p:cTn id="20" dur="1" fill="hold">
+                                          <p:stCondLst>
+                                            <p:cond delay="0"/>
+                                          </p:stCondLst>
+                                        </p:cTn>
+                                        <p:tgtEl>
+                                          <p:spTgt spid="25"/>
+                                        </p:tgtEl>
+                                        <p:attrNameLst>
+                                          <p:attrName>style.visibility</p:attrName>
+                                        </p:attrNameLst>
+                                      </p:cBhvr>
+                                      <p:to>
+                                        <p:strVal val="visible"/>
+                                      </p:to>
+                                    </p:set>
+                                  </p:childTnLst>
+                                </p:cTn>
+                              </p:par>
+                            </p:childTnLst>
+                          </p:cTn>
+                        </p:par>
+                      </p:childTnLst>
+                    </p:cTn>
+                  </p:par>
+                  <p:par>
+                    <p:cTn id="21" fill="hold">
+                      <p:stCondLst>
+                        <p:cond delay="indefinite"/>
+                      </p:stCondLst>
+                      <p:childTnLst>
+                        <p:par>
+                          <p:cTn id="22" fill="hold">
+                            <p:stCondLst>
+                              <p:cond delay="0"/>
+                            </p:stCondLst>
+                            <p:childTnLst>
+                              <p:par>
+                                <p:cTn id="23" presetID="1" presetClass="entr" fill="hold" nodeType="clickEffect">
+                                  <p:stCondLst>
+                                    <p:cond delay="0"/>
+                                  </p:stCondLst>
+                                  <p:childTnLst>
+                                    <p:set>
+                                      <p:cBhvr>
+                                        <p:cTn id="24" dur="1" fill="hold">
+                                          <p:stCondLst>
+                                            <p:cond delay="0"/>
+                                          </p:stCondLst>
+                                        </p:cTn>
+                                        <p:tgtEl>
+                                          <p:spTgt spid="20">
+                                            <p:txEl>
+                                              <p:pRg st="3" end="3"/>
+                                            </p:txEl>
+                                          </p:spTgt>
+                                        </p:tgtEl>
+                                        <p:attrNameLst>
+                                          <p:attrName>style.visibility</p:attrName>
+                                        </p:attrNameLst>
+                                      </p:cBhvr>
+                                      <p:to>
+                                        <p:strVal val="visible"/>
+                                      </p:to>
+                                    </p:set>
+                                  </p:childTnLst>
+                                </p:cTn>
+                              </p:par>
+                              <p:par>
+                                <p:cTn id="25" presetID="1" presetClass="entr" fill="hold" nodeType="withEffect">
+                                  <p:stCondLst>
+                                    <p:cond delay="0"/>
+                                  </p:stCondLst>
+                                  <p:childTnLst>
+                                    <p:set>
+                                      <p:cBhvr>
+                                        <p:cTn id="26" dur="1" fill="hold">
+                                          <p:stCondLst>
+                                            <p:cond delay="0"/>
+                                          </p:stCondLst>
+                                        </p:cTn>
+                                        <p:tgtEl>
+                                          <p:spTgt spid="21"/>
+                                        </p:tgtEl>
+                                        <p:attrNameLst>
+                                          <p:attrName>style.visibility</p:attrName>
+                                        </p:attrNameLst>
+                                      </p:cBhvr>
+                                      <p:to>
+                                        <p:strVal val="visible"/>
+                                      </p:to>
+                                    </p:set>
+                                  </p:childTnLst>
+                                </p:cTn>
+                              </p:par>
+                            </p:childTnLst>
+                          </p:cTn>
+                        </p:par>
+                      </p:childTnLst>
+                    </p:cTn>
+                  </p:par>
+                  <p:par>
+                    <p:cTn id="27" fill="hold">
+                      <p:stCondLst>
+                        <p:cond delay="indefinite"/>
+                      </p:stCondLst>
+                      <p:childTnLst>
+                        <p:par>
+                          <p:cTn id="28" fill="hold">
+                            <p:stCondLst>
+                              <p:cond delay="0"/>
+                            </p:stCondLst>
+                            <p:childTnLst>
+                              <p:par>
+                                <p:cTn id="29" presetID="1" presetClass="entr" fill="hold" nodeType="clickEffect">
+                                  <p:stCondLst>
+                                    <p:cond delay="0"/>
+                                  </p:stCondLst>
+                                  <p:childTnLst>
+                                    <p:set>
+                                      <p:cBhvr>
+                                        <p:cTn id="30" dur="1" fill="hold">
+                                          <p:stCondLst>
+                                            <p:cond delay="0"/>
+                                          </p:stCondLst>
+                                        </p:cTn>
+                                        <p:tgtEl>
+                                          <p:spTgt spid="20">
+                                            <p:txEl>
+                                              <p:pRg st="4" end="4"/>
                                             </p:txEl>
                                           </p:spTgt>
                                         </p:tgtEl>
@@ -5815,34 +6815,92 @@
                     </p:cTn>
                   </p:par>
                   <p:par>
-                    <p:cTn id="151" fill="hold">
+                    <p:cTn id="31" fill="hold">
                       <p:stCondLst>
                         <p:cond delay="indefinite"/>
                       </p:stCondLst>
                       <p:childTnLst>
                         <p:par>
-                          <p:cTn id="152" fill="hold">
+                          <p:cTn id="32" fill="hold">
                             <p:stCondLst>
                               <p:cond delay="0"/>
                             </p:stCondLst>
                             <p:childTnLst>
                               <p:par>
-                                <p:cTn id="153" presetID="1" presetClass="entr" fill="hold" nodeType="clickEffect">
+                                <p:cTn id="33" presetID="1" presetClass="entr" fill="hold" nodeType="clickEffect">
                                   <p:stCondLst>
                                     <p:cond delay="0"/>
                                   </p:stCondLst>
                                   <p:childTnLst>
                                     <p:set>
                                       <p:cBhvr>
-                                        <p:cTn id="154" dur="1" fill="hold">
+                                        <p:cTn id="34" dur="1" fill="hold">
                                           <p:stCondLst>
                                             <p:cond delay="0"/>
                                           </p:stCondLst>
                                         </p:cTn>
                                         <p:tgtEl>
-                                          <p:spTgt spid="76">
+                                          <p:spTgt spid="20">
                                             <p:txEl>
-                                              <p:pRg st="2" end="2"/>
+                                              <p:pRg st="5" end="5"/>
+                                            </p:txEl>
+                                          </p:spTgt>
+                                        </p:tgtEl>
+                                        <p:attrNameLst>
+                                          <p:attrName>style.visibility</p:attrName>
+                                        </p:attrNameLst>
+                                      </p:cBhvr>
+                                      <p:to>
+                                        <p:strVal val="visible"/>
+                                      </p:to>
+                                    </p:set>
+                                  </p:childTnLst>
+                                </p:cTn>
+                              </p:par>
+                              <p:par>
+                                <p:cTn id="35" presetID="1" presetClass="entr" fill="hold" nodeType="withEffect">
+                                  <p:stCondLst>
+                                    <p:cond delay="0"/>
+                                  </p:stCondLst>
+                                  <p:childTnLst>
+                                    <p:set>
+                                      <p:cBhvr>
+                                        <p:cTn id="36" dur="1" fill="hold">
+                                          <p:stCondLst>
+                                            <p:cond delay="0"/>
+                                          </p:stCondLst>
+                                        </p:cTn>
+                                        <p:tgtEl>
+                                          <p:spTgt spid="22"/>
+                                        </p:tgtEl>
+                                        <p:attrNameLst>
+                                          <p:attrName>style.visibility</p:attrName>
+                                        </p:attrNameLst>
+                                      </p:cBhvr>
+                                      <p:to>
+                                        <p:strVal val="visible"/>
+                                      </p:to>
+                                    </p:set>
+                                  </p:childTnLst>
+                                </p:cTn>
+                              </p:par>
+                              <p:par>
+                                <p:cTn id="37" presetID="1" presetClass="entr" fill="hold" nodeType="withEffect">
+                                  <p:stCondLst>
+                                    <p:cond delay="0"/>
+                                  </p:stCondLst>
+                                  <p:childTnLst>
+                                    <p:set>
+                                      <p:cBhvr>
+                                        <p:cTn id="38" dur="0" fill="hold">
+                                          <p:stCondLst>
+                                            <p:cond delay="0"/>
+                                          </p:stCondLst>
+                                        </p:cTn>
+                                        <p:tgtEl>
+                                          <p:spTgt spid="26">
+                                            <p:txEl>
+                                              <p:pRg st="0" end="0"/>
                                             </p:txEl>
                                           </p:spTgt>
                                         </p:tgtEl>
@@ -5864,34 +6922,34 @@
                     </p:cTn>
                   </p:par>
                   <p:par>
-                    <p:cTn id="155" fill="hold">
+                    <p:cTn id="39" fill="hold">
                       <p:stCondLst>
                         <p:cond delay="indefinite"/>
                       </p:stCondLst>
                       <p:childTnLst>
                         <p:par>
-                          <p:cTn id="156" fill="hold">
+                          <p:cTn id="40" fill="hold">
                             <p:stCondLst>
                               <p:cond delay="0"/>
                             </p:stCondLst>
                             <p:childTnLst>
                               <p:par>
-                                <p:cTn id="157" presetID="1" presetClass="entr" fill="hold" nodeType="clickEffect">
+                                <p:cTn id="41" presetID="1" presetClass="entr" fill="hold" nodeType="clickEffect">
                                   <p:stCondLst>
                                     <p:cond delay="0"/>
                                   </p:stCondLst>
                                   <p:childTnLst>
                                     <p:set>
                                       <p:cBhvr>
-                                        <p:cTn id="158" dur="1" fill="hold">
+                                        <p:cTn id="42" dur="1" fill="hold">
                                           <p:stCondLst>
                                             <p:cond delay="0"/>
                                           </p:stCondLst>
                                         </p:cTn>
                                         <p:tgtEl>
-                                          <p:spTgt spid="76">
+                                          <p:spTgt spid="20">
                                             <p:txEl>
-                                              <p:pRg st="3" end="3"/>
+                                              <p:pRg st="6" end="6"/>
                                             </p:txEl>
                                           </p:spTgt>
                                         </p:tgtEl>
@@ -5937,7 +6995,7 @@
 </p:sld>
 </file>
 
-<file path=ppt/slides/slide17.xml><?xml version="1.0" encoding="utf-8"?>
+<file path=ppt/slides/slide20.xml><?xml version="1.0" encoding="utf-8"?>
 <p:sld xmlns:a="http://schemas.openxmlformats.org/drawingml/2006/main" xmlns:p="http://schemas.openxmlformats.org/presentationml/2006/main" xmlns:r="http://schemas.openxmlformats.org/officeDocument/2006/relationships" xmlns:p14="http://schemas.microsoft.com/office/powerpoint/2010/main" xmlns:p15="http://schemas.microsoft.com/office/powerpoint/2012/main" xmlns:mc="http://schemas.openxmlformats.org/markup-compatibility/2006">
   <p:cSld>
     <p:bg>
@@ -5973,7 +7031,7 @@
       </p:grpSpPr>
       <p:sp>
         <p:nvSpPr>
-          <p:cNvPr id="77" name="PlaceHolder 1"/>
+          <p:cNvPr id="82" name="PlaceHolder 1"/>
           <p:cNvSpPr>
             <a:spLocks noGrp="1"/>
           </p:cNvSpPr>
@@ -6024,9 +7082,127 @@
           </a:p>
         </p:txBody>
       </p:sp>
+      <p:pic>
+        <p:nvPicPr>
+          <p:cNvPr id="83" name=""/>
+          <p:cNvPicPr/>
+          <p:nvPr/>
+        </p:nvPicPr>
+        <p:blipFill>
+          <a:blip r:embed="rId1">
+            <a:alphaModFix amt="0"/>
+          </a:blip>
+          <a:stretch/>
+        </p:blipFill>
+        <p:spPr>
+          <a:xfrm>
+            <a:off x="2165400" y="1325880"/>
+            <a:ext cx="5744880" cy="3931560"/>
+          </a:xfrm>
+          <a:prstGeom prst="rect">
+            <a:avLst/>
+          </a:prstGeom>
+          <a:noFill/>
+          <a:ln w="0">
+            <a:noFill/>
+          </a:ln>
+        </p:spPr>
+      </p:pic>
+    </p:spTree>
+  </p:cSld>
+</p:sld>
+</file>
+
+<file path=ppt/slides/slide21.xml><?xml version="1.0" encoding="utf-8"?>
+<p:sld xmlns:a="http://schemas.openxmlformats.org/drawingml/2006/main" xmlns:p="http://schemas.openxmlformats.org/presentationml/2006/main" xmlns:r="http://schemas.openxmlformats.org/officeDocument/2006/relationships" xmlns:p14="http://schemas.microsoft.com/office/powerpoint/2010/main" xmlns:p15="http://schemas.microsoft.com/office/powerpoint/2012/main" xmlns:mc="http://schemas.openxmlformats.org/markup-compatibility/2006">
+  <p:cSld>
+    <p:bg>
+      <p:bgPr>
+        <a:gradFill rotWithShape="0">
+          <a:gsLst>
+            <a:gs pos="0">
+              <a:srgbClr val="282828"/>
+            </a:gs>
+            <a:gs pos="100000">
+              <a:srgbClr val="1D2021"/>
+            </a:gs>
+          </a:gsLst>
+          <a:path path="rect">
+            <a:fillToRect l="50000" t="50000" r="50000" b="50000"/>
+          </a:path>
+        </a:gradFill>
+      </p:bgPr>
+    </p:bg>
+    <p:spTree>
+      <p:nvGrpSpPr>
+        <p:cNvPr id="1" name=""/>
+        <p:cNvGrpSpPr/>
+        <p:nvPr/>
+      </p:nvGrpSpPr>
+      <p:grpSpPr>
+        <a:xfrm>
+          <a:off x="0" y="0"/>
+          <a:ext cx="0" cy="0"/>
+          <a:chOff x="0" y="0"/>
+          <a:chExt cx="0" cy="0"/>
+        </a:xfrm>
+      </p:grpSpPr>
       <p:sp>
         <p:nvSpPr>
-          <p:cNvPr id="78" name="PlaceHolder 2"/>
+          <p:cNvPr id="84" name="PlaceHolder 1"/>
+          <p:cNvSpPr>
+            <a:spLocks noGrp="1"/>
+          </p:cNvSpPr>
+          <p:nvPr>
+            <p:ph type="title"/>
+          </p:nvPr>
+        </p:nvSpPr>
+        <p:spPr>
+          <a:xfrm>
+            <a:off x="503640" y="225720"/>
+            <a:ext cx="9068760" cy="946440"/>
+          </a:xfrm>
+          <a:prstGeom prst="rect">
+            <a:avLst/>
+          </a:prstGeom>
+          <a:noFill/>
+          <a:ln w="0">
+            <a:noFill/>
+          </a:ln>
+        </p:spPr>
+        <p:txBody>
+          <a:bodyPr lIns="0" tIns="0" rIns="0" bIns="0" anchor="ctr">
+            <a:spAutoFit/>
+          </a:bodyPr>
+          <a:p>
+            <a:pPr indent="0" algn="ctr">
+              <a:buNone/>
+            </a:pPr>
+            <a:r>
+              <a:rPr lang="en-US" sz="4400" b="1" u="none" strike="noStrike">
+                <a:solidFill>
+                  <a:srgbClr val="FFFFFF"/>
+                </a:solidFill>
+                <a:effectLst/>
+                <a:uFillTx/>
+                <a:latin typeface="3270 Nerd Font"/>
+              </a:rPr>
+              <a:t>Was genau macht die CPU</a:t>
+            </a:r>
+            <a:endParaRPr lang="en-US" sz="4400" b="0" u="none" strike="noStrike">
+              <a:solidFill>
+                <a:srgbClr val="FFFFFF"/>
+              </a:solidFill>
+              <a:effectLst/>
+              <a:uFillTx/>
+              <a:latin typeface="Arial"/>
+            </a:endParaRPr>
+          </a:p>
+        </p:txBody>
+      </p:sp>
+      <p:sp>
+        <p:nvSpPr>
+          <p:cNvPr id="85" name="PlaceHolder 2"/>
           <p:cNvSpPr>
             <a:spLocks noGrp="1"/>
           </p:cNvSpPr>
@@ -6214,14 +7390,394 @@
       </p:sp>
     </p:spTree>
   </p:cSld>
+</p:sld>
+</file>
+
+<file path=ppt/slides/slide22.xml><?xml version="1.0" encoding="utf-8"?>
+<p:sld xmlns:a="http://schemas.openxmlformats.org/drawingml/2006/main" xmlns:p="http://schemas.openxmlformats.org/presentationml/2006/main" xmlns:r="http://schemas.openxmlformats.org/officeDocument/2006/relationships" xmlns:p14="http://schemas.microsoft.com/office/powerpoint/2010/main" xmlns:p15="http://schemas.microsoft.com/office/powerpoint/2012/main" xmlns:mc="http://schemas.openxmlformats.org/markup-compatibility/2006">
+  <p:cSld>
+    <p:bg>
+      <p:bgPr>
+        <a:gradFill rotWithShape="0">
+          <a:gsLst>
+            <a:gs pos="0">
+              <a:srgbClr val="282828"/>
+            </a:gs>
+            <a:gs pos="100000">
+              <a:srgbClr val="1D2021"/>
+            </a:gs>
+          </a:gsLst>
+          <a:path path="rect">
+            <a:fillToRect l="50000" t="50000" r="50000" b="50000"/>
+          </a:path>
+        </a:gradFill>
+      </p:bgPr>
+    </p:bg>
+    <p:spTree>
+      <p:nvGrpSpPr>
+        <p:cNvPr id="1" name=""/>
+        <p:cNvGrpSpPr/>
+        <p:nvPr/>
+      </p:nvGrpSpPr>
+      <p:grpSpPr>
+        <a:xfrm>
+          <a:off x="0" y="0"/>
+          <a:ext cx="0" cy="0"/>
+          <a:chOff x="0" y="0"/>
+          <a:chExt cx="0" cy="0"/>
+        </a:xfrm>
+      </p:grpSpPr>
+      <p:sp>
+        <p:nvSpPr>
+          <p:cNvPr id="86" name="PlaceHolder 1"/>
+          <p:cNvSpPr>
+            <a:spLocks noGrp="1"/>
+          </p:cNvSpPr>
+          <p:nvPr>
+            <p:ph type="title"/>
+          </p:nvPr>
+        </p:nvSpPr>
+        <p:spPr>
+          <a:xfrm>
+            <a:off x="503640" y="225720"/>
+            <a:ext cx="9068760" cy="946440"/>
+          </a:xfrm>
+          <a:prstGeom prst="rect">
+            <a:avLst/>
+          </a:prstGeom>
+          <a:noFill/>
+          <a:ln w="0">
+            <a:noFill/>
+          </a:ln>
+        </p:spPr>
+        <p:txBody>
+          <a:bodyPr lIns="0" tIns="0" rIns="0" bIns="0" anchor="ctr">
+            <a:spAutoFit/>
+          </a:bodyPr>
+          <a:p>
+            <a:pPr indent="0" algn="ctr">
+              <a:buNone/>
+            </a:pPr>
+            <a:r>
+              <a:rPr lang="en-US" sz="4400" b="1" u="none" strike="noStrike">
+                <a:solidFill>
+                  <a:srgbClr val="FFFFFF"/>
+                </a:solidFill>
+                <a:effectLst/>
+                <a:uFillTx/>
+                <a:latin typeface="3270 Nerd Font"/>
+              </a:rPr>
+              <a:t>Programmierung</a:t>
+            </a:r>
+            <a:endParaRPr lang="en-US" sz="4400" b="0" u="none" strike="noStrike">
+              <a:solidFill>
+                <a:srgbClr val="FFFFFF"/>
+              </a:solidFill>
+              <a:effectLst/>
+              <a:uFillTx/>
+              <a:latin typeface="Arial"/>
+            </a:endParaRPr>
+          </a:p>
+        </p:txBody>
+      </p:sp>
+      <p:sp>
+        <p:nvSpPr>
+          <p:cNvPr id="87" name="PlaceHolder 2"/>
+          <p:cNvSpPr>
+            <a:spLocks noGrp="1"/>
+          </p:cNvSpPr>
+          <p:nvPr>
+            <p:ph/>
+          </p:nvPr>
+        </p:nvSpPr>
+        <p:spPr>
+          <a:xfrm>
+            <a:off x="503640" y="1326240"/>
+            <a:ext cx="9068760" cy="3931560"/>
+          </a:xfrm>
+          <a:prstGeom prst="rect">
+            <a:avLst/>
+          </a:prstGeom>
+          <a:noFill/>
+          <a:ln w="0">
+            <a:noFill/>
+          </a:ln>
+        </p:spPr>
+        <p:txBody>
+          <a:bodyPr lIns="0" tIns="0" rIns="0" bIns="0" anchor="t">
+            <a:normAutofit/>
+          </a:bodyPr>
+          <a:p>
+            <a:pPr marL="432000" indent="-324000" algn="l">
+              <a:spcBef>
+                <a:spcPts val="1414"/>
+              </a:spcBef>
+              <a:buClr>
+                <a:srgbClr val="FFFFFF"/>
+              </a:buClr>
+              <a:buSzPct val="85000"/>
+              <a:buFont typeface="Wingdings" charset="2"/>
+              <a:buChar char=""/>
+            </a:pPr>
+            <a:r>
+              <a:rPr lang="en-US" sz="3200" b="0" u="none" strike="noStrike">
+                <a:solidFill>
+                  <a:srgbClr val="FFFFFF"/>
+                </a:solidFill>
+                <a:effectLst/>
+                <a:uFillTx/>
+                <a:latin typeface="3270 Nerd Font"/>
+              </a:rPr>
+              <a:t>MC werden in maschinennahen Programmiersprachen programmiert</a:t>
+            </a:r>
+            <a:endParaRPr lang="en-US" sz="3200" b="0" u="none" strike="noStrike">
+              <a:solidFill>
+                <a:srgbClr val="FFFFFF"/>
+              </a:solidFill>
+              <a:effectLst/>
+              <a:uFillTx/>
+              <a:latin typeface="Arial"/>
+            </a:endParaRPr>
+          </a:p>
+          <a:p>
+            <a:pPr marL="432000" indent="-324000" algn="l">
+              <a:spcBef>
+                <a:spcPts val="1414"/>
+              </a:spcBef>
+              <a:buClr>
+                <a:srgbClr val="FFFFFF"/>
+              </a:buClr>
+              <a:buSzPct val="85000"/>
+              <a:buFont typeface="Wingdings" charset="2"/>
+              <a:buChar char=""/>
+            </a:pPr>
+            <a:r>
+              <a:rPr lang="en-US" sz="3200" b="0" u="none" strike="noStrike">
+                <a:solidFill>
+                  <a:srgbClr val="FFFFFF"/>
+                </a:solidFill>
+                <a:effectLst/>
+                <a:uFillTx/>
+                <a:latin typeface="3270 Nerd Font"/>
+              </a:rPr>
+              <a:t>Direkter Zugriff auf den Speicher</a:t>
+            </a:r>
+            <a:endParaRPr lang="en-US" sz="3200" b="0" u="none" strike="noStrike">
+              <a:solidFill>
+                <a:srgbClr val="FFFFFF"/>
+              </a:solidFill>
+              <a:effectLst/>
+              <a:uFillTx/>
+              <a:latin typeface="Arial"/>
+            </a:endParaRPr>
+          </a:p>
+        </p:txBody>
+      </p:sp>
+      <p:pic>
+        <p:nvPicPr>
+          <p:cNvPr id="88" name=""/>
+          <p:cNvPicPr/>
+          <p:nvPr/>
+        </p:nvPicPr>
+        <p:blipFill>
+          <a:blip r:embed="rId1">
+            <a:alphaModFix amt="0"/>
+          </a:blip>
+          <a:stretch/>
+        </p:blipFill>
+        <p:spPr>
+          <a:xfrm>
+            <a:off x="854280" y="3139200"/>
+            <a:ext cx="1431720" cy="1890000"/>
+          </a:xfrm>
+          <a:prstGeom prst="rect">
+            <a:avLst/>
+          </a:prstGeom>
+          <a:noFill/>
+          <a:ln w="0">
+            <a:noFill/>
+          </a:ln>
+        </p:spPr>
+      </p:pic>
+      <p:pic>
+        <p:nvPicPr>
+          <p:cNvPr id="89" name=""/>
+          <p:cNvPicPr/>
+          <p:nvPr/>
+        </p:nvPicPr>
+        <p:blipFill>
+          <a:blip r:embed="rId2">
+            <a:alphaModFix amt="0"/>
+          </a:blip>
+          <a:stretch/>
+        </p:blipFill>
+        <p:spPr>
+          <a:xfrm>
+            <a:off x="2801880" y="3138120"/>
+            <a:ext cx="1902960" cy="1891080"/>
+          </a:xfrm>
+          <a:prstGeom prst="rect">
+            <a:avLst/>
+          </a:prstGeom>
+          <a:noFill/>
+          <a:ln w="0">
+            <a:noFill/>
+          </a:ln>
+        </p:spPr>
+      </p:pic>
+    </p:spTree>
+  </p:cSld>
   <p:timing>
     <p:tnLst>
       <p:par>
-        <p:cTn id="159" dur="indefinite" restart="never" nodeType="tmRoot">
+        <p:cTn id="147" dur="indefinite" restart="never" nodeType="tmRoot">
           <p:childTnLst>
             <p:seq>
-              <p:cTn id="160" dur="indefinite" nodeType="mainSeq">
+              <p:cTn id="148" dur="indefinite" nodeType="mainSeq">
                 <p:childTnLst>
+                  <p:par>
+                    <p:cTn id="149" fill="hold">
+                      <p:stCondLst>
+                        <p:cond delay="indefinite"/>
+                      </p:stCondLst>
+                      <p:childTnLst>
+                        <p:par>
+                          <p:cTn id="150" fill="hold">
+                            <p:stCondLst>
+                              <p:cond delay="0"/>
+                            </p:stCondLst>
+                            <p:childTnLst>
+                              <p:par>
+                                <p:cTn id="151" presetID="1" presetClass="entr" fill="hold" nodeType="clickEffect">
+                                  <p:stCondLst>
+                                    <p:cond delay="0"/>
+                                  </p:stCondLst>
+                                  <p:childTnLst>
+                                    <p:set>
+                                      <p:cBhvr>
+                                        <p:cTn id="152" dur="1" fill="hold">
+                                          <p:stCondLst>
+                                            <p:cond delay="0"/>
+                                          </p:stCondLst>
+                                        </p:cTn>
+                                        <p:tgtEl>
+                                          <p:spTgt spid="87">
+                                            <p:txEl>
+                                              <p:pRg st="0" end="0"/>
+                                            </p:txEl>
+                                          </p:spTgt>
+                                        </p:tgtEl>
+                                        <p:attrNameLst>
+                                          <p:attrName>style.visibility</p:attrName>
+                                        </p:attrNameLst>
+                                      </p:cBhvr>
+                                      <p:to>
+                                        <p:strVal val="visible"/>
+                                      </p:to>
+                                    </p:set>
+                                  </p:childTnLst>
+                                </p:cTn>
+                              </p:par>
+                            </p:childTnLst>
+                          </p:cTn>
+                        </p:par>
+                      </p:childTnLst>
+                    </p:cTn>
+                  </p:par>
+                  <p:par>
+                    <p:cTn id="153" fill="hold">
+                      <p:stCondLst>
+                        <p:cond delay="indefinite"/>
+                      </p:stCondLst>
+                      <p:childTnLst>
+                        <p:par>
+                          <p:cTn id="154" fill="hold">
+                            <p:stCondLst>
+                              <p:cond delay="0"/>
+                            </p:stCondLst>
+                            <p:childTnLst>
+                              <p:par>
+                                <p:cTn id="155" presetID="1" presetClass="entr" fill="hold" nodeType="clickEffect">
+                                  <p:stCondLst>
+                                    <p:cond delay="0"/>
+                                  </p:stCondLst>
+                                  <p:childTnLst>
+                                    <p:set>
+                                      <p:cBhvr>
+                                        <p:cTn id="156" dur="1" fill="hold">
+                                          <p:stCondLst>
+                                            <p:cond delay="0"/>
+                                          </p:stCondLst>
+                                        </p:cTn>
+                                        <p:tgtEl>
+                                          <p:spTgt spid="87">
+                                            <p:txEl>
+                                              <p:pRg st="1" end="1"/>
+                                            </p:txEl>
+                                          </p:spTgt>
+                                        </p:tgtEl>
+                                        <p:attrNameLst>
+                                          <p:attrName>style.visibility</p:attrName>
+                                        </p:attrNameLst>
+                                      </p:cBhvr>
+                                      <p:to>
+                                        <p:strVal val="visible"/>
+                                      </p:to>
+                                    </p:set>
+                                  </p:childTnLst>
+                                </p:cTn>
+                              </p:par>
+                            </p:childTnLst>
+                          </p:cTn>
+                        </p:par>
+                      </p:childTnLst>
+                    </p:cTn>
+                  </p:par>
+                  <p:par>
+                    <p:cTn id="157" fill="hold">
+                      <p:stCondLst>
+                        <p:cond delay="indefinite"/>
+                      </p:stCondLst>
+                      <p:childTnLst>
+                        <p:par>
+                          <p:cTn id="158" fill="hold">
+                            <p:stCondLst>
+                              <p:cond delay="0"/>
+                            </p:stCondLst>
+                            <p:childTnLst>
+                              <p:par>
+                                <p:cTn id="159" presetID="1" presetClass="entr" fill="hold" nodeType="clickEffect">
+                                  <p:stCondLst>
+                                    <p:cond delay="0"/>
+                                  </p:stCondLst>
+                                  <p:childTnLst>
+                                    <p:set>
+                                      <p:cBhvr>
+                                        <p:cTn id="160" dur="1" fill="hold">
+                                          <p:stCondLst>
+                                            <p:cond delay="0"/>
+                                          </p:stCondLst>
+                                        </p:cTn>
+                                        <p:tgtEl>
+                                          <p:spTgt spid="88"/>
+                                        </p:tgtEl>
+                                        <p:attrNameLst>
+                                          <p:attrName>style.visibility</p:attrName>
+                                        </p:attrNameLst>
+                                      </p:cBhvr>
+                                      <p:to>
+                                        <p:strVal val="visible"/>
+                                      </p:to>
+                                    </p:set>
+                                  </p:childTnLst>
+                                </p:cTn>
+                              </p:par>
+                            </p:childTnLst>
+                          </p:cTn>
+                        </p:par>
+                      </p:childTnLst>
+                    </p:cTn>
+                  </p:par>
                   <p:par>
                     <p:cTn id="161" fill="hold">
                       <p:stCondLst>
@@ -6248,158 +7804,7 @@
                                           </p:stCondLst>
                                         </p:cTn>
                                         <p:tgtEl>
-                                          <p:spTgt spid="78">
-                                            <p:txEl>
-                                              <p:pRg st="0" end="0"/>
-                                            </p:txEl>
-                                          </p:spTgt>
-                                        </p:tgtEl>
-                                        <p:attrNameLst>
-                                          <p:attrName>style.visibility</p:attrName>
-                                        </p:attrNameLst>
-                                      </p:cBhvr>
-                                      <p:to>
-                                        <p:strVal val="visible"/>
-                                      </p:to>
-                                    </p:set>
-                                  </p:childTnLst>
-                                </p:cTn>
-                              </p:par>
-                            </p:childTnLst>
-                          </p:cTn>
-                        </p:par>
-                      </p:childTnLst>
-                    </p:cTn>
-                  </p:par>
-                  <p:par>
-                    <p:cTn id="165" fill="hold">
-                      <p:stCondLst>
-                        <p:cond delay="indefinite"/>
-                      </p:stCondLst>
-                      <p:childTnLst>
-                        <p:par>
-                          <p:cTn id="166" fill="hold">
-                            <p:stCondLst>
-                              <p:cond delay="0"/>
-                            </p:stCondLst>
-                            <p:childTnLst>
-                              <p:par>
-                                <p:cTn id="167" presetID="1" presetClass="entr" fill="hold" nodeType="clickEffect">
-                                  <p:stCondLst>
-                                    <p:cond delay="0"/>
-                                  </p:stCondLst>
-                                  <p:childTnLst>
-                                    <p:set>
-                                      <p:cBhvr>
-                                        <p:cTn id="168" dur="1" fill="hold">
-                                          <p:stCondLst>
-                                            <p:cond delay="0"/>
-                                          </p:stCondLst>
-                                        </p:cTn>
-                                        <p:tgtEl>
-                                          <p:spTgt spid="78">
-                                            <p:txEl>
-                                              <p:pRg st="1" end="1"/>
-                                            </p:txEl>
-                                          </p:spTgt>
-                                        </p:tgtEl>
-                                        <p:attrNameLst>
-                                          <p:attrName>style.visibility</p:attrName>
-                                        </p:attrNameLst>
-                                      </p:cBhvr>
-                                      <p:to>
-                                        <p:strVal val="visible"/>
-                                      </p:to>
-                                    </p:set>
-                                  </p:childTnLst>
-                                </p:cTn>
-                              </p:par>
-                            </p:childTnLst>
-                          </p:cTn>
-                        </p:par>
-                      </p:childTnLst>
-                    </p:cTn>
-                  </p:par>
-                  <p:par>
-                    <p:cTn id="169" fill="hold">
-                      <p:stCondLst>
-                        <p:cond delay="indefinite"/>
-                      </p:stCondLst>
-                      <p:childTnLst>
-                        <p:par>
-                          <p:cTn id="170" fill="hold">
-                            <p:stCondLst>
-                              <p:cond delay="0"/>
-                            </p:stCondLst>
-                            <p:childTnLst>
-                              <p:par>
-                                <p:cTn id="171" presetID="1" presetClass="entr" fill="hold" nodeType="clickEffect">
-                                  <p:stCondLst>
-                                    <p:cond delay="0"/>
-                                  </p:stCondLst>
-                                  <p:childTnLst>
-                                    <p:set>
-                                      <p:cBhvr>
-                                        <p:cTn id="172" dur="1" fill="hold">
-                                          <p:stCondLst>
-                                            <p:cond delay="0"/>
-                                          </p:stCondLst>
-                                        </p:cTn>
-                                        <p:tgtEl>
-                                          <p:spTgt spid="78">
-                                            <p:txEl>
-                                              <p:pRg st="2" end="2"/>
-                                            </p:txEl>
-                                          </p:spTgt>
-                                        </p:tgtEl>
-                                        <p:attrNameLst>
-                                          <p:attrName>style.visibility</p:attrName>
-                                        </p:attrNameLst>
-                                      </p:cBhvr>
-                                      <p:to>
-                                        <p:strVal val="visible"/>
-                                      </p:to>
-                                    </p:set>
-                                  </p:childTnLst>
-                                </p:cTn>
-                              </p:par>
-                            </p:childTnLst>
-                          </p:cTn>
-                        </p:par>
-                      </p:childTnLst>
-                    </p:cTn>
-                  </p:par>
-                  <p:par>
-                    <p:cTn id="173" fill="hold">
-                      <p:stCondLst>
-                        <p:cond delay="indefinite"/>
-                      </p:stCondLst>
-                      <p:childTnLst>
-                        <p:par>
-                          <p:cTn id="174" fill="hold">
-                            <p:stCondLst>
-                              <p:cond delay="0"/>
-                            </p:stCondLst>
-                            <p:childTnLst>
-                              <p:par>
-                                <p:cTn id="175" presetID="1" presetClass="entr" fill="hold" nodeType="clickEffect">
-                                  <p:stCondLst>
-                                    <p:cond delay="0"/>
-                                  </p:stCondLst>
-                                  <p:childTnLst>
-                                    <p:set>
-                                      <p:cBhvr>
-                                        <p:cTn id="176" dur="1" fill="hold">
-                                          <p:stCondLst>
-                                            <p:cond delay="0"/>
-                                          </p:stCondLst>
-                                        </p:cTn>
-                                        <p:tgtEl>
-                                          <p:spTgt spid="78">
-                                            <p:txEl>
-                                              <p:pRg st="3" end="3"/>
-                                            </p:txEl>
-                                          </p:spTgt>
+                                          <p:spTgt spid="89"/>
                                         </p:tgtEl>
                                         <p:attrNameLst>
                                           <p:attrName>style.visibility</p:attrName>
@@ -6443,7 +7848,7 @@
 </p:sld>
 </file>
 
-<file path=ppt/slides/slide18.xml><?xml version="1.0" encoding="utf-8"?>
+<file path=ppt/slides/slide23.xml><?xml version="1.0" encoding="utf-8"?>
 <p:sld xmlns:a="http://schemas.openxmlformats.org/drawingml/2006/main" xmlns:p="http://schemas.openxmlformats.org/presentationml/2006/main" xmlns:r="http://schemas.openxmlformats.org/officeDocument/2006/relationships" xmlns:p14="http://schemas.microsoft.com/office/powerpoint/2010/main" xmlns:p15="http://schemas.microsoft.com/office/powerpoint/2012/main" xmlns:mc="http://schemas.openxmlformats.org/markup-compatibility/2006">
   <p:cSld>
     <p:bg>
@@ -6479,7 +7884,7 @@
       </p:grpSpPr>
       <p:sp>
         <p:nvSpPr>
-          <p:cNvPr id="79" name="PlaceHolder 1"/>
+          <p:cNvPr id="90" name="PlaceHolder 1"/>
           <p:cNvSpPr>
             <a:spLocks noGrp="1"/>
           </p:cNvSpPr>
@@ -6532,7 +7937,7 @@
       </p:sp>
       <p:sp>
         <p:nvSpPr>
-          <p:cNvPr id="80" name="PlaceHolder 2"/>
+          <p:cNvPr id="91" name="PlaceHolder 2"/>
           <p:cNvSpPr>
             <a:spLocks noGrp="1"/>
           </p:cNvSpPr>
@@ -6578,39 +7983,7 @@
                 <a:uFillTx/>
                 <a:latin typeface="3270 Nerd Font"/>
               </a:rPr>
-              <a:t>MC werden in maschinennahen Programmiersprachen programmiert</a:t>
-            </a:r>
-            <a:endParaRPr lang="en-US" sz="3200" b="0" u="none" strike="noStrike">
-              <a:solidFill>
-                <a:srgbClr val="FFFFFF"/>
-              </a:solidFill>
-              <a:effectLst/>
-              <a:uFillTx/>
-              <a:latin typeface="Arial"/>
-            </a:endParaRPr>
-          </a:p>
-          <a:p>
-            <a:pPr marL="432000" indent="-324000" algn="l">
-              <a:spcBef>
-                <a:spcPts val="1414"/>
-              </a:spcBef>
-              <a:buClr>
-                <a:srgbClr val="FFFFFF"/>
-              </a:buClr>
-              <a:buSzPct val="85000"/>
-              <a:buFont typeface="Wingdings" charset="2"/>
-              <a:buChar char=""/>
-            </a:pPr>
-            <a:r>
-              <a:rPr lang="en-US" sz="3200" b="0" u="none" strike="noStrike">
-                <a:solidFill>
-                  <a:srgbClr val="FFFFFF"/>
-                </a:solidFill>
-                <a:effectLst/>
-                <a:uFillTx/>
-                <a:latin typeface="3270 Nerd Font"/>
-              </a:rPr>
-              <a:t>Direkter Zugriff auf den Speicher</a:t>
+              <a:t>Angepasst an spezifische Entwicklungsboards</a:t>
             </a:r>
             <a:endParaRPr lang="en-US" sz="3200" b="0" u="none" strike="noStrike">
               <a:solidFill>
@@ -6625,7 +7998,7 @@
       </p:sp>
       <p:pic>
         <p:nvPicPr>
-          <p:cNvPr id="81" name=""/>
+          <p:cNvPr id="92" name=""/>
           <p:cNvPicPr/>
           <p:nvPr/>
         </p:nvPicPr>
@@ -6637,8 +8010,8 @@
         </p:blipFill>
         <p:spPr>
           <a:xfrm>
-            <a:off x="854280" y="3139200"/>
-            <a:ext cx="1431720" cy="1890000"/>
+            <a:off x="503640" y="3383640"/>
+            <a:ext cx="1874160" cy="1874160"/>
           </a:xfrm>
           <a:prstGeom prst="rect">
             <a:avLst/>
@@ -6651,7 +8024,7 @@
       </p:pic>
       <p:pic>
         <p:nvPicPr>
-          <p:cNvPr id="82" name=""/>
+          <p:cNvPr id="93" name=""/>
           <p:cNvPicPr/>
           <p:nvPr/>
         </p:nvPicPr>
@@ -6663,8 +8036,8 @@
         </p:blipFill>
         <p:spPr>
           <a:xfrm>
-            <a:off x="2801880" y="3138120"/>
-            <a:ext cx="1902960" cy="1891080"/>
+            <a:off x="2801880" y="3200400"/>
+            <a:ext cx="2057400" cy="2057400"/>
           </a:xfrm>
           <a:prstGeom prst="rect">
             <a:avLst/>
@@ -6677,228 +8050,10 @@
       </p:pic>
     </p:spTree>
   </p:cSld>
-  <p:timing>
-    <p:tnLst>
-      <p:par>
-        <p:cTn id="177" dur="indefinite" restart="never" nodeType="tmRoot">
-          <p:childTnLst>
-            <p:seq>
-              <p:cTn id="178" dur="indefinite" nodeType="mainSeq">
-                <p:childTnLst>
-                  <p:par>
-                    <p:cTn id="179" fill="hold">
-                      <p:stCondLst>
-                        <p:cond delay="indefinite"/>
-                      </p:stCondLst>
-                      <p:childTnLst>
-                        <p:par>
-                          <p:cTn id="180" fill="hold">
-                            <p:stCondLst>
-                              <p:cond delay="0"/>
-                            </p:stCondLst>
-                            <p:childTnLst>
-                              <p:par>
-                                <p:cTn id="181" presetID="1" presetClass="entr" fill="hold" nodeType="clickEffect">
-                                  <p:stCondLst>
-                                    <p:cond delay="0"/>
-                                  </p:stCondLst>
-                                  <p:childTnLst>
-                                    <p:set>
-                                      <p:cBhvr>
-                                        <p:cTn id="182" dur="1" fill="hold">
-                                          <p:stCondLst>
-                                            <p:cond delay="0"/>
-                                          </p:stCondLst>
-                                        </p:cTn>
-                                        <p:tgtEl>
-                                          <p:spTgt spid="80">
-                                            <p:txEl>
-                                              <p:pRg st="0" end="0"/>
-                                            </p:txEl>
-                                          </p:spTgt>
-                                        </p:tgtEl>
-                                        <p:attrNameLst>
-                                          <p:attrName>style.visibility</p:attrName>
-                                        </p:attrNameLst>
-                                      </p:cBhvr>
-                                      <p:to>
-                                        <p:strVal val="visible"/>
-                                      </p:to>
-                                    </p:set>
-                                  </p:childTnLst>
-                                </p:cTn>
-                              </p:par>
-                            </p:childTnLst>
-                          </p:cTn>
-                        </p:par>
-                      </p:childTnLst>
-                    </p:cTn>
-                  </p:par>
-                  <p:par>
-                    <p:cTn id="183" fill="hold">
-                      <p:stCondLst>
-                        <p:cond delay="indefinite"/>
-                      </p:stCondLst>
-                      <p:childTnLst>
-                        <p:par>
-                          <p:cTn id="184" fill="hold">
-                            <p:stCondLst>
-                              <p:cond delay="0"/>
-                            </p:stCondLst>
-                            <p:childTnLst>
-                              <p:par>
-                                <p:cTn id="185" presetID="1" presetClass="entr" fill="hold" nodeType="clickEffect">
-                                  <p:stCondLst>
-                                    <p:cond delay="0"/>
-                                  </p:stCondLst>
-                                  <p:childTnLst>
-                                    <p:set>
-                                      <p:cBhvr>
-                                        <p:cTn id="186" dur="1" fill="hold">
-                                          <p:stCondLst>
-                                            <p:cond delay="0"/>
-                                          </p:stCondLst>
-                                        </p:cTn>
-                                        <p:tgtEl>
-                                          <p:spTgt spid="80">
-                                            <p:txEl>
-                                              <p:pRg st="1" end="1"/>
-                                            </p:txEl>
-                                          </p:spTgt>
-                                        </p:tgtEl>
-                                        <p:attrNameLst>
-                                          <p:attrName>style.visibility</p:attrName>
-                                        </p:attrNameLst>
-                                      </p:cBhvr>
-                                      <p:to>
-                                        <p:strVal val="visible"/>
-                                      </p:to>
-                                    </p:set>
-                                  </p:childTnLst>
-                                </p:cTn>
-                              </p:par>
-                            </p:childTnLst>
-                          </p:cTn>
-                        </p:par>
-                      </p:childTnLst>
-                    </p:cTn>
-                  </p:par>
-                  <p:par>
-                    <p:cTn id="187" fill="hold">
-                      <p:stCondLst>
-                        <p:cond delay="indefinite"/>
-                      </p:stCondLst>
-                      <p:childTnLst>
-                        <p:par>
-                          <p:cTn id="188" fill="hold">
-                            <p:stCondLst>
-                              <p:cond delay="0"/>
-                            </p:stCondLst>
-                            <p:childTnLst>
-                              <p:par>
-                                <p:cTn id="189" presetID="1" presetClass="entr" fill="hold" nodeType="clickEffect">
-                                  <p:stCondLst>
-                                    <p:cond delay="0"/>
-                                  </p:stCondLst>
-                                  <p:childTnLst>
-                                    <p:set>
-                                      <p:cBhvr>
-                                        <p:cTn id="190" dur="1" fill="hold">
-                                          <p:stCondLst>
-                                            <p:cond delay="0"/>
-                                          </p:stCondLst>
-                                        </p:cTn>
-                                        <p:tgtEl>
-                                          <p:spTgt spid="81"/>
-                                        </p:tgtEl>
-                                        <p:attrNameLst>
-                                          <p:attrName>style.visibility</p:attrName>
-                                        </p:attrNameLst>
-                                      </p:cBhvr>
-                                      <p:to>
-                                        <p:strVal val="visible"/>
-                                      </p:to>
-                                    </p:set>
-                                  </p:childTnLst>
-                                </p:cTn>
-                              </p:par>
-                            </p:childTnLst>
-                          </p:cTn>
-                        </p:par>
-                      </p:childTnLst>
-                    </p:cTn>
-                  </p:par>
-                  <p:par>
-                    <p:cTn id="191" fill="hold">
-                      <p:stCondLst>
-                        <p:cond delay="indefinite"/>
-                      </p:stCondLst>
-                      <p:childTnLst>
-                        <p:par>
-                          <p:cTn id="192" fill="hold">
-                            <p:stCondLst>
-                              <p:cond delay="0"/>
-                            </p:stCondLst>
-                            <p:childTnLst>
-                              <p:par>
-                                <p:cTn id="193" presetID="1" presetClass="entr" fill="hold" nodeType="clickEffect">
-                                  <p:stCondLst>
-                                    <p:cond delay="0"/>
-                                  </p:stCondLst>
-                                  <p:childTnLst>
-                                    <p:set>
-                                      <p:cBhvr>
-                                        <p:cTn id="194" dur="1" fill="hold">
-                                          <p:stCondLst>
-                                            <p:cond delay="0"/>
-                                          </p:stCondLst>
-                                        </p:cTn>
-                                        <p:tgtEl>
-                                          <p:spTgt spid="82"/>
-                                        </p:tgtEl>
-                                        <p:attrNameLst>
-                                          <p:attrName>style.visibility</p:attrName>
-                                        </p:attrNameLst>
-                                      </p:cBhvr>
-                                      <p:to>
-                                        <p:strVal val="visible"/>
-                                      </p:to>
-                                    </p:set>
-                                  </p:childTnLst>
-                                </p:cTn>
-                              </p:par>
-                            </p:childTnLst>
-                          </p:cTn>
-                        </p:par>
-                      </p:childTnLst>
-                    </p:cTn>
-                  </p:par>
-                </p:childTnLst>
-              </p:cTn>
-              <p:prevCondLst>
-                <p:cond evt="onPrev">
-                  <p:tgtEl>
-                    <p:sldTgt/>
-                  </p:tgtEl>
-                </p:cond>
-              </p:prevCondLst>
-              <p:nextCondLst>
-                <p:cond evt="onNext">
-                  <p:tgtEl>
-                    <p:sldTgt/>
-                  </p:tgtEl>
-                </p:cond>
-              </p:nextCondLst>
-            </p:seq>
-          </p:childTnLst>
-        </p:cTn>
-      </p:par>
-    </p:tnLst>
-  </p:timing>
 </p:sld>
 </file>
 
-<file path=ppt/slides/slide19.xml><?xml version="1.0" encoding="utf-8"?>
+<file path=ppt/slides/slide24.xml><?xml version="1.0" encoding="utf-8"?>
 <p:sld xmlns:a="http://schemas.openxmlformats.org/drawingml/2006/main" xmlns:p="http://schemas.openxmlformats.org/presentationml/2006/main" xmlns:r="http://schemas.openxmlformats.org/officeDocument/2006/relationships" xmlns:p14="http://schemas.microsoft.com/office/powerpoint/2010/main" xmlns:p15="http://schemas.microsoft.com/office/powerpoint/2012/main" xmlns:mc="http://schemas.openxmlformats.org/markup-compatibility/2006">
   <p:cSld>
     <p:bg>
@@ -6934,7 +8089,7 @@
       </p:grpSpPr>
       <p:sp>
         <p:nvSpPr>
-          <p:cNvPr id="83" name="PlaceHolder 1"/>
+          <p:cNvPr id="94" name="PlaceHolder 1"/>
           <p:cNvSpPr>
             <a:spLocks noGrp="1"/>
           </p:cNvSpPr>
@@ -6987,7 +8142,7 @@
       </p:sp>
       <p:sp>
         <p:nvSpPr>
-          <p:cNvPr id="84" name="PlaceHolder 2"/>
+          <p:cNvPr id="95" name="PlaceHolder 2"/>
           <p:cNvSpPr>
             <a:spLocks noGrp="1"/>
           </p:cNvSpPr>
@@ -7051,38 +8206,38 @@
   <p:timing>
     <p:tnLst>
       <p:par>
-        <p:cTn id="195" dur="indefinite" restart="never" nodeType="tmRoot">
+        <p:cTn id="165" dur="indefinite" restart="never" nodeType="tmRoot">
           <p:childTnLst>
             <p:seq>
-              <p:cTn id="196" dur="indefinite" nodeType="mainSeq">
+              <p:cTn id="166" dur="indefinite" nodeType="mainSeq">
                 <p:childTnLst>
                   <p:par>
-                    <p:cTn id="197" fill="hold">
+                    <p:cTn id="167" fill="hold">
                       <p:stCondLst>
                         <p:cond delay="indefinite"/>
                       </p:stCondLst>
                       <p:childTnLst>
                         <p:par>
-                          <p:cTn id="198" fill="hold">
+                          <p:cTn id="168" fill="hold">
                             <p:stCondLst>
                               <p:cond delay="0"/>
                             </p:stCondLst>
                             <p:childTnLst>
                               <p:par>
-                                <p:cTn id="199" presetID="1" presetClass="entr" fill="hold" nodeType="clickEffect">
+                                <p:cTn id="169" presetID="1" presetClass="entr" fill="hold" nodeType="clickEffect">
                                   <p:stCondLst>
                                     <p:cond delay="0"/>
                                   </p:stCondLst>
                                   <p:childTnLst>
                                     <p:set>
                                       <p:cBhvr>
-                                        <p:cTn id="200" dur="1" fill="hold">
+                                        <p:cTn id="170" dur="1" fill="hold">
                                           <p:stCondLst>
                                             <p:cond delay="0"/>
                                           </p:stCondLst>
                                         </p:cTn>
                                         <p:tgtEl>
-                                          <p:spTgt spid="84">
+                                          <p:spTgt spid="95">
                                             <p:txEl>
                                               <p:pRg st="0" end="0"/>
                                             </p:txEl>
@@ -7130,7 +8285,7 @@
 </p:sld>
 </file>
 
-<file path=ppt/slides/slide2.xml><?xml version="1.0" encoding="utf-8"?>
+<file path=ppt/slides/slide25.xml><?xml version="1.0" encoding="utf-8"?>
 <p:sld xmlns:a="http://schemas.openxmlformats.org/drawingml/2006/main" xmlns:p="http://schemas.openxmlformats.org/presentationml/2006/main" xmlns:r="http://schemas.openxmlformats.org/officeDocument/2006/relationships" xmlns:p14="http://schemas.microsoft.com/office/powerpoint/2010/main" xmlns:p15="http://schemas.microsoft.com/office/powerpoint/2012/main" xmlns:mc="http://schemas.openxmlformats.org/markup-compatibility/2006">
   <p:cSld>
     <p:bg>
@@ -7166,99 +8321,7 @@
       </p:grpSpPr>
       <p:sp>
         <p:nvSpPr>
-          <p:cNvPr id="17" name="PlaceHolder 1"/>
-          <p:cNvSpPr>
-            <a:spLocks noGrp="1"/>
-          </p:cNvSpPr>
-          <p:nvPr>
-            <p:ph type="title"/>
-          </p:nvPr>
-        </p:nvSpPr>
-        <p:spPr>
-          <a:xfrm>
-            <a:off x="457200" y="1976760"/>
-            <a:ext cx="9068760" cy="1108440"/>
-          </a:xfrm>
-          <a:prstGeom prst="rect">
-            <a:avLst/>
-          </a:prstGeom>
-          <a:noFill/>
-          <a:ln w="0">
-            <a:noFill/>
-          </a:ln>
-        </p:spPr>
-        <p:txBody>
-          <a:bodyPr lIns="0" tIns="0" rIns="0" bIns="0" anchor="ctr">
-            <a:spAutoFit/>
-          </a:bodyPr>
-          <a:p>
-            <a:pPr indent="0" algn="ctr">
-              <a:buNone/>
-            </a:pPr>
-            <a:r>
-              <a:rPr lang="en-US" sz="8000" b="1" u="none" strike="noStrike">
-                <a:solidFill>
-                  <a:srgbClr val="FFFFFF"/>
-                </a:solidFill>
-                <a:effectLst/>
-                <a:uFillTx/>
-                <a:latin typeface="3270 Nerd Font"/>
-              </a:rPr>
-              <a:t>Mikrocontroller</a:t>
-            </a:r>
-            <a:endParaRPr lang="en-US" sz="8000" b="0" u="none" strike="noStrike">
-              <a:solidFill>
-                <a:srgbClr val="FFFFFF"/>
-              </a:solidFill>
-              <a:effectLst/>
-              <a:uFillTx/>
-              <a:latin typeface="Arial"/>
-            </a:endParaRPr>
-          </a:p>
-        </p:txBody>
-      </p:sp>
-    </p:spTree>
-  </p:cSld>
-</p:sld>
-</file>
-
-<file path=ppt/slides/slide20.xml><?xml version="1.0" encoding="utf-8"?>
-<p:sld xmlns:a="http://schemas.openxmlformats.org/drawingml/2006/main" xmlns:p="http://schemas.openxmlformats.org/presentationml/2006/main" xmlns:r="http://schemas.openxmlformats.org/officeDocument/2006/relationships" xmlns:p14="http://schemas.microsoft.com/office/powerpoint/2010/main" xmlns:p15="http://schemas.microsoft.com/office/powerpoint/2012/main" xmlns:mc="http://schemas.openxmlformats.org/markup-compatibility/2006">
-  <p:cSld>
-    <p:bg>
-      <p:bgPr>
-        <a:gradFill rotWithShape="0">
-          <a:gsLst>
-            <a:gs pos="0">
-              <a:srgbClr val="282828"/>
-            </a:gs>
-            <a:gs pos="100000">
-              <a:srgbClr val="1D2021"/>
-            </a:gs>
-          </a:gsLst>
-          <a:path path="rect">
-            <a:fillToRect l="50000" t="50000" r="50000" b="50000"/>
-          </a:path>
-        </a:gradFill>
-      </p:bgPr>
-    </p:bg>
-    <p:spTree>
-      <p:nvGrpSpPr>
-        <p:cNvPr id="1" name=""/>
-        <p:cNvGrpSpPr/>
-        <p:nvPr/>
-      </p:nvGrpSpPr>
-      <p:grpSpPr>
-        <a:xfrm>
-          <a:off x="0" y="0"/>
-          <a:ext cx="0" cy="0"/>
-          <a:chOff x="0" y="0"/>
-          <a:chExt cx="0" cy="0"/>
-        </a:xfrm>
-      </p:grpSpPr>
-      <p:sp>
-        <p:nvSpPr>
-          <p:cNvPr id="85" name="PlaceHolder 1"/>
+          <p:cNvPr id="96" name="PlaceHolder 1"/>
           <p:cNvSpPr>
             <a:spLocks noGrp="1"/>
           </p:cNvSpPr>
@@ -7311,7 +8374,7 @@
       </p:sp>
       <p:sp>
         <p:nvSpPr>
-          <p:cNvPr id="86" name="PlaceHolder 2"/>
+          <p:cNvPr id="97" name="PlaceHolder 2"/>
           <p:cNvSpPr>
             <a:spLocks noGrp="1"/>
           </p:cNvSpPr>
@@ -7722,7 +8785,7 @@
 </p:sld>
 </file>
 
-<file path=ppt/slides/slide21.xml><?xml version="1.0" encoding="utf-8"?>
+<file path=ppt/slides/slide26.xml><?xml version="1.0" encoding="utf-8"?>
 <p:sld xmlns:a="http://schemas.openxmlformats.org/drawingml/2006/main" xmlns:p="http://schemas.openxmlformats.org/presentationml/2006/main" xmlns:r="http://schemas.openxmlformats.org/officeDocument/2006/relationships" xmlns:p14="http://schemas.microsoft.com/office/powerpoint/2010/main" xmlns:p15="http://schemas.microsoft.com/office/powerpoint/2012/main" xmlns:mc="http://schemas.openxmlformats.org/markup-compatibility/2006">
   <p:cSld>
     <p:bg>
@@ -7749,7 +8812,7 @@
       </p:grpSpPr>
       <p:sp>
         <p:nvSpPr>
-          <p:cNvPr id="87" name="PlaceHolder 1"/>
+          <p:cNvPr id="98" name="PlaceHolder 1"/>
           <p:cNvSpPr>
             <a:spLocks noGrp="1"/>
           </p:cNvSpPr>
@@ -7841,7 +8904,7 @@
       </p:grpSpPr>
       <p:sp>
         <p:nvSpPr>
-          <p:cNvPr id="18" name="PlaceHolder 1"/>
+          <p:cNvPr id="27" name="PlaceHolder 1"/>
           <p:cNvSpPr>
             <a:spLocks noGrp="1"/>
           </p:cNvSpPr>
@@ -7851,7 +8914,7 @@
         </p:nvSpPr>
         <p:spPr>
           <a:xfrm>
-            <a:off x="503640" y="225720"/>
+            <a:off x="496440" y="225720"/>
             <a:ext cx="9068760" cy="946440"/>
           </a:xfrm>
           <a:prstGeom prst="rect">
@@ -7873,13 +8936,15 @@
             <a:r>
               <a:rPr lang="en-US" sz="4400" b="1" u="none" strike="noStrike">
                 <a:solidFill>
-                  <a:srgbClr val="FFFFFF"/>
+                  <a:schemeClr val="lt1">
+                    <a:lumOff val="0"/>
+                  </a:schemeClr>
                 </a:solidFill>
                 <a:effectLst/>
                 <a:uFillTx/>
                 <a:latin typeface="3270 Nerd Font"/>
               </a:rPr>
-              <a:t>Der erste Mikrocontroller</a:t>
+              <a:t>Was ist ein Mikrocontroller?</a:t>
             </a:r>
             <a:endParaRPr lang="en-US" sz="4400" b="0" u="none" strike="noStrike">
               <a:solidFill>
@@ -7894,7 +8959,7 @@
       </p:sp>
       <p:sp>
         <p:nvSpPr>
-          <p:cNvPr id="19" name="PlaceHolder 2"/>
+          <p:cNvPr id="28" name="PlaceHolder 2"/>
           <p:cNvSpPr>
             <a:spLocks noGrp="1"/>
           </p:cNvSpPr>
@@ -7904,8 +8969,8 @@
         </p:nvSpPr>
         <p:spPr>
           <a:xfrm>
-            <a:off x="503640" y="1172160"/>
-            <a:ext cx="9068760" cy="1416960"/>
+            <a:off x="503640" y="1326240"/>
+            <a:ext cx="5668560" cy="3931560"/>
           </a:xfrm>
           <a:prstGeom prst="rect">
             <a:avLst/>
@@ -7920,11 +8985,16 @@
             <a:normAutofit/>
           </a:bodyPr>
           <a:p>
-            <a:pPr indent="0" algn="l">
+            <a:pPr marL="432000" indent="-324000" algn="l">
               <a:spcBef>
                 <a:spcPts val="1414"/>
               </a:spcBef>
-              <a:buNone/>
+              <a:buClr>
+                <a:srgbClr val="FFFFFF"/>
+              </a:buClr>
+              <a:buSzPct val="85000"/>
+              <a:buFont typeface="Wingdings" charset="2"/>
+              <a:buChar char=""/>
             </a:pPr>
             <a:r>
               <a:rPr lang="en-US" sz="3200" b="0" u="none" strike="noStrike">
@@ -7935,7 +9005,82 @@
                 <a:uFillTx/>
                 <a:latin typeface="3270 Nerd Font"/>
               </a:rPr>
-              <a:t>Der TMS 1802 NC kam danach als Teil der TMS1000 Serie 1974 auf den Markt  </a:t>
+              <a:t>Kleiner Computer</a:t>
+            </a:r>
+            <a:endParaRPr lang="en-US" sz="3200" b="0" u="none" strike="noStrike">
+              <a:solidFill>
+                <a:srgbClr val="FFFFFF"/>
+              </a:solidFill>
+              <a:effectLst/>
+              <a:uFillTx/>
+              <a:latin typeface="Arial"/>
+            </a:endParaRPr>
+          </a:p>
+          <a:p>
+            <a:pPr marL="432000" indent="-324000" algn="l">
+              <a:spcBef>
+                <a:spcPts val="1414"/>
+              </a:spcBef>
+              <a:buClr>
+                <a:srgbClr val="FFFFFF"/>
+              </a:buClr>
+              <a:buSzPct val="85000"/>
+              <a:buFont typeface="Wingdings" charset="2"/>
+              <a:buChar char=""/>
+            </a:pPr>
+            <a:r>
+              <a:rPr lang="en-US" sz="3200" b="1" u="none" strike="noStrike">
+                <a:solidFill>
+                  <a:srgbClr val="FFFFFF"/>
+                </a:solidFill>
+                <a:effectLst/>
+                <a:uFillTx/>
+                <a:latin typeface="3270 Nerd Font"/>
+              </a:rPr>
+              <a:t>CPU, Arbeitsspeicher und Peripherie auf einem Chip</a:t>
+            </a:r>
+            <a:endParaRPr lang="en-US" sz="3200" b="0" u="none" strike="noStrike">
+              <a:solidFill>
+                <a:srgbClr val="FFFFFF"/>
+              </a:solidFill>
+              <a:effectLst/>
+              <a:uFillTx/>
+              <a:latin typeface="Arial"/>
+            </a:endParaRPr>
+          </a:p>
+          <a:p>
+            <a:pPr marL="432000" indent="-324000" algn="l">
+              <a:spcBef>
+                <a:spcPts val="1414"/>
+              </a:spcBef>
+              <a:buClr>
+                <a:srgbClr val="FFFFFF"/>
+              </a:buClr>
+              <a:buSzPct val="85000"/>
+              <a:buFont typeface="Wingdings" charset="2"/>
+              <a:buChar char=""/>
+            </a:pPr>
+            <a:r>
+              <a:rPr lang="en-US" sz="3200" b="0" u="none" strike="noStrike">
+                <a:solidFill>
+                  <a:srgbClr val="FFFFFF"/>
+                </a:solidFill>
+                <a:effectLst/>
+                <a:uFillTx/>
+                <a:latin typeface="3270 Nerd Font"/>
+              </a:rPr>
+              <a:t>Heute häufig noch andere Funktionen</a:t>
+            </a:r>
+            <a:r>
+              <a:rPr lang="en-US" sz="3200" b="0" u="none" strike="noStrike">
+                <a:solidFill>
+                  <a:srgbClr val="FFFFFF"/>
+                </a:solidFill>
+                <a:effectLst/>
+                <a:uFillTx/>
+                <a:latin typeface="3270 Nerd Font"/>
+              </a:rPr>
+              <a:t> </a:t>
             </a:r>
             <a:endParaRPr lang="en-US" sz="3200" b="0" u="none" strike="noStrike">
               <a:solidFill>
@@ -7950,20 +9095,20 @@
       </p:sp>
       <p:pic>
         <p:nvPicPr>
-          <p:cNvPr id="20" name=""/>
+          <p:cNvPr id="29" name=""/>
           <p:cNvPicPr/>
           <p:nvPr/>
         </p:nvPicPr>
         <p:blipFill>
           <a:blip r:embed="rId1">
-            <a:alphaModFix amt="0"/>
+            <a:alphaModFix amt="68000"/>
           </a:blip>
           <a:stretch/>
         </p:blipFill>
         <p:spPr>
-          <a:xfrm rot="5403000">
-            <a:off x="1651680" y="1357560"/>
-            <a:ext cx="2717280" cy="5495040"/>
+          <a:xfrm>
+            <a:off x="7507800" y="2971800"/>
+            <a:ext cx="2057400" cy="2057400"/>
           </a:xfrm>
           <a:prstGeom prst="rect">
             <a:avLst/>
@@ -7976,20 +9121,20 @@
       </p:pic>
       <p:pic>
         <p:nvPicPr>
-          <p:cNvPr id="21" name=""/>
+          <p:cNvPr id="30" name=""/>
           <p:cNvPicPr/>
           <p:nvPr/>
         </p:nvPicPr>
         <p:blipFill>
           <a:blip r:embed="rId2">
-            <a:alphaModFix amt="0"/>
+            <a:alphaModFix amt="68000"/>
           </a:blip>
           <a:stretch/>
         </p:blipFill>
         <p:spPr>
           <a:xfrm>
-            <a:off x="6172200" y="2665800"/>
-            <a:ext cx="3663360" cy="2820600"/>
+            <a:off x="6629400" y="1143000"/>
+            <a:ext cx="2935800" cy="1955160"/>
           </a:xfrm>
           <a:prstGeom prst="rect">
             <a:avLst/>
@@ -8002,13 +9147,13 @@
       </p:pic>
       <p:sp>
         <p:nvSpPr>
-          <p:cNvPr id="22" name=""/>
+          <p:cNvPr id="31" name=""/>
           <p:cNvSpPr txBox="1"/>
           <p:nvPr/>
         </p:nvSpPr>
         <p:spPr>
           <a:xfrm>
-            <a:off x="9423000" y="5257800"/>
+            <a:off x="9369360" y="5257800"/>
             <a:ext cx="653760" cy="401400"/>
           </a:xfrm>
           <a:prstGeom prst="rect">
@@ -8033,7 +9178,7 @@
                 <a:uFillTx/>
                 <a:latin typeface="Arial"/>
               </a:rPr>
-              <a:t>[9,8]</a:t>
+              <a:t>[4,5]</a:t>
             </a:r>
             <a:endParaRPr lang="en-US" sz="1800" b="0" u="none" strike="noStrike">
               <a:solidFill>
@@ -8051,38 +9196,243 @@
   <p:timing>
     <p:tnLst>
       <p:par>
-        <p:cTn id="1" dur="indefinite" restart="never" nodeType="tmRoot">
+        <p:cTn id="43" dur="indefinite" restart="never" nodeType="tmRoot">
           <p:childTnLst>
             <p:seq>
-              <p:cTn id="2" dur="indefinite" nodeType="mainSeq">
+              <p:cTn id="44" dur="indefinite" nodeType="mainSeq">
                 <p:childTnLst>
                   <p:par>
-                    <p:cTn id="3" fill="hold">
+                    <p:cTn id="45" fill="hold">
                       <p:stCondLst>
                         <p:cond delay="indefinite"/>
                       </p:stCondLst>
                       <p:childTnLst>
                         <p:par>
-                          <p:cTn id="4" fill="hold">
+                          <p:cTn id="46" fill="hold">
                             <p:stCondLst>
                               <p:cond delay="0"/>
                             </p:stCondLst>
                             <p:childTnLst>
                               <p:par>
-                                <p:cTn id="5" presetID="1" presetClass="entr" fill="hold" nodeType="clickEffect">
+                                <p:cTn id="47" presetID="1" presetClass="entr" fill="hold" nodeType="clickEffect">
                                   <p:stCondLst>
                                     <p:cond delay="0"/>
                                   </p:stCondLst>
                                   <p:childTnLst>
                                     <p:set>
                                       <p:cBhvr>
-                                        <p:cTn id="6" dur="1" fill="hold">
+                                        <p:cTn id="48" dur="1" fill="hold">
                                           <p:stCondLst>
                                             <p:cond delay="0"/>
                                           </p:stCondLst>
                                         </p:cTn>
                                         <p:tgtEl>
-                                          <p:spTgt spid="21"/>
+                                          <p:spTgt spid="28">
+                                            <p:txEl>
+                                              <p:pRg st="0" end="0"/>
+                                            </p:txEl>
+                                          </p:spTgt>
+                                        </p:tgtEl>
+                                        <p:attrNameLst>
+                                          <p:attrName>style.visibility</p:attrName>
+                                        </p:attrNameLst>
+                                      </p:cBhvr>
+                                      <p:to>
+                                        <p:strVal val="visible"/>
+                                      </p:to>
+                                    </p:set>
+                                  </p:childTnLst>
+                                </p:cTn>
+                              </p:par>
+                            </p:childTnLst>
+                          </p:cTn>
+                        </p:par>
+                      </p:childTnLst>
+                    </p:cTn>
+                  </p:par>
+                  <p:par>
+                    <p:cTn id="49" fill="hold">
+                      <p:stCondLst>
+                        <p:cond delay="indefinite"/>
+                      </p:stCondLst>
+                      <p:childTnLst>
+                        <p:par>
+                          <p:cTn id="50" fill="hold">
+                            <p:stCondLst>
+                              <p:cond delay="0"/>
+                            </p:stCondLst>
+                            <p:childTnLst>
+                              <p:par>
+                                <p:cTn id="51" presetID="1" presetClass="entr" fill="hold" nodeType="clickEffect">
+                                  <p:stCondLst>
+                                    <p:cond delay="0"/>
+                                  </p:stCondLst>
+                                  <p:childTnLst>
+                                    <p:set>
+                                      <p:cBhvr>
+                                        <p:cTn id="52" dur="1" fill="hold">
+                                          <p:stCondLst>
+                                            <p:cond delay="0"/>
+                                          </p:stCondLst>
+                                        </p:cTn>
+                                        <p:tgtEl>
+                                          <p:spTgt spid="28">
+                                            <p:txEl>
+                                              <p:pRg st="1" end="1"/>
+                                            </p:txEl>
+                                          </p:spTgt>
+                                        </p:tgtEl>
+                                        <p:attrNameLst>
+                                          <p:attrName>style.visibility</p:attrName>
+                                        </p:attrNameLst>
+                                      </p:cBhvr>
+                                      <p:to>
+                                        <p:strVal val="visible"/>
+                                      </p:to>
+                                    </p:set>
+                                  </p:childTnLst>
+                                </p:cTn>
+                              </p:par>
+                            </p:childTnLst>
+                          </p:cTn>
+                        </p:par>
+                      </p:childTnLst>
+                    </p:cTn>
+                  </p:par>
+                  <p:par>
+                    <p:cTn id="53" fill="hold">
+                      <p:stCondLst>
+                        <p:cond delay="indefinite"/>
+                      </p:stCondLst>
+                      <p:childTnLst>
+                        <p:par>
+                          <p:cTn id="54" fill="hold">
+                            <p:stCondLst>
+                              <p:cond delay="0"/>
+                            </p:stCondLst>
+                            <p:childTnLst>
+                              <p:par>
+                                <p:cTn id="55" presetID="1" presetClass="entr" fill="hold" nodeType="clickEffect">
+                                  <p:stCondLst>
+                                    <p:cond delay="0"/>
+                                  </p:stCondLst>
+                                  <p:childTnLst>
+                                    <p:set>
+                                      <p:cBhvr>
+                                        <p:cTn id="56" dur="1" fill="hold">
+                                          <p:stCondLst>
+                                            <p:cond delay="0"/>
+                                          </p:stCondLst>
+                                        </p:cTn>
+                                        <p:tgtEl>
+                                          <p:spTgt spid="30"/>
+                                        </p:tgtEl>
+                                        <p:attrNameLst>
+                                          <p:attrName>style.visibility</p:attrName>
+                                        </p:attrNameLst>
+                                      </p:cBhvr>
+                                      <p:to>
+                                        <p:strVal val="visible"/>
+                                      </p:to>
+                                    </p:set>
+                                  </p:childTnLst>
+                                </p:cTn>
+                              </p:par>
+                              <p:par>
+                                <p:cTn id="57" presetID="1" presetClass="entr" fill="hold" nodeType="withEffect">
+                                  <p:stCondLst>
+                                    <p:cond delay="0"/>
+                                  </p:stCondLst>
+                                  <p:childTnLst>
+                                    <p:set>
+                                      <p:cBhvr>
+                                        <p:cTn id="58" dur="1" fill="hold">
+                                          <p:stCondLst>
+                                            <p:cond delay="0"/>
+                                          </p:stCondLst>
+                                        </p:cTn>
+                                        <p:tgtEl>
+                                          <p:spTgt spid="29"/>
+                                        </p:tgtEl>
+                                        <p:attrNameLst>
+                                          <p:attrName>style.visibility</p:attrName>
+                                        </p:attrNameLst>
+                                      </p:cBhvr>
+                                      <p:to>
+                                        <p:strVal val="visible"/>
+                                      </p:to>
+                                    </p:set>
+                                  </p:childTnLst>
+                                </p:cTn>
+                              </p:par>
+                              <p:par>
+                                <p:cTn id="59" presetID="1" presetClass="entr" fill="hold" nodeType="withEffect">
+                                  <p:stCondLst>
+                                    <p:cond delay="0"/>
+                                  </p:stCondLst>
+                                  <p:childTnLst>
+                                    <p:set>
+                                      <p:cBhvr>
+                                        <p:cTn id="60" dur="1" fill="hold">
+                                          <p:stCondLst>
+                                            <p:cond delay="0"/>
+                                          </p:stCondLst>
+                                        </p:cTn>
+                                        <p:tgtEl>
+                                          <p:spTgt spid="31">
+                                            <p:txEl>
+                                              <p:pRg st="0" end="0"/>
+                                            </p:txEl>
+                                          </p:spTgt>
+                                        </p:tgtEl>
+                                        <p:attrNameLst>
+                                          <p:attrName>style.visibility</p:attrName>
+                                        </p:attrNameLst>
+                                      </p:cBhvr>
+                                      <p:to>
+                                        <p:strVal val="visible"/>
+                                      </p:to>
+                                    </p:set>
+                                  </p:childTnLst>
+                                </p:cTn>
+                              </p:par>
+                            </p:childTnLst>
+                          </p:cTn>
+                        </p:par>
+                      </p:childTnLst>
+                    </p:cTn>
+                  </p:par>
+                  <p:par>
+                    <p:cTn id="61" fill="hold">
+                      <p:stCondLst>
+                        <p:cond delay="indefinite"/>
+                      </p:stCondLst>
+                      <p:childTnLst>
+                        <p:par>
+                          <p:cTn id="62" fill="hold">
+                            <p:stCondLst>
+                              <p:cond delay="0"/>
+                            </p:stCondLst>
+                            <p:childTnLst>
+                              <p:par>
+                                <p:cTn id="63" presetID="1" presetClass="entr" fill="hold" nodeType="clickEffect">
+                                  <p:stCondLst>
+                                    <p:cond delay="0"/>
+                                  </p:stCondLst>
+                                  <p:childTnLst>
+                                    <p:set>
+                                      <p:cBhvr>
+                                        <p:cTn id="64" dur="1" fill="hold">
+                                          <p:stCondLst>
+                                            <p:cond delay="0"/>
+                                          </p:stCondLst>
+                                        </p:cTn>
+                                        <p:tgtEl>
+                                          <p:spTgt spid="28">
+                                            <p:txEl>
+                                              <p:pRg st="2" end="2"/>
+                                            </p:txEl>
+                                          </p:spTgt>
                                         </p:tgtEl>
                                         <p:attrNameLst>
                                           <p:attrName>style.visibility</p:attrName>
@@ -8162,1677 +9512,7 @@
       </p:grpSpPr>
       <p:sp>
         <p:nvSpPr>
-          <p:cNvPr id="23" name="PlaceHolder 1"/>
-          <p:cNvSpPr>
-            <a:spLocks noGrp="1"/>
-          </p:cNvSpPr>
-          <p:nvPr>
-            <p:ph type="title"/>
-          </p:nvPr>
-        </p:nvSpPr>
-        <p:spPr>
-          <a:xfrm>
-            <a:off x="503640" y="225720"/>
-            <a:ext cx="9068760" cy="946440"/>
-          </a:xfrm>
-          <a:prstGeom prst="rect">
-            <a:avLst/>
-          </a:prstGeom>
-          <a:noFill/>
-          <a:ln w="0">
-            <a:noFill/>
-          </a:ln>
-        </p:spPr>
-        <p:txBody>
-          <a:bodyPr lIns="0" tIns="0" rIns="0" bIns="0" anchor="ctr">
-            <a:spAutoFit/>
-          </a:bodyPr>
-          <a:p>
-            <a:pPr indent="0" algn="ctr">
-              <a:buNone/>
-            </a:pPr>
-            <a:r>
-              <a:rPr lang="en-US" sz="4400" b="1" u="none" strike="noStrike">
-                <a:solidFill>
-                  <a:schemeClr val="lt1">
-                    <a:lumOff val="0"/>
-                  </a:schemeClr>
-                </a:solidFill>
-                <a:effectLst/>
-                <a:uFillTx/>
-                <a:latin typeface="3270 Nerd Font"/>
-              </a:rPr>
-              <a:t>Anwendung</a:t>
-            </a:r>
-            <a:endParaRPr lang="en-US" sz="4400" b="0" u="none" strike="noStrike">
-              <a:solidFill>
-                <a:srgbClr val="FFFFFF"/>
-              </a:solidFill>
-              <a:effectLst/>
-              <a:uFillTx/>
-              <a:latin typeface="Arial"/>
-            </a:endParaRPr>
-          </a:p>
-        </p:txBody>
-      </p:sp>
-      <p:sp>
-        <p:nvSpPr>
-          <p:cNvPr id="24" name="PlaceHolder 2"/>
-          <p:cNvSpPr>
-            <a:spLocks noGrp="1"/>
-          </p:cNvSpPr>
-          <p:nvPr>
-            <p:ph/>
-          </p:nvPr>
-        </p:nvSpPr>
-        <p:spPr>
-          <a:xfrm>
-            <a:off x="503640" y="1326240"/>
-            <a:ext cx="9097560" cy="3931560"/>
-          </a:xfrm>
-          <a:prstGeom prst="rect">
-            <a:avLst/>
-          </a:prstGeom>
-          <a:noFill/>
-          <a:ln w="0">
-            <a:noFill/>
-          </a:ln>
-        </p:spPr>
-        <p:txBody>
-          <a:bodyPr lIns="0" tIns="0" rIns="0" bIns="0" anchor="t">
-            <a:normAutofit lnSpcReduction="9999"/>
-          </a:bodyPr>
-          <a:p>
-            <a:pPr marL="432000" indent="-324000" algn="l">
-              <a:spcBef>
-                <a:spcPts val="1414"/>
-              </a:spcBef>
-              <a:buClr>
-                <a:srgbClr val="FFFFFF"/>
-              </a:buClr>
-              <a:buSzPct val="85000"/>
-              <a:buFont typeface="Wingdings" charset="2"/>
-              <a:buChar char=""/>
-            </a:pPr>
-            <a:r>
-              <a:rPr lang="en-US" sz="3200" b="0" u="none" strike="noStrike">
-                <a:solidFill>
-                  <a:srgbClr val="FFFFFF"/>
-                </a:solidFill>
-                <a:effectLst/>
-                <a:uFillTx/>
-                <a:latin typeface="3270 Nerd Font"/>
-              </a:rPr>
-              <a:t>Haushaltsgeräte</a:t>
-            </a:r>
-            <a:endParaRPr lang="en-US" sz="3200" b="0" u="none" strike="noStrike">
-              <a:solidFill>
-                <a:srgbClr val="FFFFFF"/>
-              </a:solidFill>
-              <a:effectLst/>
-              <a:uFillTx/>
-              <a:latin typeface="Arial"/>
-            </a:endParaRPr>
-          </a:p>
-          <a:p>
-            <a:pPr marL="432000" indent="-324000" algn="l">
-              <a:spcBef>
-                <a:spcPts val="1414"/>
-              </a:spcBef>
-              <a:buClr>
-                <a:srgbClr val="FFFFFF"/>
-              </a:buClr>
-              <a:buSzPct val="85000"/>
-              <a:buFont typeface="Wingdings" charset="2"/>
-              <a:buChar char=""/>
-            </a:pPr>
-            <a:r>
-              <a:rPr lang="en-US" sz="3200" b="0" u="none" strike="noStrike">
-                <a:solidFill>
-                  <a:srgbClr val="FFFFFF"/>
-                </a:solidFill>
-                <a:effectLst/>
-                <a:uFillTx/>
-                <a:latin typeface="3270 Nerd Font"/>
-              </a:rPr>
-              <a:t>Programmierbare Maschinen</a:t>
-            </a:r>
-            <a:endParaRPr lang="en-US" sz="3200" b="0" u="none" strike="noStrike">
-              <a:solidFill>
-                <a:srgbClr val="FFFFFF"/>
-              </a:solidFill>
-              <a:effectLst/>
-              <a:uFillTx/>
-              <a:latin typeface="Arial"/>
-            </a:endParaRPr>
-          </a:p>
-          <a:p>
-            <a:pPr marL="432000" indent="-324000" algn="l">
-              <a:spcBef>
-                <a:spcPts val="1414"/>
-              </a:spcBef>
-              <a:buClr>
-                <a:srgbClr val="FFFFFF"/>
-              </a:buClr>
-              <a:buSzPct val="85000"/>
-              <a:buFont typeface="Wingdings" charset="2"/>
-              <a:buChar char=""/>
-            </a:pPr>
-            <a:r>
-              <a:rPr lang="en-US" sz="3200" b="0" u="none" strike="noStrike">
-                <a:solidFill>
-                  <a:srgbClr val="FFFFFF"/>
-                </a:solidFill>
-                <a:effectLst/>
-                <a:uFillTx/>
-                <a:latin typeface="3270 Nerd Font"/>
-              </a:rPr>
-              <a:t>Kontrollsysteme</a:t>
-            </a:r>
-            <a:endParaRPr lang="en-US" sz="3200" b="0" u="none" strike="noStrike">
-              <a:solidFill>
-                <a:srgbClr val="FFFFFF"/>
-              </a:solidFill>
-              <a:effectLst/>
-              <a:uFillTx/>
-              <a:latin typeface="Arial"/>
-            </a:endParaRPr>
-          </a:p>
-          <a:p>
-            <a:pPr marL="432000" indent="-324000" algn="l">
-              <a:spcBef>
-                <a:spcPts val="1414"/>
-              </a:spcBef>
-              <a:buClr>
-                <a:srgbClr val="FFFFFF"/>
-              </a:buClr>
-              <a:buSzPct val="85000"/>
-              <a:buFont typeface="Wingdings" charset="2"/>
-              <a:buChar char=""/>
-            </a:pPr>
-            <a:r>
-              <a:rPr lang="en-US" sz="3200" b="0" u="none" strike="noStrike">
-                <a:solidFill>
-                  <a:srgbClr val="FFFFFF"/>
-                </a:solidFill>
-                <a:effectLst/>
-                <a:uFillTx/>
-                <a:latin typeface="3270 Nerd Font"/>
-              </a:rPr>
-              <a:t>Roboter</a:t>
-            </a:r>
-            <a:endParaRPr lang="en-US" sz="3200" b="0" u="none" strike="noStrike">
-              <a:solidFill>
-                <a:srgbClr val="FFFFFF"/>
-              </a:solidFill>
-              <a:effectLst/>
-              <a:uFillTx/>
-              <a:latin typeface="Arial"/>
-            </a:endParaRPr>
-          </a:p>
-          <a:p>
-            <a:pPr marL="432000" indent="-324000" algn="l">
-              <a:spcBef>
-                <a:spcPts val="1414"/>
-              </a:spcBef>
-              <a:buClr>
-                <a:srgbClr val="FFFFFF"/>
-              </a:buClr>
-              <a:buSzPct val="85000"/>
-              <a:buFont typeface="Wingdings" charset="2"/>
-              <a:buChar char=""/>
-            </a:pPr>
-            <a:r>
-              <a:rPr lang="en-US" sz="3200" b="0" u="none" strike="noStrike">
-                <a:solidFill>
-                  <a:srgbClr val="FFFFFF"/>
-                </a:solidFill>
-                <a:effectLst/>
-                <a:uFillTx/>
-                <a:latin typeface="3270 Nerd Font"/>
-              </a:rPr>
-              <a:t>Chipkarten</a:t>
-            </a:r>
-            <a:endParaRPr lang="en-US" sz="3200" b="0" u="none" strike="noStrike">
-              <a:solidFill>
-                <a:srgbClr val="FFFFFF"/>
-              </a:solidFill>
-              <a:effectLst/>
-              <a:uFillTx/>
-              <a:latin typeface="Arial"/>
-            </a:endParaRPr>
-          </a:p>
-          <a:p>
-            <a:pPr marL="432000" indent="-324000" algn="l">
-              <a:spcBef>
-                <a:spcPts val="1414"/>
-              </a:spcBef>
-              <a:buClr>
-                <a:srgbClr val="FFFFFF"/>
-              </a:buClr>
-              <a:buSzPct val="85000"/>
-              <a:buFont typeface="Wingdings" charset="2"/>
-              <a:buChar char=""/>
-            </a:pPr>
-            <a:r>
-              <a:rPr lang="en-US" sz="3200" b="0" u="none" strike="noStrike">
-                <a:solidFill>
-                  <a:srgbClr val="FFFFFF"/>
-                </a:solidFill>
-                <a:effectLst/>
-                <a:uFillTx/>
-                <a:latin typeface="3270 Nerd Font"/>
-              </a:rPr>
-              <a:t>Peripheriegeräte</a:t>
-            </a:r>
-            <a:endParaRPr lang="en-US" sz="3200" b="0" u="none" strike="noStrike">
-              <a:solidFill>
-                <a:srgbClr val="FFFFFF"/>
-              </a:solidFill>
-              <a:effectLst/>
-              <a:uFillTx/>
-              <a:latin typeface="Arial"/>
-            </a:endParaRPr>
-          </a:p>
-          <a:p>
-            <a:pPr marL="432000" indent="-324000" algn="l">
-              <a:spcBef>
-                <a:spcPts val="1414"/>
-              </a:spcBef>
-              <a:buClr>
-                <a:srgbClr val="FFFFFF"/>
-              </a:buClr>
-              <a:buSzPct val="85000"/>
-              <a:buFont typeface="Wingdings" charset="2"/>
-              <a:buChar char=""/>
-            </a:pPr>
-            <a:r>
-              <a:rPr lang="en-US" sz="3600" b="1" u="none" strike="noStrike">
-                <a:solidFill>
-                  <a:srgbClr val="FFFFFF"/>
-                </a:solidFill>
-                <a:effectLst/>
-                <a:uFillTx/>
-                <a:latin typeface="3270 Nerd Font"/>
-              </a:rPr>
-              <a:t>Eingebettete Systeme</a:t>
-            </a:r>
-            <a:endParaRPr lang="en-US" sz="3600" b="0" u="none" strike="noStrike">
-              <a:solidFill>
-                <a:srgbClr val="FFFFFF"/>
-              </a:solidFill>
-              <a:effectLst/>
-              <a:uFillTx/>
-              <a:latin typeface="Arial"/>
-            </a:endParaRPr>
-          </a:p>
-        </p:txBody>
-      </p:sp>
-      <p:pic>
-        <p:nvPicPr>
-          <p:cNvPr id="25" name=""/>
-          <p:cNvPicPr/>
-          <p:nvPr/>
-        </p:nvPicPr>
-        <p:blipFill>
-          <a:blip r:embed="rId1">
-            <a:alphaModFix amt="0"/>
-          </a:blip>
-          <a:stretch/>
-        </p:blipFill>
-        <p:spPr>
-          <a:xfrm>
-            <a:off x="8588160" y="3200400"/>
-            <a:ext cx="1203120" cy="2057400"/>
-          </a:xfrm>
-          <a:prstGeom prst="rect">
-            <a:avLst/>
-          </a:prstGeom>
-          <a:noFill/>
-          <a:ln w="0">
-            <a:noFill/>
-          </a:ln>
-        </p:spPr>
-      </p:pic>
-      <p:pic>
-        <p:nvPicPr>
-          <p:cNvPr id="26" name=""/>
-          <p:cNvPicPr/>
-          <p:nvPr/>
-        </p:nvPicPr>
-        <p:blipFill>
-          <a:blip r:embed="rId2">
-            <a:alphaModFix amt="0"/>
-          </a:blip>
-          <a:stretch/>
-        </p:blipFill>
-        <p:spPr>
-          <a:xfrm>
-            <a:off x="6629400" y="4326840"/>
-            <a:ext cx="1600200" cy="930960"/>
-          </a:xfrm>
-          <a:prstGeom prst="rect">
-            <a:avLst/>
-          </a:prstGeom>
-          <a:noFill/>
-          <a:ln w="0">
-            <a:noFill/>
-          </a:ln>
-        </p:spPr>
-      </p:pic>
-      <p:pic>
-        <p:nvPicPr>
-          <p:cNvPr id="27" name=""/>
-          <p:cNvPicPr/>
-          <p:nvPr/>
-        </p:nvPicPr>
-        <p:blipFill>
-          <a:blip r:embed="rId3">
-            <a:alphaModFix amt="0"/>
-          </a:blip>
-          <a:stretch/>
-        </p:blipFill>
-        <p:spPr>
-          <a:xfrm>
-            <a:off x="7543800" y="225720"/>
-            <a:ext cx="2239920" cy="2239920"/>
-          </a:xfrm>
-          <a:prstGeom prst="rect">
-            <a:avLst/>
-          </a:prstGeom>
-          <a:noFill/>
-          <a:ln w="0">
-            <a:noFill/>
-          </a:ln>
-        </p:spPr>
-      </p:pic>
-      <p:pic>
-        <p:nvPicPr>
-          <p:cNvPr id="28" name=""/>
-          <p:cNvPicPr/>
-          <p:nvPr/>
-        </p:nvPicPr>
-        <p:blipFill>
-          <a:blip r:embed="rId4">
-            <a:alphaModFix amt="0"/>
-          </a:blip>
-          <a:stretch/>
-        </p:blipFill>
-        <p:spPr>
-          <a:xfrm>
-            <a:off x="6400800" y="2514600"/>
-            <a:ext cx="1054440" cy="887040"/>
-          </a:xfrm>
-          <a:prstGeom prst="rect">
-            <a:avLst/>
-          </a:prstGeom>
-          <a:noFill/>
-          <a:ln w="0">
-            <a:noFill/>
-          </a:ln>
-        </p:spPr>
-      </p:pic>
-      <p:pic>
-        <p:nvPicPr>
-          <p:cNvPr id="29" name=""/>
-          <p:cNvPicPr/>
-          <p:nvPr/>
-        </p:nvPicPr>
-        <p:blipFill>
-          <a:blip r:embed="rId5">
-            <a:alphaModFix amt="0"/>
-          </a:blip>
-          <a:stretch/>
-        </p:blipFill>
-        <p:spPr>
-          <a:xfrm>
-            <a:off x="7673760" y="2337480"/>
-            <a:ext cx="914400" cy="1091520"/>
-          </a:xfrm>
-          <a:prstGeom prst="rect">
-            <a:avLst/>
-          </a:prstGeom>
-          <a:noFill/>
-          <a:ln w="0">
-            <a:noFill/>
-          </a:ln>
-        </p:spPr>
-      </p:pic>
-      <p:sp>
-        <p:nvSpPr>
-          <p:cNvPr id="30" name=""/>
-          <p:cNvSpPr txBox="1"/>
-          <p:nvPr/>
-        </p:nvSpPr>
-        <p:spPr>
-          <a:xfrm>
-            <a:off x="9144000" y="5257800"/>
-            <a:ext cx="846000" cy="401400"/>
-          </a:xfrm>
-          <a:prstGeom prst="rect">
-            <a:avLst/>
-          </a:prstGeom>
-          <a:noFill/>
-          <a:ln w="0">
-            <a:noFill/>
-          </a:ln>
-        </p:spPr>
-        <p:txBody>
-          <a:bodyPr wrap="none" lIns="90000" tIns="45000" rIns="90000" bIns="45000" anchor="t">
-            <a:spAutoFit/>
-          </a:bodyPr>
-          <a:p>
-            <a:r>
-              <a:rPr lang="en-US" sz="1800" b="0" u="none" strike="noStrike">
-                <a:solidFill>
-                  <a:srgbClr val="FFFFFF"/>
-                </a:solidFill>
-                <a:effectLst/>
-                <a:uFillTx/>
-                <a:latin typeface="Arial"/>
-              </a:rPr>
-              <a:t>[1,2,3]</a:t>
-            </a:r>
-            <a:endParaRPr lang="en-US" sz="1800" b="0" u="none" strike="noStrike">
-              <a:solidFill>
-                <a:srgbClr val="FFFFFF"/>
-              </a:solidFill>
-              <a:effectLst/>
-              <a:uFillTx/>
-              <a:latin typeface="Arial"/>
-            </a:endParaRPr>
-          </a:p>
-        </p:txBody>
-      </p:sp>
-    </p:spTree>
-  </p:cSld>
-  <p:timing>
-    <p:tnLst>
-      <p:par>
-        <p:cTn id="7" dur="indefinite" restart="never" nodeType="tmRoot">
-          <p:childTnLst>
-            <p:seq>
-              <p:cTn id="8" dur="indefinite" nodeType="mainSeq">
-                <p:childTnLst>
-                  <p:par>
-                    <p:cTn id="9" fill="hold">
-                      <p:stCondLst>
-                        <p:cond delay="indefinite"/>
-                      </p:stCondLst>
-                      <p:childTnLst>
-                        <p:par>
-                          <p:cTn id="10" fill="hold">
-                            <p:stCondLst>
-                              <p:cond delay="0"/>
-                            </p:stCondLst>
-                            <p:childTnLst>
-                              <p:par>
-                                <p:cTn id="11" presetID="1" presetClass="entr" fill="hold" nodeType="clickEffect">
-                                  <p:stCondLst>
-                                    <p:cond delay="0"/>
-                                  </p:stCondLst>
-                                  <p:childTnLst>
-                                    <p:set>
-                                      <p:cBhvr>
-                                        <p:cTn id="12" dur="1" fill="hold">
-                                          <p:stCondLst>
-                                            <p:cond delay="0"/>
-                                          </p:stCondLst>
-                                        </p:cTn>
-                                        <p:tgtEl>
-                                          <p:spTgt spid="24">
-                                            <p:txEl>
-                                              <p:pRg st="0" end="0"/>
-                                            </p:txEl>
-                                          </p:spTgt>
-                                        </p:tgtEl>
-                                        <p:attrNameLst>
-                                          <p:attrName>style.visibility</p:attrName>
-                                        </p:attrNameLst>
-                                      </p:cBhvr>
-                                      <p:to>
-                                        <p:strVal val="visible"/>
-                                      </p:to>
-                                    </p:set>
-                                  </p:childTnLst>
-                                </p:cTn>
-                              </p:par>
-                            </p:childTnLst>
-                          </p:cTn>
-                        </p:par>
-                      </p:childTnLst>
-                    </p:cTn>
-                  </p:par>
-                  <p:par>
-                    <p:cTn id="13" fill="hold">
-                      <p:stCondLst>
-                        <p:cond delay="indefinite"/>
-                      </p:stCondLst>
-                      <p:childTnLst>
-                        <p:par>
-                          <p:cTn id="14" fill="hold">
-                            <p:stCondLst>
-                              <p:cond delay="0"/>
-                            </p:stCondLst>
-                            <p:childTnLst>
-                              <p:par>
-                                <p:cTn id="15" presetID="1" presetClass="entr" fill="hold" nodeType="clickEffect">
-                                  <p:stCondLst>
-                                    <p:cond delay="0"/>
-                                  </p:stCondLst>
-                                  <p:childTnLst>
-                                    <p:set>
-                                      <p:cBhvr>
-                                        <p:cTn id="16" dur="1" fill="hold">
-                                          <p:stCondLst>
-                                            <p:cond delay="0"/>
-                                          </p:stCondLst>
-                                        </p:cTn>
-                                        <p:tgtEl>
-                                          <p:spTgt spid="24">
-                                            <p:txEl>
-                                              <p:pRg st="1" end="1"/>
-                                            </p:txEl>
-                                          </p:spTgt>
-                                        </p:tgtEl>
-                                        <p:attrNameLst>
-                                          <p:attrName>style.visibility</p:attrName>
-                                        </p:attrNameLst>
-                                      </p:cBhvr>
-                                      <p:to>
-                                        <p:strVal val="visible"/>
-                                      </p:to>
-                                    </p:set>
-                                  </p:childTnLst>
-                                </p:cTn>
-                              </p:par>
-                              <p:par>
-                                <p:cTn id="17" presetID="1" presetClass="entr" fill="hold" nodeType="withEffect">
-                                  <p:stCondLst>
-                                    <p:cond delay="0"/>
-                                  </p:stCondLst>
-                                  <p:childTnLst>
-                                    <p:set>
-                                      <p:cBhvr>
-                                        <p:cTn id="18" dur="1" fill="hold">
-                                          <p:stCondLst>
-                                            <p:cond delay="0"/>
-                                          </p:stCondLst>
-                                        </p:cTn>
-                                        <p:tgtEl>
-                                          <p:spTgt spid="27"/>
-                                        </p:tgtEl>
-                                        <p:attrNameLst>
-                                          <p:attrName>style.visibility</p:attrName>
-                                        </p:attrNameLst>
-                                      </p:cBhvr>
-                                      <p:to>
-                                        <p:strVal val="visible"/>
-                                      </p:to>
-                                    </p:set>
-                                  </p:childTnLst>
-                                </p:cTn>
-                              </p:par>
-                            </p:childTnLst>
-                          </p:cTn>
-                        </p:par>
-                      </p:childTnLst>
-                    </p:cTn>
-                  </p:par>
-                  <p:par>
-                    <p:cTn id="19" fill="hold">
-                      <p:stCondLst>
-                        <p:cond delay="indefinite"/>
-                      </p:stCondLst>
-                      <p:childTnLst>
-                        <p:par>
-                          <p:cTn id="20" fill="hold">
-                            <p:stCondLst>
-                              <p:cond delay="0"/>
-                            </p:stCondLst>
-                            <p:childTnLst>
-                              <p:par>
-                                <p:cTn id="21" presetID="1" presetClass="entr" fill="hold" nodeType="clickEffect">
-                                  <p:stCondLst>
-                                    <p:cond delay="0"/>
-                                  </p:stCondLst>
-                                  <p:childTnLst>
-                                    <p:set>
-                                      <p:cBhvr>
-                                        <p:cTn id="22" dur="1" fill="hold">
-                                          <p:stCondLst>
-                                            <p:cond delay="0"/>
-                                          </p:stCondLst>
-                                        </p:cTn>
-                                        <p:tgtEl>
-                                          <p:spTgt spid="24">
-                                            <p:txEl>
-                                              <p:pRg st="2" end="2"/>
-                                            </p:txEl>
-                                          </p:spTgt>
-                                        </p:tgtEl>
-                                        <p:attrNameLst>
-                                          <p:attrName>style.visibility</p:attrName>
-                                        </p:attrNameLst>
-                                      </p:cBhvr>
-                                      <p:to>
-                                        <p:strVal val="visible"/>
-                                      </p:to>
-                                    </p:set>
-                                  </p:childTnLst>
-                                </p:cTn>
-                              </p:par>
-                              <p:par>
-                                <p:cTn id="23" presetID="1" presetClass="entr" fill="hold" nodeType="withEffect">
-                                  <p:stCondLst>
-                                    <p:cond delay="0"/>
-                                  </p:stCondLst>
-                                  <p:childTnLst>
-                                    <p:set>
-                                      <p:cBhvr>
-                                        <p:cTn id="24" dur="1" fill="hold">
-                                          <p:stCondLst>
-                                            <p:cond delay="0"/>
-                                          </p:stCondLst>
-                                        </p:cTn>
-                                        <p:tgtEl>
-                                          <p:spTgt spid="28"/>
-                                        </p:tgtEl>
-                                        <p:attrNameLst>
-                                          <p:attrName>style.visibility</p:attrName>
-                                        </p:attrNameLst>
-                                      </p:cBhvr>
-                                      <p:to>
-                                        <p:strVal val="visible"/>
-                                      </p:to>
-                                    </p:set>
-                                  </p:childTnLst>
-                                </p:cTn>
-                              </p:par>
-                              <p:par>
-                                <p:cTn id="25" presetID="1" presetClass="entr" fill="hold" nodeType="withEffect">
-                                  <p:stCondLst>
-                                    <p:cond delay="0"/>
-                                  </p:stCondLst>
-                                  <p:childTnLst>
-                                    <p:set>
-                                      <p:cBhvr>
-                                        <p:cTn id="26" dur="1" fill="hold">
-                                          <p:stCondLst>
-                                            <p:cond delay="0"/>
-                                          </p:stCondLst>
-                                        </p:cTn>
-                                        <p:tgtEl>
-                                          <p:spTgt spid="29"/>
-                                        </p:tgtEl>
-                                        <p:attrNameLst>
-                                          <p:attrName>style.visibility</p:attrName>
-                                        </p:attrNameLst>
-                                      </p:cBhvr>
-                                      <p:to>
-                                        <p:strVal val="visible"/>
-                                      </p:to>
-                                    </p:set>
-                                  </p:childTnLst>
-                                </p:cTn>
-                              </p:par>
-                            </p:childTnLst>
-                          </p:cTn>
-                        </p:par>
-                      </p:childTnLst>
-                    </p:cTn>
-                  </p:par>
-                  <p:par>
-                    <p:cTn id="27" fill="hold">
-                      <p:stCondLst>
-                        <p:cond delay="indefinite"/>
-                      </p:stCondLst>
-                      <p:childTnLst>
-                        <p:par>
-                          <p:cTn id="28" fill="hold">
-                            <p:stCondLst>
-                              <p:cond delay="0"/>
-                            </p:stCondLst>
-                            <p:childTnLst>
-                              <p:par>
-                                <p:cTn id="29" presetID="1" presetClass="entr" fill="hold" nodeType="clickEffect">
-                                  <p:stCondLst>
-                                    <p:cond delay="0"/>
-                                  </p:stCondLst>
-                                  <p:childTnLst>
-                                    <p:set>
-                                      <p:cBhvr>
-                                        <p:cTn id="30" dur="1" fill="hold">
-                                          <p:stCondLst>
-                                            <p:cond delay="0"/>
-                                          </p:stCondLst>
-                                        </p:cTn>
-                                        <p:tgtEl>
-                                          <p:spTgt spid="24">
-                                            <p:txEl>
-                                              <p:pRg st="3" end="3"/>
-                                            </p:txEl>
-                                          </p:spTgt>
-                                        </p:tgtEl>
-                                        <p:attrNameLst>
-                                          <p:attrName>style.visibility</p:attrName>
-                                        </p:attrNameLst>
-                                      </p:cBhvr>
-                                      <p:to>
-                                        <p:strVal val="visible"/>
-                                      </p:to>
-                                    </p:set>
-                                  </p:childTnLst>
-                                </p:cTn>
-                              </p:par>
-                              <p:par>
-                                <p:cTn id="31" presetID="1" presetClass="entr" fill="hold" nodeType="withEffect">
-                                  <p:stCondLst>
-                                    <p:cond delay="0"/>
-                                  </p:stCondLst>
-                                  <p:childTnLst>
-                                    <p:set>
-                                      <p:cBhvr>
-                                        <p:cTn id="32" dur="1" fill="hold">
-                                          <p:stCondLst>
-                                            <p:cond delay="0"/>
-                                          </p:stCondLst>
-                                        </p:cTn>
-                                        <p:tgtEl>
-                                          <p:spTgt spid="25"/>
-                                        </p:tgtEl>
-                                        <p:attrNameLst>
-                                          <p:attrName>style.visibility</p:attrName>
-                                        </p:attrNameLst>
-                                      </p:cBhvr>
-                                      <p:to>
-                                        <p:strVal val="visible"/>
-                                      </p:to>
-                                    </p:set>
-                                  </p:childTnLst>
-                                </p:cTn>
-                              </p:par>
-                            </p:childTnLst>
-                          </p:cTn>
-                        </p:par>
-                      </p:childTnLst>
-                    </p:cTn>
-                  </p:par>
-                  <p:par>
-                    <p:cTn id="33" fill="hold">
-                      <p:stCondLst>
-                        <p:cond delay="indefinite"/>
-                      </p:stCondLst>
-                      <p:childTnLst>
-                        <p:par>
-                          <p:cTn id="34" fill="hold">
-                            <p:stCondLst>
-                              <p:cond delay="0"/>
-                            </p:stCondLst>
-                            <p:childTnLst>
-                              <p:par>
-                                <p:cTn id="35" presetID="1" presetClass="entr" fill="hold" nodeType="clickEffect">
-                                  <p:stCondLst>
-                                    <p:cond delay="0"/>
-                                  </p:stCondLst>
-                                  <p:childTnLst>
-                                    <p:set>
-                                      <p:cBhvr>
-                                        <p:cTn id="36" dur="1" fill="hold">
-                                          <p:stCondLst>
-                                            <p:cond delay="0"/>
-                                          </p:stCondLst>
-                                        </p:cTn>
-                                        <p:tgtEl>
-                                          <p:spTgt spid="24">
-                                            <p:txEl>
-                                              <p:pRg st="4" end="4"/>
-                                            </p:txEl>
-                                          </p:spTgt>
-                                        </p:tgtEl>
-                                        <p:attrNameLst>
-                                          <p:attrName>style.visibility</p:attrName>
-                                        </p:attrNameLst>
-                                      </p:cBhvr>
-                                      <p:to>
-                                        <p:strVal val="visible"/>
-                                      </p:to>
-                                    </p:set>
-                                  </p:childTnLst>
-                                </p:cTn>
-                              </p:par>
-                            </p:childTnLst>
-                          </p:cTn>
-                        </p:par>
-                      </p:childTnLst>
-                    </p:cTn>
-                  </p:par>
-                  <p:par>
-                    <p:cTn id="37" fill="hold">
-                      <p:stCondLst>
-                        <p:cond delay="indefinite"/>
-                      </p:stCondLst>
-                      <p:childTnLst>
-                        <p:par>
-                          <p:cTn id="38" fill="hold">
-                            <p:stCondLst>
-                              <p:cond delay="0"/>
-                            </p:stCondLst>
-                            <p:childTnLst>
-                              <p:par>
-                                <p:cTn id="39" presetID="1" presetClass="entr" fill="hold" nodeType="clickEffect">
-                                  <p:stCondLst>
-                                    <p:cond delay="0"/>
-                                  </p:stCondLst>
-                                  <p:childTnLst>
-                                    <p:set>
-                                      <p:cBhvr>
-                                        <p:cTn id="40" dur="1" fill="hold">
-                                          <p:stCondLst>
-                                            <p:cond delay="0"/>
-                                          </p:stCondLst>
-                                        </p:cTn>
-                                        <p:tgtEl>
-                                          <p:spTgt spid="24">
-                                            <p:txEl>
-                                              <p:pRg st="5" end="5"/>
-                                            </p:txEl>
-                                          </p:spTgt>
-                                        </p:tgtEl>
-                                        <p:attrNameLst>
-                                          <p:attrName>style.visibility</p:attrName>
-                                        </p:attrNameLst>
-                                      </p:cBhvr>
-                                      <p:to>
-                                        <p:strVal val="visible"/>
-                                      </p:to>
-                                    </p:set>
-                                  </p:childTnLst>
-                                </p:cTn>
-                              </p:par>
-                              <p:par>
-                                <p:cTn id="41" presetID="1" presetClass="entr" fill="hold" nodeType="withEffect">
-                                  <p:stCondLst>
-                                    <p:cond delay="0"/>
-                                  </p:stCondLst>
-                                  <p:childTnLst>
-                                    <p:set>
-                                      <p:cBhvr>
-                                        <p:cTn id="42" dur="1" fill="hold">
-                                          <p:stCondLst>
-                                            <p:cond delay="0"/>
-                                          </p:stCondLst>
-                                        </p:cTn>
-                                        <p:tgtEl>
-                                          <p:spTgt spid="26"/>
-                                        </p:tgtEl>
-                                        <p:attrNameLst>
-                                          <p:attrName>style.visibility</p:attrName>
-                                        </p:attrNameLst>
-                                      </p:cBhvr>
-                                      <p:to>
-                                        <p:strVal val="visible"/>
-                                      </p:to>
-                                    </p:set>
-                                  </p:childTnLst>
-                                </p:cTn>
-                              </p:par>
-                              <p:par>
-                                <p:cTn id="43" presetID="1" presetClass="entr" fill="hold" nodeType="withEffect">
-                                  <p:stCondLst>
-                                    <p:cond delay="0"/>
-                                  </p:stCondLst>
-                                  <p:childTnLst>
-                                    <p:set>
-                                      <p:cBhvr>
-                                        <p:cTn id="44" dur="0" fill="hold">
-                                          <p:stCondLst>
-                                            <p:cond delay="0"/>
-                                          </p:stCondLst>
-                                        </p:cTn>
-                                        <p:tgtEl>
-                                          <p:spTgt spid="30">
-                                            <p:txEl>
-                                              <p:pRg st="0" end="0"/>
-                                            </p:txEl>
-                                          </p:spTgt>
-                                        </p:tgtEl>
-                                        <p:attrNameLst>
-                                          <p:attrName>style.visibility</p:attrName>
-                                        </p:attrNameLst>
-                                      </p:cBhvr>
-                                      <p:to>
-                                        <p:strVal val="visible"/>
-                                      </p:to>
-                                    </p:set>
-                                  </p:childTnLst>
-                                </p:cTn>
-                              </p:par>
-                            </p:childTnLst>
-                          </p:cTn>
-                        </p:par>
-                      </p:childTnLst>
-                    </p:cTn>
-                  </p:par>
-                  <p:par>
-                    <p:cTn id="45" fill="hold">
-                      <p:stCondLst>
-                        <p:cond delay="indefinite"/>
-                      </p:stCondLst>
-                      <p:childTnLst>
-                        <p:par>
-                          <p:cTn id="46" fill="hold">
-                            <p:stCondLst>
-                              <p:cond delay="0"/>
-                            </p:stCondLst>
-                            <p:childTnLst>
-                              <p:par>
-                                <p:cTn id="47" presetID="1" presetClass="entr" fill="hold" nodeType="clickEffect">
-                                  <p:stCondLst>
-                                    <p:cond delay="0"/>
-                                  </p:stCondLst>
-                                  <p:childTnLst>
-                                    <p:set>
-                                      <p:cBhvr>
-                                        <p:cTn id="48" dur="1" fill="hold">
-                                          <p:stCondLst>
-                                            <p:cond delay="0"/>
-                                          </p:stCondLst>
-                                        </p:cTn>
-                                        <p:tgtEl>
-                                          <p:spTgt spid="24">
-                                            <p:txEl>
-                                              <p:pRg st="6" end="6"/>
-                                            </p:txEl>
-                                          </p:spTgt>
-                                        </p:tgtEl>
-                                        <p:attrNameLst>
-                                          <p:attrName>style.visibility</p:attrName>
-                                        </p:attrNameLst>
-                                      </p:cBhvr>
-                                      <p:to>
-                                        <p:strVal val="visible"/>
-                                      </p:to>
-                                    </p:set>
-                                  </p:childTnLst>
-                                </p:cTn>
-                              </p:par>
-                            </p:childTnLst>
-                          </p:cTn>
-                        </p:par>
-                      </p:childTnLst>
-                    </p:cTn>
-                  </p:par>
-                </p:childTnLst>
-              </p:cTn>
-              <p:prevCondLst>
-                <p:cond evt="onPrev">
-                  <p:tgtEl>
-                    <p:sldTgt/>
-                  </p:tgtEl>
-                </p:cond>
-              </p:prevCondLst>
-              <p:nextCondLst>
-                <p:cond evt="onNext">
-                  <p:tgtEl>
-                    <p:sldTgt/>
-                  </p:tgtEl>
-                </p:cond>
-              </p:nextCondLst>
-            </p:seq>
-          </p:childTnLst>
-        </p:cTn>
-      </p:par>
-    </p:tnLst>
-  </p:timing>
-</p:sld>
-</file>
-
-<file path=ppt/slides/slide5.xml><?xml version="1.0" encoding="utf-8"?>
-<p:sld xmlns:a="http://schemas.openxmlformats.org/drawingml/2006/main" xmlns:p="http://schemas.openxmlformats.org/presentationml/2006/main" xmlns:r="http://schemas.openxmlformats.org/officeDocument/2006/relationships" xmlns:p14="http://schemas.microsoft.com/office/powerpoint/2010/main" xmlns:p15="http://schemas.microsoft.com/office/powerpoint/2012/main" xmlns:mc="http://schemas.openxmlformats.org/markup-compatibility/2006">
-  <p:cSld>
-    <p:bg>
-      <p:bgPr>
-        <a:gradFill rotWithShape="0">
-          <a:gsLst>
-            <a:gs pos="0">
-              <a:srgbClr val="282828"/>
-            </a:gs>
-            <a:gs pos="100000">
-              <a:srgbClr val="1D2021"/>
-            </a:gs>
-          </a:gsLst>
-          <a:path path="rect">
-            <a:fillToRect l="50000" t="50000" r="50000" b="50000"/>
-          </a:path>
-        </a:gradFill>
-      </p:bgPr>
-    </p:bg>
-    <p:spTree>
-      <p:nvGrpSpPr>
-        <p:cNvPr id="1" name=""/>
-        <p:cNvGrpSpPr/>
-        <p:nvPr/>
-      </p:nvGrpSpPr>
-      <p:grpSpPr>
-        <a:xfrm>
-          <a:off x="0" y="0"/>
-          <a:ext cx="0" cy="0"/>
-          <a:chOff x="0" y="0"/>
-          <a:chExt cx="0" cy="0"/>
-        </a:xfrm>
-      </p:grpSpPr>
-      <p:sp>
-        <p:nvSpPr>
-          <p:cNvPr id="31" name="PlaceHolder 1"/>
-          <p:cNvSpPr>
-            <a:spLocks noGrp="1"/>
-          </p:cNvSpPr>
-          <p:nvPr>
-            <p:ph type="title"/>
-          </p:nvPr>
-        </p:nvSpPr>
-        <p:spPr>
-          <a:xfrm>
-            <a:off x="496440" y="225720"/>
-            <a:ext cx="9068760" cy="946440"/>
-          </a:xfrm>
-          <a:prstGeom prst="rect">
-            <a:avLst/>
-          </a:prstGeom>
-          <a:noFill/>
-          <a:ln w="0">
-            <a:noFill/>
-          </a:ln>
-        </p:spPr>
-        <p:txBody>
-          <a:bodyPr lIns="0" tIns="0" rIns="0" bIns="0" anchor="ctr">
-            <a:spAutoFit/>
-          </a:bodyPr>
-          <a:p>
-            <a:pPr indent="0" algn="ctr">
-              <a:buNone/>
-            </a:pPr>
-            <a:r>
-              <a:rPr lang="en-US" sz="4400" b="1" u="none" strike="noStrike">
-                <a:solidFill>
-                  <a:schemeClr val="lt1">
-                    <a:lumOff val="0"/>
-                  </a:schemeClr>
-                </a:solidFill>
-                <a:effectLst/>
-                <a:uFillTx/>
-                <a:latin typeface="3270 Nerd Font"/>
-              </a:rPr>
-              <a:t>Was ist ein Mikrocontroller?</a:t>
-            </a:r>
-            <a:endParaRPr lang="en-US" sz="4400" b="0" u="none" strike="noStrike">
-              <a:solidFill>
-                <a:srgbClr val="FFFFFF"/>
-              </a:solidFill>
-              <a:effectLst/>
-              <a:uFillTx/>
-              <a:latin typeface="Arial"/>
-            </a:endParaRPr>
-          </a:p>
-        </p:txBody>
-      </p:sp>
-      <p:sp>
-        <p:nvSpPr>
-          <p:cNvPr id="32" name="PlaceHolder 2"/>
-          <p:cNvSpPr>
-            <a:spLocks noGrp="1"/>
-          </p:cNvSpPr>
-          <p:nvPr>
-            <p:ph/>
-          </p:nvPr>
-        </p:nvSpPr>
-        <p:spPr>
-          <a:xfrm>
-            <a:off x="503640" y="1326240"/>
-            <a:ext cx="5668560" cy="3931560"/>
-          </a:xfrm>
-          <a:prstGeom prst="rect">
-            <a:avLst/>
-          </a:prstGeom>
-          <a:noFill/>
-          <a:ln w="0">
-            <a:noFill/>
-          </a:ln>
-        </p:spPr>
-        <p:txBody>
-          <a:bodyPr lIns="0" tIns="0" rIns="0" bIns="0" anchor="t">
-            <a:normAutofit/>
-          </a:bodyPr>
-          <a:p>
-            <a:pPr marL="432000" indent="-324000" algn="l">
-              <a:spcBef>
-                <a:spcPts val="1414"/>
-              </a:spcBef>
-              <a:buClr>
-                <a:srgbClr val="FFFFFF"/>
-              </a:buClr>
-              <a:buSzPct val="85000"/>
-              <a:buFont typeface="Wingdings" charset="2"/>
-              <a:buChar char=""/>
-            </a:pPr>
-            <a:r>
-              <a:rPr lang="en-US" sz="3200" b="0" u="none" strike="noStrike">
-                <a:solidFill>
-                  <a:srgbClr val="FFFFFF"/>
-                </a:solidFill>
-                <a:effectLst/>
-                <a:uFillTx/>
-                <a:latin typeface="3270 Nerd Font"/>
-              </a:rPr>
-              <a:t>Kleiner Computer</a:t>
-            </a:r>
-            <a:endParaRPr lang="en-US" sz="3200" b="0" u="none" strike="noStrike">
-              <a:solidFill>
-                <a:srgbClr val="FFFFFF"/>
-              </a:solidFill>
-              <a:effectLst/>
-              <a:uFillTx/>
-              <a:latin typeface="Arial"/>
-            </a:endParaRPr>
-          </a:p>
-          <a:p>
-            <a:pPr marL="432000" indent="-324000" algn="l">
-              <a:spcBef>
-                <a:spcPts val="1414"/>
-              </a:spcBef>
-              <a:buClr>
-                <a:srgbClr val="FFFFFF"/>
-              </a:buClr>
-              <a:buSzPct val="85000"/>
-              <a:buFont typeface="Wingdings" charset="2"/>
-              <a:buChar char=""/>
-            </a:pPr>
-            <a:r>
-              <a:rPr lang="en-US" sz="3200" b="1" u="none" strike="noStrike">
-                <a:solidFill>
-                  <a:srgbClr val="FFFFFF"/>
-                </a:solidFill>
-                <a:effectLst/>
-                <a:uFillTx/>
-                <a:latin typeface="3270 Nerd Font"/>
-              </a:rPr>
-              <a:t>CPU, Arbeitsspeicher und Peripherie auf einem Chip</a:t>
-            </a:r>
-            <a:endParaRPr lang="en-US" sz="3200" b="0" u="none" strike="noStrike">
-              <a:solidFill>
-                <a:srgbClr val="FFFFFF"/>
-              </a:solidFill>
-              <a:effectLst/>
-              <a:uFillTx/>
-              <a:latin typeface="Arial"/>
-            </a:endParaRPr>
-          </a:p>
-          <a:p>
-            <a:pPr marL="432000" indent="-324000" algn="l">
-              <a:spcBef>
-                <a:spcPts val="1414"/>
-              </a:spcBef>
-              <a:buClr>
-                <a:srgbClr val="FFFFFF"/>
-              </a:buClr>
-              <a:buSzPct val="85000"/>
-              <a:buFont typeface="Wingdings" charset="2"/>
-              <a:buChar char=""/>
-            </a:pPr>
-            <a:r>
-              <a:rPr lang="en-US" sz="3200" b="0" u="none" strike="noStrike">
-                <a:solidFill>
-                  <a:srgbClr val="FFFFFF"/>
-                </a:solidFill>
-                <a:effectLst/>
-                <a:uFillTx/>
-                <a:latin typeface="3270 Nerd Font"/>
-              </a:rPr>
-              <a:t>Heute häufig noch andere Funktionen</a:t>
-            </a:r>
-            <a:r>
-              <a:rPr lang="en-US" sz="3200" b="0" u="none" strike="noStrike">
-                <a:solidFill>
-                  <a:srgbClr val="FFFFFF"/>
-                </a:solidFill>
-                <a:effectLst/>
-                <a:uFillTx/>
-                <a:latin typeface="3270 Nerd Font"/>
-              </a:rPr>
-              <a:t> </a:t>
-            </a:r>
-            <a:endParaRPr lang="en-US" sz="3200" b="0" u="none" strike="noStrike">
-              <a:solidFill>
-                <a:srgbClr val="FFFFFF"/>
-              </a:solidFill>
-              <a:effectLst/>
-              <a:uFillTx/>
-              <a:latin typeface="Arial"/>
-            </a:endParaRPr>
-          </a:p>
-        </p:txBody>
-      </p:sp>
-      <p:pic>
-        <p:nvPicPr>
-          <p:cNvPr id="33" name=""/>
-          <p:cNvPicPr/>
-          <p:nvPr/>
-        </p:nvPicPr>
-        <p:blipFill>
-          <a:blip r:embed="rId1">
-            <a:alphaModFix amt="68000"/>
-          </a:blip>
-          <a:stretch/>
-        </p:blipFill>
-        <p:spPr>
-          <a:xfrm>
-            <a:off x="7507800" y="2971800"/>
-            <a:ext cx="2057400" cy="2057400"/>
-          </a:xfrm>
-          <a:prstGeom prst="rect">
-            <a:avLst/>
-          </a:prstGeom>
-          <a:noFill/>
-          <a:ln w="0">
-            <a:noFill/>
-          </a:ln>
-        </p:spPr>
-      </p:pic>
-      <p:pic>
-        <p:nvPicPr>
-          <p:cNvPr id="34" name=""/>
-          <p:cNvPicPr/>
-          <p:nvPr/>
-        </p:nvPicPr>
-        <p:blipFill>
-          <a:blip r:embed="rId2">
-            <a:alphaModFix amt="68000"/>
-          </a:blip>
-          <a:stretch/>
-        </p:blipFill>
-        <p:spPr>
-          <a:xfrm>
-            <a:off x="6629400" y="1143000"/>
-            <a:ext cx="2935800" cy="1955160"/>
-          </a:xfrm>
-          <a:prstGeom prst="rect">
-            <a:avLst/>
-          </a:prstGeom>
-          <a:noFill/>
-          <a:ln w="0">
-            <a:noFill/>
-          </a:ln>
-        </p:spPr>
-      </p:pic>
-      <p:sp>
-        <p:nvSpPr>
-          <p:cNvPr id="35" name=""/>
-          <p:cNvSpPr txBox="1"/>
-          <p:nvPr/>
-        </p:nvSpPr>
-        <p:spPr>
-          <a:xfrm>
-            <a:off x="9369360" y="5257800"/>
-            <a:ext cx="653760" cy="401400"/>
-          </a:xfrm>
-          <a:prstGeom prst="rect">
-            <a:avLst/>
-          </a:prstGeom>
-          <a:noFill/>
-          <a:ln w="0">
-            <a:noFill/>
-          </a:ln>
-        </p:spPr>
-        <p:txBody>
-          <a:bodyPr wrap="none" lIns="90000" tIns="45000" rIns="90000" bIns="45000" anchor="t">
-            <a:spAutoFit/>
-          </a:bodyPr>
-          <a:p>
-            <a:r>
-              <a:rPr lang="en-US" sz="1800" b="0" u="none" strike="noStrike">
-                <a:solidFill>
-                  <a:srgbClr val="FFFFFF"/>
-                </a:solidFill>
-                <a:effectLst/>
-                <a:uFillTx/>
-                <a:latin typeface="Arial"/>
-              </a:rPr>
-              <a:t>[4,5]</a:t>
-            </a:r>
-            <a:endParaRPr lang="en-US" sz="1800" b="0" u="none" strike="noStrike">
-              <a:solidFill>
-                <a:srgbClr val="FFFFFF"/>
-              </a:solidFill>
-              <a:effectLst/>
-              <a:uFillTx/>
-              <a:latin typeface="Arial"/>
-            </a:endParaRPr>
-          </a:p>
-        </p:txBody>
-      </p:sp>
-    </p:spTree>
-  </p:cSld>
-  <p:timing>
-    <p:tnLst>
-      <p:par>
-        <p:cTn id="49" dur="indefinite" restart="never" nodeType="tmRoot">
-          <p:childTnLst>
-            <p:seq>
-              <p:cTn id="50" dur="indefinite" nodeType="mainSeq">
-                <p:childTnLst>
-                  <p:par>
-                    <p:cTn id="51" fill="hold">
-                      <p:stCondLst>
-                        <p:cond delay="indefinite"/>
-                      </p:stCondLst>
-                      <p:childTnLst>
-                        <p:par>
-                          <p:cTn id="52" fill="hold">
-                            <p:stCondLst>
-                              <p:cond delay="0"/>
-                            </p:stCondLst>
-                            <p:childTnLst>
-                              <p:par>
-                                <p:cTn id="53" presetID="1" presetClass="entr" fill="hold" nodeType="clickEffect">
-                                  <p:stCondLst>
-                                    <p:cond delay="0"/>
-                                  </p:stCondLst>
-                                  <p:childTnLst>
-                                    <p:set>
-                                      <p:cBhvr>
-                                        <p:cTn id="54" dur="1" fill="hold">
-                                          <p:stCondLst>
-                                            <p:cond delay="0"/>
-                                          </p:stCondLst>
-                                        </p:cTn>
-                                        <p:tgtEl>
-                                          <p:spTgt spid="32">
-                                            <p:txEl>
-                                              <p:pRg st="0" end="0"/>
-                                            </p:txEl>
-                                          </p:spTgt>
-                                        </p:tgtEl>
-                                        <p:attrNameLst>
-                                          <p:attrName>style.visibility</p:attrName>
-                                        </p:attrNameLst>
-                                      </p:cBhvr>
-                                      <p:to>
-                                        <p:strVal val="visible"/>
-                                      </p:to>
-                                    </p:set>
-                                  </p:childTnLst>
-                                </p:cTn>
-                              </p:par>
-                            </p:childTnLst>
-                          </p:cTn>
-                        </p:par>
-                      </p:childTnLst>
-                    </p:cTn>
-                  </p:par>
-                  <p:par>
-                    <p:cTn id="55" fill="hold">
-                      <p:stCondLst>
-                        <p:cond delay="indefinite"/>
-                      </p:stCondLst>
-                      <p:childTnLst>
-                        <p:par>
-                          <p:cTn id="56" fill="hold">
-                            <p:stCondLst>
-                              <p:cond delay="0"/>
-                            </p:stCondLst>
-                            <p:childTnLst>
-                              <p:par>
-                                <p:cTn id="57" presetID="1" presetClass="entr" fill="hold" nodeType="clickEffect">
-                                  <p:stCondLst>
-                                    <p:cond delay="0"/>
-                                  </p:stCondLst>
-                                  <p:childTnLst>
-                                    <p:set>
-                                      <p:cBhvr>
-                                        <p:cTn id="58" dur="1" fill="hold">
-                                          <p:stCondLst>
-                                            <p:cond delay="0"/>
-                                          </p:stCondLst>
-                                        </p:cTn>
-                                        <p:tgtEl>
-                                          <p:spTgt spid="32">
-                                            <p:txEl>
-                                              <p:pRg st="1" end="1"/>
-                                            </p:txEl>
-                                          </p:spTgt>
-                                        </p:tgtEl>
-                                        <p:attrNameLst>
-                                          <p:attrName>style.visibility</p:attrName>
-                                        </p:attrNameLst>
-                                      </p:cBhvr>
-                                      <p:to>
-                                        <p:strVal val="visible"/>
-                                      </p:to>
-                                    </p:set>
-                                  </p:childTnLst>
-                                </p:cTn>
-                              </p:par>
-                            </p:childTnLst>
-                          </p:cTn>
-                        </p:par>
-                      </p:childTnLst>
-                    </p:cTn>
-                  </p:par>
-                  <p:par>
-                    <p:cTn id="59" fill="hold">
-                      <p:stCondLst>
-                        <p:cond delay="indefinite"/>
-                      </p:stCondLst>
-                      <p:childTnLst>
-                        <p:par>
-                          <p:cTn id="60" fill="hold">
-                            <p:stCondLst>
-                              <p:cond delay="0"/>
-                            </p:stCondLst>
-                            <p:childTnLst>
-                              <p:par>
-                                <p:cTn id="61" presetID="1" presetClass="entr" fill="hold" nodeType="clickEffect">
-                                  <p:stCondLst>
-                                    <p:cond delay="0"/>
-                                  </p:stCondLst>
-                                  <p:childTnLst>
-                                    <p:set>
-                                      <p:cBhvr>
-                                        <p:cTn id="62" dur="1" fill="hold">
-                                          <p:stCondLst>
-                                            <p:cond delay="0"/>
-                                          </p:stCondLst>
-                                        </p:cTn>
-                                        <p:tgtEl>
-                                          <p:spTgt spid="34"/>
-                                        </p:tgtEl>
-                                        <p:attrNameLst>
-                                          <p:attrName>style.visibility</p:attrName>
-                                        </p:attrNameLst>
-                                      </p:cBhvr>
-                                      <p:to>
-                                        <p:strVal val="visible"/>
-                                      </p:to>
-                                    </p:set>
-                                  </p:childTnLst>
-                                </p:cTn>
-                              </p:par>
-                              <p:par>
-                                <p:cTn id="63" presetID="1" presetClass="entr" fill="hold" nodeType="withEffect">
-                                  <p:stCondLst>
-                                    <p:cond delay="0"/>
-                                  </p:stCondLst>
-                                  <p:childTnLst>
-                                    <p:set>
-                                      <p:cBhvr>
-                                        <p:cTn id="64" dur="1" fill="hold">
-                                          <p:stCondLst>
-                                            <p:cond delay="0"/>
-                                          </p:stCondLst>
-                                        </p:cTn>
-                                        <p:tgtEl>
-                                          <p:spTgt spid="33"/>
-                                        </p:tgtEl>
-                                        <p:attrNameLst>
-                                          <p:attrName>style.visibility</p:attrName>
-                                        </p:attrNameLst>
-                                      </p:cBhvr>
-                                      <p:to>
-                                        <p:strVal val="visible"/>
-                                      </p:to>
-                                    </p:set>
-                                  </p:childTnLst>
-                                </p:cTn>
-                              </p:par>
-                              <p:par>
-                                <p:cTn id="65" presetID="1" presetClass="entr" fill="hold" nodeType="withEffect">
-                                  <p:stCondLst>
-                                    <p:cond delay="0"/>
-                                  </p:stCondLst>
-                                  <p:childTnLst>
-                                    <p:set>
-                                      <p:cBhvr>
-                                        <p:cTn id="66" dur="1" fill="hold">
-                                          <p:stCondLst>
-                                            <p:cond delay="0"/>
-                                          </p:stCondLst>
-                                        </p:cTn>
-                                        <p:tgtEl>
-                                          <p:spTgt spid="35">
-                                            <p:txEl>
-                                              <p:pRg st="0" end="0"/>
-                                            </p:txEl>
-                                          </p:spTgt>
-                                        </p:tgtEl>
-                                        <p:attrNameLst>
-                                          <p:attrName>style.visibility</p:attrName>
-                                        </p:attrNameLst>
-                                      </p:cBhvr>
-                                      <p:to>
-                                        <p:strVal val="visible"/>
-                                      </p:to>
-                                    </p:set>
-                                  </p:childTnLst>
-                                </p:cTn>
-                              </p:par>
-                            </p:childTnLst>
-                          </p:cTn>
-                        </p:par>
-                      </p:childTnLst>
-                    </p:cTn>
-                  </p:par>
-                  <p:par>
-                    <p:cTn id="67" fill="hold">
-                      <p:stCondLst>
-                        <p:cond delay="indefinite"/>
-                      </p:stCondLst>
-                      <p:childTnLst>
-                        <p:par>
-                          <p:cTn id="68" fill="hold">
-                            <p:stCondLst>
-                              <p:cond delay="0"/>
-                            </p:stCondLst>
-                            <p:childTnLst>
-                              <p:par>
-                                <p:cTn id="69" presetID="1" presetClass="entr" fill="hold" nodeType="clickEffect">
-                                  <p:stCondLst>
-                                    <p:cond delay="0"/>
-                                  </p:stCondLst>
-                                  <p:childTnLst>
-                                    <p:set>
-                                      <p:cBhvr>
-                                        <p:cTn id="70" dur="1" fill="hold">
-                                          <p:stCondLst>
-                                            <p:cond delay="0"/>
-                                          </p:stCondLst>
-                                        </p:cTn>
-                                        <p:tgtEl>
-                                          <p:spTgt spid="32">
-                                            <p:txEl>
-                                              <p:pRg st="2" end="2"/>
-                                            </p:txEl>
-                                          </p:spTgt>
-                                        </p:tgtEl>
-                                        <p:attrNameLst>
-                                          <p:attrName>style.visibility</p:attrName>
-                                        </p:attrNameLst>
-                                      </p:cBhvr>
-                                      <p:to>
-                                        <p:strVal val="visible"/>
-                                      </p:to>
-                                    </p:set>
-                                  </p:childTnLst>
-                                </p:cTn>
-                              </p:par>
-                            </p:childTnLst>
-                          </p:cTn>
-                        </p:par>
-                      </p:childTnLst>
-                    </p:cTn>
-                  </p:par>
-                </p:childTnLst>
-              </p:cTn>
-              <p:prevCondLst>
-                <p:cond evt="onPrev">
-                  <p:tgtEl>
-                    <p:sldTgt/>
-                  </p:tgtEl>
-                </p:cond>
-              </p:prevCondLst>
-              <p:nextCondLst>
-                <p:cond evt="onNext">
-                  <p:tgtEl>
-                    <p:sldTgt/>
-                  </p:tgtEl>
-                </p:cond>
-              </p:nextCondLst>
-            </p:seq>
-          </p:childTnLst>
-        </p:cTn>
-      </p:par>
-    </p:tnLst>
-  </p:timing>
-</p:sld>
-</file>
-
-<file path=ppt/slides/slide6.xml><?xml version="1.0" encoding="utf-8"?>
-<p:sld xmlns:a="http://schemas.openxmlformats.org/drawingml/2006/main" xmlns:p="http://schemas.openxmlformats.org/presentationml/2006/main" xmlns:r="http://schemas.openxmlformats.org/officeDocument/2006/relationships" xmlns:p14="http://schemas.microsoft.com/office/powerpoint/2010/main" xmlns:p15="http://schemas.microsoft.com/office/powerpoint/2012/main" xmlns:mc="http://schemas.openxmlformats.org/markup-compatibility/2006">
-  <p:cSld>
-    <p:bg>
-      <p:bgPr>
-        <a:gradFill rotWithShape="0">
-          <a:gsLst>
-            <a:gs pos="0">
-              <a:srgbClr val="282828"/>
-            </a:gs>
-            <a:gs pos="100000">
-              <a:srgbClr val="1D2021"/>
-            </a:gs>
-          </a:gsLst>
-          <a:path path="rect">
-            <a:fillToRect l="50000" t="50000" r="50000" b="50000"/>
-          </a:path>
-        </a:gradFill>
-      </p:bgPr>
-    </p:bg>
-    <p:spTree>
-      <p:nvGrpSpPr>
-        <p:cNvPr id="1" name=""/>
-        <p:cNvGrpSpPr/>
-        <p:nvPr/>
-      </p:nvGrpSpPr>
-      <p:grpSpPr>
-        <a:xfrm>
-          <a:off x="0" y="0"/>
-          <a:ext cx="0" cy="0"/>
-          <a:chOff x="0" y="0"/>
-          <a:chExt cx="0" cy="0"/>
-        </a:xfrm>
-      </p:grpSpPr>
-      <p:sp>
-        <p:nvSpPr>
-          <p:cNvPr id="36" name="PlaceHolder 1"/>
+          <p:cNvPr id="32" name="PlaceHolder 1"/>
           <p:cNvSpPr>
             <a:spLocks noGrp="1"/>
           </p:cNvSpPr>
@@ -9885,7 +9565,7 @@
       </p:sp>
       <p:graphicFrame>
         <p:nvGraphicFramePr>
-          <p:cNvPr id="37" name=""/>
+          <p:cNvPr id="33" name=""/>
           <p:cNvGraphicFramePr/>
           <p:nvPr/>
         </p:nvGraphicFramePr>
@@ -10428,7 +10108,243 @@
 </p:sld>
 </file>
 
-<file path=ppt/slides/slide7.xml><?xml version="1.0" encoding="utf-8"?>
+<file path=ppt/slides/slide5.xml><?xml version="1.0" encoding="utf-8"?>
+<p:sld xmlns:a="http://schemas.openxmlformats.org/drawingml/2006/main" xmlns:p="http://schemas.openxmlformats.org/presentationml/2006/main" xmlns:r="http://schemas.openxmlformats.org/officeDocument/2006/relationships" xmlns:p14="http://schemas.microsoft.com/office/powerpoint/2010/main" xmlns:p15="http://schemas.microsoft.com/office/powerpoint/2012/main" xmlns:mc="http://schemas.openxmlformats.org/markup-compatibility/2006">
+  <p:cSld>
+    <p:bg>
+      <p:bgPr>
+        <a:gradFill rotWithShape="0">
+          <a:gsLst>
+            <a:gs pos="0">
+              <a:srgbClr val="282828"/>
+            </a:gs>
+            <a:gs pos="100000">
+              <a:srgbClr val="1D2021"/>
+            </a:gs>
+          </a:gsLst>
+          <a:path path="rect">
+            <a:fillToRect l="50000" t="50000" r="50000" b="50000"/>
+          </a:path>
+        </a:gradFill>
+      </p:bgPr>
+    </p:bg>
+    <p:spTree>
+      <p:nvGrpSpPr>
+        <p:cNvPr id="1" name=""/>
+        <p:cNvGrpSpPr/>
+        <p:nvPr/>
+      </p:nvGrpSpPr>
+      <p:grpSpPr>
+        <a:xfrm>
+          <a:off x="0" y="0"/>
+          <a:ext cx="0" cy="0"/>
+          <a:chOff x="0" y="0"/>
+          <a:chExt cx="0" cy="0"/>
+        </a:xfrm>
+      </p:grpSpPr>
+      <p:sp>
+        <p:nvSpPr>
+          <p:cNvPr id="34" name="PlaceHolder 1"/>
+          <p:cNvSpPr>
+            <a:spLocks noGrp="1"/>
+          </p:cNvSpPr>
+          <p:nvPr>
+            <p:ph type="title"/>
+          </p:nvPr>
+        </p:nvSpPr>
+        <p:spPr>
+          <a:xfrm>
+            <a:off x="503640" y="225720"/>
+            <a:ext cx="9068760" cy="946440"/>
+          </a:xfrm>
+          <a:prstGeom prst="rect">
+            <a:avLst/>
+          </a:prstGeom>
+          <a:noFill/>
+          <a:ln w="0">
+            <a:noFill/>
+          </a:ln>
+        </p:spPr>
+        <p:txBody>
+          <a:bodyPr lIns="0" tIns="0" rIns="0" bIns="0" anchor="ctr">
+            <a:spAutoFit/>
+          </a:bodyPr>
+          <a:p>
+            <a:pPr indent="0" algn="ctr">
+              <a:buNone/>
+            </a:pPr>
+            <a:r>
+              <a:rPr lang="en-US" sz="4400" b="1" u="none" strike="noStrike">
+                <a:solidFill>
+                  <a:srgbClr val="FFFFFF"/>
+                </a:solidFill>
+                <a:effectLst/>
+                <a:uFillTx/>
+                <a:latin typeface="3270 Nerd Font"/>
+              </a:rPr>
+              <a:t>Der erste Mikrocontroller</a:t>
+            </a:r>
+            <a:endParaRPr lang="en-US" sz="4400" b="0" u="none" strike="noStrike">
+              <a:solidFill>
+                <a:srgbClr val="FFFFFF"/>
+              </a:solidFill>
+              <a:effectLst/>
+              <a:uFillTx/>
+              <a:latin typeface="Arial"/>
+            </a:endParaRPr>
+          </a:p>
+        </p:txBody>
+      </p:sp>
+      <p:sp>
+        <p:nvSpPr>
+          <p:cNvPr id="35" name="PlaceHolder 2"/>
+          <p:cNvSpPr>
+            <a:spLocks noGrp="1"/>
+          </p:cNvSpPr>
+          <p:nvPr>
+            <p:ph/>
+          </p:nvPr>
+        </p:nvSpPr>
+        <p:spPr>
+          <a:xfrm>
+            <a:off x="503640" y="1172160"/>
+            <a:ext cx="9068760" cy="1416960"/>
+          </a:xfrm>
+          <a:prstGeom prst="rect">
+            <a:avLst/>
+          </a:prstGeom>
+          <a:noFill/>
+          <a:ln w="0">
+            <a:noFill/>
+          </a:ln>
+        </p:spPr>
+        <p:txBody>
+          <a:bodyPr lIns="0" tIns="0" rIns="0" bIns="0" anchor="t">
+            <a:normAutofit/>
+          </a:bodyPr>
+          <a:p>
+            <a:pPr indent="0" algn="l">
+              <a:spcBef>
+                <a:spcPts val="1414"/>
+              </a:spcBef>
+              <a:buNone/>
+            </a:pPr>
+            <a:r>
+              <a:rPr lang="en-US" sz="3200" b="0" u="none" strike="noStrike">
+                <a:solidFill>
+                  <a:srgbClr val="FFFFFF"/>
+                </a:solidFill>
+                <a:effectLst/>
+                <a:uFillTx/>
+                <a:latin typeface="3270 Nerd Font"/>
+                <a:ea typeface="Noto Sans CJK SC"/>
+              </a:rPr>
+              <a:t>September 1971: Texas Instruments baute den ersten Mikrocontroller, </a:t>
+            </a:r>
+            <a:br>
+              <a:rPr sz="3200"/>
+            </a:br>
+            <a:r>
+              <a:rPr lang="en-US" sz="3200" b="0" u="none" strike="noStrike">
+                <a:solidFill>
+                  <a:srgbClr val="FFFFFF"/>
+                </a:solidFill>
+                <a:effectLst/>
+                <a:uFillTx/>
+                <a:latin typeface="3270 Nerd Font"/>
+                <a:ea typeface="Noto Sans CJK SC"/>
+              </a:rPr>
+              <a:t>den TMS 1802 NC.</a:t>
+            </a:r>
+            <a:endParaRPr lang="en-US" sz="3200" b="0" u="none" strike="noStrike">
+              <a:solidFill>
+                <a:srgbClr val="FFFFFF"/>
+              </a:solidFill>
+              <a:effectLst/>
+              <a:uFillTx/>
+              <a:latin typeface="Arial"/>
+            </a:endParaRPr>
+          </a:p>
+        </p:txBody>
+      </p:sp>
+      <p:pic>
+        <p:nvPicPr>
+          <p:cNvPr id="36" name=""/>
+          <p:cNvPicPr/>
+          <p:nvPr/>
+        </p:nvPicPr>
+        <p:blipFill>
+          <a:blip r:embed="rId1">
+            <a:alphaModFix amt="0"/>
+          </a:blip>
+          <a:stretch/>
+        </p:blipFill>
+        <p:spPr>
+          <a:xfrm rot="5403000">
+            <a:off x="1629360" y="1346760"/>
+            <a:ext cx="2737440" cy="5536440"/>
+          </a:xfrm>
+          <a:prstGeom prst="rect">
+            <a:avLst/>
+          </a:prstGeom>
+          <a:noFill/>
+          <a:ln w="0">
+            <a:noFill/>
+          </a:ln>
+        </p:spPr>
+      </p:pic>
+      <p:sp>
+        <p:nvSpPr>
+          <p:cNvPr id="37" name=""/>
+          <p:cNvSpPr txBox="1"/>
+          <p:nvPr/>
+        </p:nvSpPr>
+        <p:spPr>
+          <a:xfrm>
+            <a:off x="9601200" y="5257800"/>
+            <a:ext cx="461880" cy="401400"/>
+          </a:xfrm>
+          <a:prstGeom prst="rect">
+            <a:avLst/>
+          </a:prstGeom>
+          <a:noFill/>
+          <a:ln w="0">
+            <a:noFill/>
+          </a:ln>
+        </p:spPr>
+        <p:txBody>
+          <a:bodyPr wrap="none" lIns="90000" tIns="45000" rIns="90000" bIns="45000" anchor="t">
+            <a:spAutoFit/>
+          </a:bodyPr>
+          <a:p>
+            <a:r>
+              <a:rPr lang="en-US" sz="1800" b="0" u="none" strike="noStrike">
+                <a:solidFill>
+                  <a:srgbClr val="FFFFFF"/>
+                </a:solidFill>
+                <a:effectLst/>
+                <a:uFillTx/>
+                <a:latin typeface="Arial"/>
+              </a:rPr>
+              <a:t>[9]</a:t>
+            </a:r>
+            <a:endParaRPr lang="en-US" sz="1800" b="0" u="none" strike="noStrike">
+              <a:solidFill>
+                <a:srgbClr val="FFFFFF"/>
+              </a:solidFill>
+              <a:effectLst/>
+              <a:uFillTx/>
+              <a:latin typeface="Arial"/>
+            </a:endParaRPr>
+          </a:p>
+        </p:txBody>
+      </p:sp>
+    </p:spTree>
+  </p:cSld>
+</p:sld>
+</file>
+
+<file path=ppt/slides/slide6.xml><?xml version="1.0" encoding="utf-8"?>
 <p:sld xmlns:a="http://schemas.openxmlformats.org/drawingml/2006/main" xmlns:p="http://schemas.openxmlformats.org/presentationml/2006/main" xmlns:r="http://schemas.openxmlformats.org/officeDocument/2006/relationships" xmlns:p14="http://schemas.microsoft.com/office/powerpoint/2010/main" xmlns:p15="http://schemas.microsoft.com/office/powerpoint/2012/main" xmlns:mc="http://schemas.openxmlformats.org/markup-compatibility/2006">
   <p:cSld>
     <p:bg>
@@ -10540,7 +10456,7 @@
         </p:spPr>
         <p:txBody>
           <a:bodyPr lIns="0" tIns="0" rIns="0" bIns="0" anchor="t">
-            <a:normAutofit lnSpcReduction="9999"/>
+            <a:normAutofit/>
           </a:bodyPr>
           <a:p>
             <a:pPr indent="0" algn="l">
@@ -10557,37 +10473,8 @@
                 <a:effectLst/>
                 <a:uFillTx/>
                 <a:latin typeface="3270 Nerd Font"/>
-                <a:ea typeface="Noto Sans CJK SC"/>
-              </a:rPr>
-              <a:t>September 1971: Texas Instruments baute den ersten Mikrocontroller, </a:t>
-            </a:r>
-            <a:endParaRPr lang="en-US" sz="3200" b="0" u="none" strike="noStrike">
-              <a:solidFill>
-                <a:srgbClr val="FFFFFF"/>
-              </a:solidFill>
-              <a:effectLst/>
-              <a:uFillTx/>
-              <a:latin typeface="Arial"/>
-            </a:endParaRPr>
-          </a:p>
-          <a:p>
-            <a:pPr indent="0" algn="l">
-              <a:spcBef>
-                <a:spcPts val="1414"/>
-              </a:spcBef>
-              <a:buNone/>
-            </a:pPr>
-            <a:r>
-              <a:rPr lang="en-US" sz="3200" b="0" u="none" strike="noStrike">
-                <a:solidFill>
-                  <a:srgbClr val="FFFFFF"/>
-                </a:solidFill>
-                <a:effectLst/>
-                <a:uFillTx/>
-                <a:latin typeface="3270 Nerd Font"/>
-                <a:ea typeface="Noto Sans CJK SC"/>
-              </a:rPr>
-              <a:t>den TMS 1802 NC.</a:t>
+              </a:rPr>
+              <a:t>Der TMS 1802 NC kam danach als Teil der TMS0100 Serie 1974 auf den Markt  </a:t>
             </a:r>
             <a:endParaRPr lang="en-US" sz="3200" b="0" u="none" strike="noStrike">
               <a:solidFill>
@@ -10613,9 +10500,9 @@
           <a:stretch/>
         </p:blipFill>
         <p:spPr>
-          <a:xfrm rot="5403000">
-            <a:off x="1651680" y="1357560"/>
-            <a:ext cx="2717280" cy="5495040"/>
+          <a:xfrm rot="5404200">
+            <a:off x="1437120" y="1892880"/>
+            <a:ext cx="2376360" cy="4804560"/>
           </a:xfrm>
           <a:prstGeom prst="rect">
             <a:avLst/>
@@ -10635,7 +10522,7 @@
         <p:spPr>
           <a:xfrm>
             <a:off x="9601200" y="5257800"/>
-            <a:ext cx="461880" cy="401400"/>
+            <a:ext cx="653760" cy="401400"/>
           </a:xfrm>
           <a:prstGeom prst="rect">
             <a:avLst/>
@@ -10677,7 +10564,7 @@
 </p:sld>
 </file>
 
-<file path=ppt/slides/slide8.xml><?xml version="1.0" encoding="utf-8"?>
+<file path=ppt/slides/slide7.xml><?xml version="1.0" encoding="utf-8"?>
 <p:sld xmlns:a="http://schemas.openxmlformats.org/drawingml/2006/main" xmlns:p="http://schemas.openxmlformats.org/presentationml/2006/main" xmlns:r="http://schemas.openxmlformats.org/officeDocument/2006/relationships" xmlns:p14="http://schemas.microsoft.com/office/powerpoint/2010/main" xmlns:p15="http://schemas.microsoft.com/office/powerpoint/2012/main" xmlns:mc="http://schemas.openxmlformats.org/markup-compatibility/2006">
   <p:cSld>
     <p:bg>
@@ -10776,8 +10663,8 @@
         </p:nvSpPr>
         <p:spPr>
           <a:xfrm>
-            <a:off x="503640" y="1172160"/>
-            <a:ext cx="9068760" cy="1416960"/>
+            <a:off x="5257800" y="1371600"/>
+            <a:ext cx="4314600" cy="3886200"/>
           </a:xfrm>
           <a:prstGeom prst="rect">
             <a:avLst/>
@@ -10792,11 +10679,16 @@
             <a:normAutofit/>
           </a:bodyPr>
           <a:p>
-            <a:pPr indent="0" algn="l">
+            <a:pPr marL="432000" indent="-324000" algn="l">
               <a:spcBef>
                 <a:spcPts val="1414"/>
               </a:spcBef>
-              <a:buNone/>
+              <a:buClr>
+                <a:srgbClr val="FFFFFF"/>
+              </a:buClr>
+              <a:buSzPct val="85000"/>
+              <a:buFont typeface="Wingdings" charset="2"/>
+              <a:buChar char=""/>
             </a:pPr>
             <a:r>
               <a:rPr lang="en-US" sz="3200" b="0" u="none" strike="noStrike">
@@ -10807,7 +10699,103 @@
                 <a:uFillTx/>
                 <a:latin typeface="3270 Nerd Font"/>
               </a:rPr>
-              <a:t>Der TMS 1802 NC kam danach als Teil der TMS1000 Serie 1974 auf den Markt  </a:t>
+              <a:t>Damals 20$,  heute 165$</a:t>
+            </a:r>
+            <a:endParaRPr lang="en-US" sz="3200" b="0" u="none" strike="noStrike">
+              <a:solidFill>
+                <a:srgbClr val="FFFFFF"/>
+              </a:solidFill>
+              <a:effectLst/>
+              <a:uFillTx/>
+              <a:latin typeface="Arial"/>
+            </a:endParaRPr>
+          </a:p>
+          <a:p>
+            <a:pPr marL="432000" indent="-324000" algn="l">
+              <a:spcBef>
+                <a:spcPts val="1414"/>
+              </a:spcBef>
+              <a:buClr>
+                <a:srgbClr val="FFFFFF"/>
+              </a:buClr>
+              <a:buSzPct val="85000"/>
+              <a:buFont typeface="Wingdings" charset="2"/>
+              <a:buChar char=""/>
+            </a:pPr>
+            <a:r>
+              <a:rPr lang="en-US" sz="3200" b="0" u="none" strike="noStrike">
+                <a:solidFill>
+                  <a:srgbClr val="FFFFFF"/>
+                </a:solidFill>
+                <a:effectLst/>
+                <a:uFillTx/>
+                <a:latin typeface="3270 Nerd Font"/>
+              </a:rPr>
+              <a:t>4-Bit CPU</a:t>
+            </a:r>
+            <a:endParaRPr lang="en-US" sz="3200" b="0" u="none" strike="noStrike">
+              <a:solidFill>
+                <a:srgbClr val="FFFFFF"/>
+              </a:solidFill>
+              <a:effectLst/>
+              <a:uFillTx/>
+              <a:latin typeface="Arial"/>
+            </a:endParaRPr>
+          </a:p>
+          <a:p>
+            <a:pPr marL="432000" indent="-324000" algn="l">
+              <a:spcBef>
+                <a:spcPts val="1414"/>
+              </a:spcBef>
+              <a:buClr>
+                <a:srgbClr val="FFFFFF"/>
+              </a:buClr>
+              <a:buSzPct val="85000"/>
+              <a:buFont typeface="Wingdings" charset="2"/>
+              <a:buChar char=""/>
+            </a:pPr>
+            <a:r>
+              <a:rPr lang="en-US" sz="3200" b="0" u="none" strike="noStrike">
+                <a:solidFill>
+                  <a:srgbClr val="FFFFFF"/>
+                </a:solidFill>
+                <a:effectLst/>
+                <a:uFillTx/>
+                <a:latin typeface="3270 Nerd Font"/>
+              </a:rPr>
+              <a:t>300 kHz</a:t>
+            </a:r>
+            <a:endParaRPr lang="en-US" sz="3200" b="0" u="none" strike="noStrike">
+              <a:solidFill>
+                <a:srgbClr val="FFFFFF"/>
+              </a:solidFill>
+              <a:effectLst/>
+              <a:uFillTx/>
+              <a:latin typeface="Arial"/>
+            </a:endParaRPr>
+          </a:p>
+          <a:p>
+            <a:pPr marL="432000" indent="-324000" algn="l">
+              <a:spcBef>
+                <a:spcPts val="1414"/>
+              </a:spcBef>
+              <a:buClr>
+                <a:srgbClr val="FFFFFF"/>
+              </a:buClr>
+              <a:buSzPct val="85000"/>
+              <a:buFont typeface="Wingdings" charset="2"/>
+              <a:buChar char=""/>
+            </a:pPr>
+            <a:r>
+              <a:rPr lang="en-US" sz="3200" b="0" u="none" strike="noStrike">
+                <a:solidFill>
+                  <a:srgbClr val="FFFFFF"/>
+                </a:solidFill>
+                <a:effectLst/>
+                <a:uFillTx/>
+                <a:latin typeface="3270 Nerd Font"/>
+              </a:rPr>
+              <a:t>182 Bit RAM</a:t>
             </a:r>
             <a:endParaRPr lang="en-US" sz="3200" b="0" u="none" strike="noStrike">
               <a:solidFill>
@@ -10833,35 +10821,9 @@
           <a:stretch/>
         </p:blipFill>
         <p:spPr>
-          <a:xfrm rot="5403000">
-            <a:off x="1651680" y="1357560"/>
-            <a:ext cx="2717280" cy="5495040"/>
-          </a:xfrm>
-          <a:prstGeom prst="rect">
-            <a:avLst/>
-          </a:prstGeom>
-          <a:noFill/>
-          <a:ln w="0">
-            <a:noFill/>
-          </a:ln>
-        </p:spPr>
-      </p:pic>
-      <p:pic>
-        <p:nvPicPr>
-          <p:cNvPr id="45" name=""/>
-          <p:cNvPicPr/>
-          <p:nvPr/>
-        </p:nvPicPr>
-        <p:blipFill>
-          <a:blip r:embed="rId2">
-            <a:alphaModFix amt="0"/>
-          </a:blip>
-          <a:stretch/>
-        </p:blipFill>
-        <p:spPr>
-          <a:xfrm>
-            <a:off x="6172200" y="2665800"/>
-            <a:ext cx="3663360" cy="2820600"/>
+          <a:xfrm rot="5405400">
+            <a:off x="1442160" y="1897560"/>
+            <a:ext cx="2372400" cy="4797720"/>
           </a:xfrm>
           <a:prstGeom prst="rect">
             <a:avLst/>
@@ -10874,14 +10836,14 @@
       </p:pic>
       <p:sp>
         <p:nvSpPr>
-          <p:cNvPr id="46" name=""/>
+          <p:cNvPr id="45" name=""/>
           <p:cNvSpPr txBox="1"/>
           <p:nvPr/>
         </p:nvSpPr>
         <p:spPr>
           <a:xfrm>
-            <a:off x="9423000" y="5257800"/>
-            <a:ext cx="653760" cy="401400"/>
+            <a:off x="9572400" y="5257800"/>
+            <a:ext cx="461880" cy="401400"/>
           </a:xfrm>
           <a:prstGeom prst="rect">
             <a:avLst/>
@@ -10905,9 +10867,305 @@
                 <a:uFillTx/>
                 <a:latin typeface="Arial"/>
               </a:rPr>
-              <a:t>[9,8]</a:t>
+              <a:t>[9]</a:t>
             </a:r>
             <a:endParaRPr lang="en-US" sz="1800" b="0" u="none" strike="noStrike">
+              <a:solidFill>
+                <a:srgbClr val="FFFFFF"/>
+              </a:solidFill>
+              <a:effectLst/>
+              <a:uFillTx/>
+              <a:latin typeface="Arial"/>
+            </a:endParaRPr>
+          </a:p>
+        </p:txBody>
+      </p:sp>
+    </p:spTree>
+  </p:cSld>
+</p:sld>
+</file>
+
+<file path=ppt/slides/slide8.xml><?xml version="1.0" encoding="utf-8"?>
+<p:sld xmlns:a="http://schemas.openxmlformats.org/drawingml/2006/main" xmlns:p="http://schemas.openxmlformats.org/presentationml/2006/main" xmlns:r="http://schemas.openxmlformats.org/officeDocument/2006/relationships" xmlns:p14="http://schemas.microsoft.com/office/powerpoint/2010/main" xmlns:p15="http://schemas.microsoft.com/office/powerpoint/2012/main" xmlns:mc="http://schemas.openxmlformats.org/markup-compatibility/2006">
+  <p:cSld>
+    <p:bg>
+      <p:bgPr>
+        <a:gradFill rotWithShape="0">
+          <a:gsLst>
+            <a:gs pos="0">
+              <a:srgbClr val="282828"/>
+            </a:gs>
+            <a:gs pos="100000">
+              <a:srgbClr val="1D2021"/>
+            </a:gs>
+          </a:gsLst>
+          <a:path path="rect">
+            <a:fillToRect l="50000" t="50000" r="50000" b="50000"/>
+          </a:path>
+        </a:gradFill>
+      </p:bgPr>
+    </p:bg>
+    <p:spTree>
+      <p:nvGrpSpPr>
+        <p:cNvPr id="1" name=""/>
+        <p:cNvGrpSpPr/>
+        <p:nvPr/>
+      </p:nvGrpSpPr>
+      <p:grpSpPr>
+        <a:xfrm>
+          <a:off x="0" y="0"/>
+          <a:ext cx="0" cy="0"/>
+          <a:chOff x="0" y="0"/>
+          <a:chExt cx="0" cy="0"/>
+        </a:xfrm>
+      </p:grpSpPr>
+      <p:sp>
+        <p:nvSpPr>
+          <p:cNvPr id="46" name="PlaceHolder 1"/>
+          <p:cNvSpPr>
+            <a:spLocks noGrp="1"/>
+          </p:cNvSpPr>
+          <p:nvPr>
+            <p:ph type="title"/>
+          </p:nvPr>
+        </p:nvSpPr>
+        <p:spPr>
+          <a:xfrm>
+            <a:off x="503640" y="225720"/>
+            <a:ext cx="9068760" cy="946440"/>
+          </a:xfrm>
+          <a:prstGeom prst="rect">
+            <a:avLst/>
+          </a:prstGeom>
+          <a:noFill/>
+          <a:ln w="0">
+            <a:noFill/>
+          </a:ln>
+        </p:spPr>
+        <p:txBody>
+          <a:bodyPr lIns="0" tIns="0" rIns="0" bIns="0" anchor="ctr">
+            <a:spAutoFit/>
+          </a:bodyPr>
+          <a:p>
+            <a:pPr indent="0" algn="ctr">
+              <a:buNone/>
+            </a:pPr>
+            <a:r>
+              <a:rPr lang="en-US" sz="4400" b="1" u="none" strike="noStrike">
+                <a:solidFill>
+                  <a:srgbClr val="FFFFFF"/>
+                </a:solidFill>
+                <a:effectLst/>
+                <a:uFillTx/>
+                <a:latin typeface="3270 Nerd Font"/>
+              </a:rPr>
+              <a:t>Der erste Mikroprozessor</a:t>
+            </a:r>
+            <a:endParaRPr lang="en-US" sz="4400" b="0" u="none" strike="noStrike">
+              <a:solidFill>
+                <a:srgbClr val="FFFFFF"/>
+              </a:solidFill>
+              <a:effectLst/>
+              <a:uFillTx/>
+              <a:latin typeface="Arial"/>
+            </a:endParaRPr>
+          </a:p>
+        </p:txBody>
+      </p:sp>
+      <p:sp>
+        <p:nvSpPr>
+          <p:cNvPr id="47" name="PlaceHolder 2"/>
+          <p:cNvSpPr>
+            <a:spLocks noGrp="1"/>
+          </p:cNvSpPr>
+          <p:nvPr>
+            <p:ph/>
+          </p:nvPr>
+        </p:nvSpPr>
+        <p:spPr>
+          <a:xfrm>
+            <a:off x="503640" y="1176840"/>
+            <a:ext cx="9097560" cy="1416960"/>
+          </a:xfrm>
+          <a:prstGeom prst="rect">
+            <a:avLst/>
+          </a:prstGeom>
+          <a:noFill/>
+          <a:ln w="0">
+            <a:noFill/>
+          </a:ln>
+        </p:spPr>
+        <p:txBody>
+          <a:bodyPr lIns="0" tIns="0" rIns="0" bIns="0" anchor="t">
+            <a:normAutofit/>
+          </a:bodyPr>
+          <a:p>
+            <a:pPr indent="0" algn="l">
+              <a:spcBef>
+                <a:spcPts val="1414"/>
+              </a:spcBef>
+              <a:buNone/>
+            </a:pPr>
+            <a:r>
+              <a:rPr lang="en-US" sz="3200" b="0" u="none" strike="noStrike">
+                <a:solidFill>
+                  <a:srgbClr val="FFFFFF"/>
+                </a:solidFill>
+                <a:effectLst/>
+                <a:uFillTx/>
+                <a:latin typeface="3270 Nerd Font"/>
+              </a:rPr>
+              <a:t>November 1971: Der Intel 4004</a:t>
+            </a:r>
+            <a:r>
+              <a:rPr lang="en-US" sz="3200" b="0" u="none" strike="noStrike">
+                <a:solidFill>
+                  <a:srgbClr val="FFFFFF"/>
+                </a:solidFill>
+                <a:effectLst/>
+                <a:uFillTx/>
+                <a:latin typeface="3270 Nerd Font"/>
+              </a:rPr>
+              <a:t> ist der erste Mikroprozessor auf einem einzigen C</a:t>
+            </a:r>
+            <a:r>
+              <a:rPr lang="en-US" sz="3200" b="0" u="none" strike="noStrike">
+                <a:solidFill>
+                  <a:srgbClr val="FFFFFF"/>
+                </a:solidFill>
+                <a:effectLst/>
+                <a:uFillTx/>
+                <a:latin typeface="3270 Nerd Font"/>
+              </a:rPr>
+              <a:t>hip</a:t>
+            </a:r>
+            <a:endParaRPr lang="en-US" sz="3200" b="0" u="none" strike="noStrike">
+              <a:solidFill>
+                <a:srgbClr val="FFFFFF"/>
+              </a:solidFill>
+              <a:effectLst/>
+              <a:uFillTx/>
+              <a:latin typeface="Arial"/>
+            </a:endParaRPr>
+          </a:p>
+        </p:txBody>
+      </p:sp>
+      <p:pic>
+        <p:nvPicPr>
+          <p:cNvPr id="48" name=""/>
+          <p:cNvPicPr/>
+          <p:nvPr/>
+        </p:nvPicPr>
+        <p:blipFill>
+          <a:blip r:embed="rId1">
+            <a:alphaModFix amt="0"/>
+          </a:blip>
+          <a:stretch/>
+        </p:blipFill>
+        <p:spPr>
+          <a:xfrm>
+            <a:off x="228600" y="2593800"/>
+            <a:ext cx="4343400" cy="2892600"/>
+          </a:xfrm>
+          <a:prstGeom prst="rect">
+            <a:avLst/>
+          </a:prstGeom>
+          <a:noFill/>
+          <a:ln w="0">
+            <a:noFill/>
+          </a:ln>
+        </p:spPr>
+      </p:pic>
+      <p:sp>
+        <p:nvSpPr>
+          <p:cNvPr id="49" name=""/>
+          <p:cNvSpPr txBox="1"/>
+          <p:nvPr/>
+        </p:nvSpPr>
+        <p:spPr>
+          <a:xfrm>
+            <a:off x="9572400" y="5257800"/>
+            <a:ext cx="461880" cy="401400"/>
+          </a:xfrm>
+          <a:prstGeom prst="rect">
+            <a:avLst/>
+          </a:prstGeom>
+          <a:noFill/>
+          <a:ln w="0">
+            <a:noFill/>
+          </a:ln>
+        </p:spPr>
+        <p:txBody>
+          <a:bodyPr wrap="none" lIns="90000" tIns="45000" rIns="90000" bIns="45000" anchor="t">
+            <a:spAutoFit/>
+          </a:bodyPr>
+          <a:p>
+            <a:r>
+              <a:rPr lang="en-US" sz="1800" b="0" u="none" strike="noStrike">
+                <a:solidFill>
+                  <a:srgbClr val="FFFFFF"/>
+                </a:solidFill>
+                <a:effectLst/>
+                <a:uFillTx/>
+                <a:latin typeface="Arial"/>
+              </a:rPr>
+              <a:t>[6]</a:t>
+            </a:r>
+            <a:endParaRPr lang="en-US" sz="1800" b="0" u="none" strike="noStrike">
+              <a:solidFill>
+                <a:srgbClr val="FFFFFF"/>
+              </a:solidFill>
+              <a:effectLst/>
+              <a:uFillTx/>
+              <a:latin typeface="Arial"/>
+            </a:endParaRPr>
+          </a:p>
+        </p:txBody>
+      </p:sp>
+      <p:sp>
+        <p:nvSpPr>
+          <p:cNvPr id="50" name=""/>
+          <p:cNvSpPr txBox="1"/>
+          <p:nvPr/>
+        </p:nvSpPr>
+        <p:spPr>
+          <a:xfrm>
+            <a:off x="5077080" y="2396880"/>
+            <a:ext cx="4524120" cy="2860920"/>
+          </a:xfrm>
+          <a:prstGeom prst="rect">
+            <a:avLst/>
+          </a:prstGeom>
+          <a:noFill/>
+          <a:ln w="0">
+            <a:noFill/>
+          </a:ln>
+        </p:spPr>
+        <p:txBody>
+          <a:bodyPr lIns="90000" tIns="45000" rIns="90000" bIns="45000" anchor="t">
+            <a:spAutoFit/>
+          </a:bodyPr>
+          <a:p>
+            <a:pPr marL="216000" indent="-216000">
+              <a:buClr>
+                <a:srgbClr val="FFFFFF"/>
+              </a:buClr>
+              <a:buSzPct val="85000"/>
+              <a:buFont typeface="Wingdings" charset="2"/>
+              <a:buChar char=""/>
+            </a:pPr>
+            <a:r>
+              <a:rPr lang="en-US" sz="3200" b="0" u="none" strike="noStrike">
+                <a:solidFill>
+                  <a:srgbClr val="FFFFFF"/>
+                </a:solidFill>
+                <a:effectLst/>
+                <a:uFillTx/>
+                <a:latin typeface="3270 Nerd Font"/>
+              </a:rPr>
+              <a:t>Man benötigt externe Chips für Speicher und Peripherie</a:t>
+            </a:r>
+            <a:endParaRPr lang="en-US" sz="3200" b="0" u="none" strike="noStrike">
               <a:solidFill>
                 <a:srgbClr val="FFFFFF"/>
               </a:solidFill>
@@ -10923,11 +11181,87 @@
   <p:timing>
     <p:tnLst>
       <p:par>
-        <p:cTn id="71" dur="indefinite" restart="never" nodeType="tmRoot">
+        <p:cTn id="65" dur="indefinite" restart="never" nodeType="tmRoot">
           <p:childTnLst>
             <p:seq>
-              <p:cTn id="72" dur="indefinite" nodeType="mainSeq">
+              <p:cTn id="66" dur="indefinite" nodeType="mainSeq">
                 <p:childTnLst>
+                  <p:par>
+                    <p:cTn id="67" fill="hold">
+                      <p:stCondLst>
+                        <p:cond delay="indefinite"/>
+                      </p:stCondLst>
+                      <p:childTnLst>
+                        <p:par>
+                          <p:cTn id="68" fill="hold">
+                            <p:stCondLst>
+                              <p:cond delay="0"/>
+                            </p:stCondLst>
+                            <p:childTnLst>
+                              <p:par>
+                                <p:cTn id="69" presetID="1" presetClass="entr" fill="hold" nodeType="clickEffect">
+                                  <p:stCondLst>
+                                    <p:cond delay="0"/>
+                                  </p:stCondLst>
+                                  <p:childTnLst>
+                                    <p:set>
+                                      <p:cBhvr>
+                                        <p:cTn id="70" dur="1" fill="hold">
+                                          <p:stCondLst>
+                                            <p:cond delay="0"/>
+                                          </p:stCondLst>
+                                        </p:cTn>
+                                        <p:tgtEl>
+                                          <p:spTgt spid="47">
+                                            <p:txEl>
+                                              <p:pRg st="0" end="0"/>
+                                            </p:txEl>
+                                          </p:spTgt>
+                                        </p:tgtEl>
+                                        <p:attrNameLst>
+                                          <p:attrName>style.visibility</p:attrName>
+                                        </p:attrNameLst>
+                                      </p:cBhvr>
+                                      <p:to>
+                                        <p:strVal val="visible"/>
+                                      </p:to>
+                                    </p:set>
+                                  </p:childTnLst>
+                                </p:cTn>
+                              </p:par>
+                              <p:par>
+                                <p:cTn id="71" presetID="1" presetClass="entr" fill="hold" nodeType="withEffect">
+                                  <p:stCondLst>
+                                    <p:cond delay="0"/>
+                                  </p:stCondLst>
+                                  <p:childTnLst>
+                                    <p:set>
+                                      <p:cBhvr>
+                                        <p:cTn id="72" dur="1" fill="hold">
+                                          <p:stCondLst>
+                                            <p:cond delay="0"/>
+                                          </p:stCondLst>
+                                        </p:cTn>
+                                        <p:tgtEl>
+                                          <p:spTgt spid="48"/>
+                                        </p:tgtEl>
+                                        <p:attrNameLst>
+                                          <p:attrName>style.visibility</p:attrName>
+                                        </p:attrNameLst>
+                                      </p:cBhvr>
+                                      <p:to>
+                                        <p:strVal val="visible"/>
+                                      </p:to>
+                                    </p:set>
+                                  </p:childTnLst>
+                                </p:cTn>
+                              </p:par>
+                            </p:childTnLst>
+                          </p:cTn>
+                        </p:par>
+                      </p:childTnLst>
+                    </p:cTn>
+                  </p:par>
                   <p:par>
                     <p:cTn id="73" fill="hold">
                       <p:stCondLst>
@@ -10954,7 +11288,11 @@
                                           </p:stCondLst>
                                         </p:cTn>
                                         <p:tgtEl>
-                                          <p:spTgt spid="45"/>
+                                          <p:spTgt spid="50">
+                                            <p:txEl>
+                                              <p:pRg st="0" end="0"/>
+                                            </p:txEl>
+                                          </p:spTgt>
                                         </p:tgtEl>
                                         <p:attrNameLst>
                                           <p:attrName>style.visibility</p:attrName>
@@ -11034,7 +11372,7 @@
       </p:grpSpPr>
       <p:sp>
         <p:nvSpPr>
-          <p:cNvPr id="47" name="PlaceHolder 1"/>
+          <p:cNvPr id="51" name="PlaceHolder 1"/>
           <p:cNvSpPr>
             <a:spLocks noGrp="1"/>
           </p:cNvSpPr>
@@ -11072,166 +11410,9 @@
                 <a:uFillTx/>
                 <a:latin typeface="3270 Nerd Font"/>
               </a:rPr>
-              <a:t>Der erste Mikrocontroller</a:t>
+              <a:t>Der erste Mikroprozessor</a:t>
             </a:r>
             <a:endParaRPr lang="en-US" sz="4400" b="0" u="none" strike="noStrike">
-              <a:solidFill>
-                <a:srgbClr val="FFFFFF"/>
-              </a:solidFill>
-              <a:effectLst/>
-              <a:uFillTx/>
-              <a:latin typeface="Arial"/>
-            </a:endParaRPr>
-          </a:p>
-        </p:txBody>
-      </p:sp>
-      <p:sp>
-        <p:nvSpPr>
-          <p:cNvPr id="48" name="PlaceHolder 2"/>
-          <p:cNvSpPr>
-            <a:spLocks noGrp="1"/>
-          </p:cNvSpPr>
-          <p:nvPr>
-            <p:ph/>
-          </p:nvPr>
-        </p:nvSpPr>
-        <p:spPr>
-          <a:xfrm>
-            <a:off x="5257800" y="1371600"/>
-            <a:ext cx="4314600" cy="3886200"/>
-          </a:xfrm>
-          <a:prstGeom prst="rect">
-            <a:avLst/>
-          </a:prstGeom>
-          <a:noFill/>
-          <a:ln w="0">
-            <a:noFill/>
-          </a:ln>
-        </p:spPr>
-        <p:txBody>
-          <a:bodyPr lIns="0" tIns="0" rIns="0" bIns="0" anchor="t">
-            <a:normAutofit/>
-          </a:bodyPr>
-          <a:p>
-            <a:pPr marL="432000" indent="-324000" algn="l">
-              <a:spcBef>
-                <a:spcPts val="1414"/>
-              </a:spcBef>
-              <a:buClr>
-                <a:srgbClr val="FFFFFF"/>
-              </a:buClr>
-              <a:buSzPct val="85000"/>
-              <a:buFont typeface="Wingdings" charset="2"/>
-              <a:buChar char=""/>
-            </a:pPr>
-            <a:r>
-              <a:rPr lang="en-US" sz="3200" b="0" u="none" strike="noStrike">
-                <a:solidFill>
-                  <a:srgbClr val="FFFFFF"/>
-                </a:solidFill>
-                <a:effectLst/>
-                <a:uFillTx/>
-                <a:latin typeface="3270 Nerd Font"/>
-              </a:rPr>
-              <a:t>Damals 20$,  heute 165$</a:t>
-            </a:r>
-            <a:endParaRPr lang="en-US" sz="3200" b="0" u="none" strike="noStrike">
-              <a:solidFill>
-                <a:srgbClr val="FFFFFF"/>
-              </a:solidFill>
-              <a:effectLst/>
-              <a:uFillTx/>
-              <a:latin typeface="Arial"/>
-            </a:endParaRPr>
-          </a:p>
-          <a:p>
-            <a:pPr marL="432000" indent="-324000" algn="l">
-              <a:spcBef>
-                <a:spcPts val="1414"/>
-              </a:spcBef>
-              <a:buClr>
-                <a:srgbClr val="FFFFFF"/>
-              </a:buClr>
-              <a:buSzPct val="85000"/>
-              <a:buFont typeface="Wingdings" charset="2"/>
-              <a:buChar char=""/>
-            </a:pPr>
-            <a:r>
-              <a:rPr lang="en-US" sz="3200" b="0" u="none" strike="noStrike">
-                <a:solidFill>
-                  <a:srgbClr val="FFFFFF"/>
-                </a:solidFill>
-                <a:effectLst/>
-                <a:uFillTx/>
-                <a:latin typeface="3270 Nerd Font"/>
-              </a:rPr>
-              <a:t>4-Bit CPU</a:t>
-            </a:r>
-            <a:endParaRPr lang="en-US" sz="3200" b="0" u="none" strike="noStrike">
-              <a:solidFill>
-                <a:srgbClr val="FFFFFF"/>
-              </a:solidFill>
-              <a:effectLst/>
-              <a:uFillTx/>
-              <a:latin typeface="Arial"/>
-            </a:endParaRPr>
-          </a:p>
-          <a:p>
-            <a:pPr marL="432000" indent="-324000" algn="l">
-              <a:spcBef>
-                <a:spcPts val="1414"/>
-              </a:spcBef>
-              <a:buClr>
-                <a:srgbClr val="FFFFFF"/>
-              </a:buClr>
-              <a:buSzPct val="85000"/>
-              <a:buFont typeface="Wingdings" charset="2"/>
-              <a:buChar char=""/>
-            </a:pPr>
-            <a:r>
-              <a:rPr lang="en-US" sz="3200" b="0" u="none" strike="noStrike">
-                <a:solidFill>
-                  <a:srgbClr val="FFFFFF"/>
-                </a:solidFill>
-                <a:effectLst/>
-                <a:uFillTx/>
-                <a:latin typeface="3270 Nerd Font"/>
-              </a:rPr>
-              <a:t>300 kHz</a:t>
-            </a:r>
-            <a:endParaRPr lang="en-US" sz="3200" b="0" u="none" strike="noStrike">
-              <a:solidFill>
-                <a:srgbClr val="FFFFFF"/>
-              </a:solidFill>
-              <a:effectLst/>
-              <a:uFillTx/>
-              <a:latin typeface="Arial"/>
-            </a:endParaRPr>
-          </a:p>
-          <a:p>
-            <a:pPr marL="432000" indent="-324000" algn="l">
-              <a:spcBef>
-                <a:spcPts val="1414"/>
-              </a:spcBef>
-              <a:buClr>
-                <a:srgbClr val="FFFFFF"/>
-              </a:buClr>
-              <a:buSzPct val="85000"/>
-              <a:buFont typeface="Wingdings" charset="2"/>
-              <a:buChar char=""/>
-            </a:pPr>
-            <a:r>
-              <a:rPr lang="en-US" sz="3200" b="0" u="none" strike="noStrike">
-                <a:solidFill>
-                  <a:srgbClr val="FFFFFF"/>
-                </a:solidFill>
-                <a:effectLst/>
-                <a:uFillTx/>
-                <a:latin typeface="3270 Nerd Font"/>
-              </a:rPr>
-              <a:t>182 Bit RAM</a:t>
-            </a:r>
-            <a:endParaRPr lang="en-US" sz="3200" b="0" u="none" strike="noStrike">
               <a:solidFill>
                 <a:srgbClr val="FFFFFF"/>
               </a:solidFill>
@@ -11244,7 +11425,7 @@
       </p:sp>
       <p:pic>
         <p:nvPicPr>
-          <p:cNvPr id="49" name=""/>
+          <p:cNvPr id="52" name=""/>
           <p:cNvPicPr/>
           <p:nvPr/>
         </p:nvPicPr>
@@ -11255,9 +11436,9 @@
           <a:stretch/>
         </p:blipFill>
         <p:spPr>
-          <a:xfrm rot="5403600">
-            <a:off x="1409040" y="2017080"/>
-            <a:ext cx="2243520" cy="4536720"/>
+          <a:xfrm>
+            <a:off x="228600" y="2593800"/>
+            <a:ext cx="4343400" cy="2892600"/>
           </a:xfrm>
           <a:prstGeom prst="rect">
             <a:avLst/>
@@ -11270,7 +11451,7 @@
       </p:pic>
       <p:sp>
         <p:nvSpPr>
-          <p:cNvPr id="50" name=""/>
+          <p:cNvPr id="53" name=""/>
           <p:cNvSpPr txBox="1"/>
           <p:nvPr/>
         </p:nvSpPr>
@@ -11301,9 +11482,180 @@
                 <a:uFillTx/>
                 <a:latin typeface="Arial"/>
               </a:rPr>
-              <a:t>[9]</a:t>
+              <a:t>[6]</a:t>
             </a:r>
             <a:endParaRPr lang="en-US" sz="1800" b="0" u="none" strike="noStrike">
+              <a:solidFill>
+                <a:srgbClr val="FFFFFF"/>
+              </a:solidFill>
+              <a:effectLst/>
+              <a:uFillTx/>
+              <a:latin typeface="Arial"/>
+            </a:endParaRPr>
+          </a:p>
+        </p:txBody>
+      </p:sp>
+      <p:sp>
+        <p:nvSpPr>
+          <p:cNvPr id="54" name=""/>
+          <p:cNvSpPr txBox="1"/>
+          <p:nvPr/>
+        </p:nvSpPr>
+        <p:spPr>
+          <a:xfrm>
+            <a:off x="5077080" y="1371600"/>
+            <a:ext cx="4524120" cy="3886200"/>
+          </a:xfrm>
+          <a:prstGeom prst="rect">
+            <a:avLst/>
+          </a:prstGeom>
+          <a:noFill/>
+          <a:ln w="0">
+            <a:noFill/>
+          </a:ln>
+        </p:spPr>
+        <p:txBody>
+          <a:bodyPr lIns="90000" tIns="45000" rIns="90000" bIns="45000" anchor="t">
+            <a:spAutoFit/>
+          </a:bodyPr>
+          <a:p>
+            <a:pPr marL="216000" indent="-216000">
+              <a:spcBef>
+                <a:spcPts val="1191"/>
+              </a:spcBef>
+              <a:spcAft>
+                <a:spcPts val="992"/>
+              </a:spcAft>
+              <a:buClr>
+                <a:srgbClr val="FFFFFF"/>
+              </a:buClr>
+              <a:buSzPct val="85000"/>
+              <a:buFont typeface="Wingdings" charset="2"/>
+              <a:buChar char=""/>
+            </a:pPr>
+            <a:r>
+              <a:rPr lang="en-US" sz="3200" b="0" u="none" strike="noStrike">
+                <a:solidFill>
+                  <a:srgbClr val="FFFFFF"/>
+                </a:solidFill>
+                <a:effectLst/>
+                <a:uFillTx/>
+                <a:latin typeface="3270 Nerd Font"/>
+              </a:rPr>
+              <a:t>Damals 60$ heute 480$ </a:t>
+            </a:r>
+            <a:endParaRPr lang="en-US" sz="3200" b="0" u="none" strike="noStrike">
+              <a:solidFill>
+                <a:srgbClr val="FFFFFF"/>
+              </a:solidFill>
+              <a:effectLst/>
+              <a:uFillTx/>
+              <a:latin typeface="Arial"/>
+            </a:endParaRPr>
+          </a:p>
+          <a:p>
+            <a:pPr marL="216000" indent="-216000">
+              <a:lnSpc>
+                <a:spcPct val="100000"/>
+              </a:lnSpc>
+              <a:spcBef>
+                <a:spcPts val="1191"/>
+              </a:spcBef>
+              <a:spcAft>
+                <a:spcPts val="992"/>
+              </a:spcAft>
+              <a:buClr>
+                <a:srgbClr val="FFFFFF"/>
+              </a:buClr>
+              <a:buSzPct val="85000"/>
+              <a:buFont typeface="Wingdings" charset="2"/>
+              <a:buChar char=""/>
+            </a:pPr>
+            <a:r>
+              <a:rPr lang="en-US" sz="3200" b="0" u="none" strike="noStrike">
+                <a:solidFill>
+                  <a:srgbClr val="FFFFFF"/>
+                </a:solidFill>
+                <a:effectLst/>
+                <a:uFillTx/>
+                <a:latin typeface="3270 Nerd Font"/>
+              </a:rPr>
+              <a:t>4-Bit CPU</a:t>
+            </a:r>
+            <a:endParaRPr lang="en-US" sz="3200" b="0" u="none" strike="noStrike">
+              <a:solidFill>
+                <a:srgbClr val="FFFFFF"/>
+              </a:solidFill>
+              <a:effectLst/>
+              <a:uFillTx/>
+              <a:latin typeface="Arial"/>
+            </a:endParaRPr>
+          </a:p>
+          <a:p>
+            <a:pPr marL="216000" indent="-216000">
+              <a:lnSpc>
+                <a:spcPct val="100000"/>
+              </a:lnSpc>
+              <a:spcBef>
+                <a:spcPts val="1191"/>
+              </a:spcBef>
+              <a:spcAft>
+                <a:spcPts val="992"/>
+              </a:spcAft>
+              <a:buClr>
+                <a:srgbClr val="FFFFFF"/>
+              </a:buClr>
+              <a:buSzPct val="85000"/>
+              <a:buFont typeface="Wingdings" charset="2"/>
+              <a:buChar char=""/>
+            </a:pPr>
+            <a:r>
+              <a:rPr lang="en-US" sz="3200" b="0" u="none" strike="noStrike">
+                <a:solidFill>
+                  <a:srgbClr val="FFFFFF"/>
+                </a:solidFill>
+                <a:effectLst/>
+                <a:uFillTx/>
+                <a:latin typeface="3270 Nerd Font"/>
+              </a:rPr>
+              <a:t>1 Kern</a:t>
+            </a:r>
+            <a:endParaRPr lang="en-US" sz="3200" b="0" u="none" strike="noStrike">
+              <a:solidFill>
+                <a:srgbClr val="FFFFFF"/>
+              </a:solidFill>
+              <a:effectLst/>
+              <a:uFillTx/>
+              <a:latin typeface="Arial"/>
+            </a:endParaRPr>
+          </a:p>
+          <a:p>
+            <a:pPr marL="216000" indent="-216000">
+              <a:spcBef>
+                <a:spcPts val="1191"/>
+              </a:spcBef>
+              <a:spcAft>
+                <a:spcPts val="992"/>
+              </a:spcAft>
+              <a:buClr>
+                <a:srgbClr val="FFFFFF"/>
+              </a:buClr>
+              <a:buSzPct val="85000"/>
+              <a:buFont typeface="Wingdings" charset="2"/>
+              <a:buChar char=""/>
+            </a:pPr>
+            <a:r>
+              <a:rPr lang="en-US" sz="3200" b="0" u="none" strike="noStrike">
+                <a:solidFill>
+                  <a:srgbClr val="FFFFFF"/>
+                </a:solidFill>
+                <a:effectLst/>
+                <a:uFillTx/>
+                <a:latin typeface="3270 Nerd Font"/>
+              </a:rPr>
+              <a:t>740 - 750 kHz</a:t>
+            </a:r>
+            <a:endParaRPr lang="en-US" sz="3200" b="0" u="none" strike="noStrike">
               <a:solidFill>
                 <a:srgbClr val="FFFFFF"/>
               </a:solidFill>
@@ -11316,6 +11668,134 @@
       </p:sp>
     </p:spTree>
   </p:cSld>
+  <p:timing>
+    <p:tnLst>
+      <p:par>
+        <p:cTn id="77" dur="indefinite" restart="never" nodeType="tmRoot">
+          <p:childTnLst>
+            <p:seq>
+              <p:cTn id="78" dur="indefinite" nodeType="mainSeq">
+                <p:childTnLst>
+                  <p:par>
+                    <p:cTn id="79" fill="hold">
+                      <p:stCondLst>
+                        <p:cond delay="indefinite"/>
+                      </p:stCondLst>
+                      <p:childTnLst>
+                        <p:par>
+                          <p:cTn id="80" fill="hold">
+                            <p:stCondLst>
+                              <p:cond delay="0"/>
+                            </p:stCondLst>
+                            <p:childTnLst>
+                              <p:par>
+                                <p:cTn id="81" presetID="1" presetClass="entr" fill="hold" nodeType="clickEffect">
+                                  <p:stCondLst>
+                                    <p:cond delay="0"/>
+                                  </p:stCondLst>
+                                  <p:childTnLst>
+                                    <p:set>
+                                      <p:cBhvr>
+                                        <p:cTn id="82" dur="1" fill="hold">
+                                          <p:stCondLst>
+                                            <p:cond delay="0"/>
+                                          </p:stCondLst>
+                                        </p:cTn>
+                                        <p:tgtEl>
+                                          <p:spTgt spid="54">
+                                            <p:txEl>
+                                              <p:pRg st="0" end="0"/>
+                                            </p:txEl>
+                                          </p:spTgt>
+                                        </p:tgtEl>
+                                        <p:attrNameLst>
+                                          <p:attrName>style.visibility</p:attrName>
+                                        </p:attrNameLst>
+                                      </p:cBhvr>
+                                      <p:to>
+                                        <p:strVal val="visible"/>
+                                      </p:to>
+                                    </p:set>
+                                  </p:childTnLst>
+                                </p:cTn>
+                              </p:par>
+                            </p:childTnLst>
+                          </p:cTn>
+                        </p:par>
+                      </p:childTnLst>
+                    </p:cTn>
+                  </p:par>
+                  <p:par>
+                    <p:cTn id="83" fill="hold">
+                      <p:stCondLst>
+                        <p:cond delay="indefinite"/>
+                      </p:stCondLst>
+                      <p:childTnLst>
+                        <p:par>
+                          <p:cTn id="84" fill="hold">
+                            <p:stCondLst>
+                              <p:cond delay="0"/>
+                            </p:stCondLst>
+                            <p:childTnLst>
+                              <p:par>
+                                <p:cTn id="85" presetID="1" presetClass="entr" fill="hold" nodeType="clickEffect">
+                                  <p:stCondLst>
+                                    <p:cond delay="0"/>
+                                  </p:stCondLst>
+                                  <p:childTnLst>
+                                    <p:set>
+                                      <p:cBhvr>
+                                        <p:cTn id="86" dur="1" fill="hold">
+                                          <p:stCondLst>
+                                            <p:cond delay="0"/>
+                                          </p:stCondLst>
+                                        </p:cTn>
+                                        <p:tgtEl>
+                                          <p:spTgt spid="54">
+                                            <p:txEl>
+                                              <p:pRg st="1" end="1"/>
+                                            </p:txEl>
+                                          </p:spTgt>
+                                        </p:tgtEl>
+                                        <p:attrNameLst>
+                                          <p:attrName>style.visibility</p:attrName>
+                                        </p:attrNameLst>
+                                      </p:cBhvr>
+                                      <p:to>
+                                        <p:strVal val="visible"/>
+                                      </p:to>
+                                    </p:set>
+                                  </p:childTnLst>
+                                </p:cTn>
+                              </p:par>
+                            </p:childTnLst>
+                          </p:cTn>
+                        </p:par>
+                      </p:childTnLst>
+                    </p:cTn>
+                  </p:par>
+                </p:childTnLst>
+              </p:cTn>
+              <p:prevCondLst>
+                <p:cond evt="onPrev">
+                  <p:tgtEl>
+                    <p:sldTgt/>
+                  </p:tgtEl>
+                </p:cond>
+              </p:prevCondLst>
+              <p:nextCondLst>
+                <p:cond evt="onNext">
+                  <p:tgtEl>
+                    <p:sldTgt/>
+                  </p:tgtEl>
+                </p:cond>
+              </p:nextCondLst>
+            </p:seq>
+          </p:childTnLst>
+        </p:cTn>
+      </p:par>
+    </p:tnLst>
+  </p:timing>
 </p:sld>
 </file>
 
